--- a/CarbonCheck.pptx
+++ b/CarbonCheck.pptx
@@ -4,6 +4,9 @@
   <p:sldMasterIdLst>
     <p:sldMasterId id="2147483648" r:id="rId1"/>
   </p:sldMasterIdLst>
+  <p:notesMasterIdLst>
+    <p:notesMasterId r:id="rId24"/>
+  </p:notesMasterIdLst>
   <p:sldIdLst>
     <p:sldId id="256" r:id="rId2"/>
     <p:sldId id="257" r:id="rId3"/>
@@ -28,11 +31,8 @@
     <p:sldId id="276" r:id="rId22"/>
     <p:sldId id="277" r:id="rId23"/>
   </p:sldIdLst>
-  <p:notesMasterIdLst>
-    <p:notesMasterId r:id="rId24"/>
-  </p:notesMasterIdLst>
-  <p:sldSz cx="12191695" cy="6858000"/>
-  <p:notesSz cx="6858000" cy="12191695"/>
+  <p:sldSz cx="12192000" cy="6858000"/>
+  <p:notesSz cx="6858000" cy="12192000"/>
   <p:defaultTextStyle>
     <a:lvl1pPr marL="0" algn="l" defTabSz="914400" rtl="0" eaLnBrk="1" latinLnBrk="0" hangingPunct="1">
       <a:defRPr sz="1800" kern="1200">
@@ -125,6 +125,11 @@
       </a:defRPr>
     </a:lvl9pPr>
   </p:defaultTextStyle>
+  <p:extLst>
+    <p:ext uri="{EFAFB233-063F-42B5-8137-9DF3F51BA10A}">
+      <p15:sldGuideLst xmlns:p15="http://schemas.microsoft.com/office/powerpoint/2012/main"/>
+    </p:ext>
+  </p:extLst>
 </p:presentation>
 </file>
 
@@ -150,234 +155,10 @@
           <a:chExt cx="0" cy="0"/>
         </a:xfrm>
       </p:grpSpPr>
-      <p:sp>
-        <p:nvSpPr>
-          <p:cNvPr id="2" name="Header Placeholder 1"/>
-          <p:cNvSpPr>
-            <a:spLocks noGrp="1"/>
-          </p:cNvSpPr>
-          <p:nvPr>
-            <p:ph type="hdr" sz="quarter"/>
-          </p:nvPr>
-        </p:nvSpPr>
-        <p:spPr>
-          <a:xfrm>
-            <a:off x="0" y="0"/>
-            <a:ext cx="2971800" cy="458788"/>
-          </a:xfrm>
-          <a:prstGeom prst="rect">
-            <a:avLst/>
-          </a:prstGeom>
-        </p:spPr>
-        <p:txBody>
-          <a:bodyPr vert="horz" lIns="91440" tIns="45720" rIns="91440" bIns="45720" rtlCol="0"/>
-          <a:lstStyle>
-            <a:lvl1pPr algn="l">
-              <a:defRPr sz="1200"/>
-            </a:lvl1pPr>
-          </a:lstStyle>
-          <a:p>
-            <a:endParaRPr lang="en-US"/>
-          </a:p>
-        </p:txBody>
-      </p:sp>
-      <p:sp>
-        <p:nvSpPr>
-          <p:cNvPr id="3" name="Date Placeholder 2"/>
-          <p:cNvSpPr>
-            <a:spLocks noGrp="1"/>
-          </p:cNvSpPr>
-          <p:nvPr>
-            <p:ph type="dt" idx="1"/>
-          </p:nvPr>
-        </p:nvSpPr>
-        <p:spPr>
-          <a:xfrm>
-            <a:off x="3884613" y="0"/>
-            <a:ext cx="2971800" cy="458788"/>
-          </a:xfrm>
-          <a:prstGeom prst="rect">
-            <a:avLst/>
-          </a:prstGeom>
-        </p:spPr>
-        <p:txBody>
-          <a:bodyPr vert="horz" lIns="91440" tIns="45720" rIns="91440" bIns="45720" rtlCol="0"/>
-          <a:lstStyle>
-            <a:lvl1pPr algn="r">
-              <a:defRPr sz="1200"/>
-            </a:lvl1pPr>
-          </a:lstStyle>
-          <a:p>
-            <a:fld id="{5282F153-3F37-0F45-9E97-73ACFA13230C}" type="datetimeFigureOut">
-              <a:rPr lang="en-US"/>
-              <a:t>7/23/19</a:t>
-            </a:fld>
-            <a:endParaRPr lang="en-US"/>
-          </a:p>
-        </p:txBody>
-      </p:sp>
-      <p:sp>
-        <p:nvSpPr>
-          <p:cNvPr id="4" name="Slide Image Placeholder 3"/>
-          <p:cNvSpPr>
-            <a:spLocks noGrp="1" noRot="1" noChangeAspect="1"/>
-          </p:cNvSpPr>
-          <p:nvPr>
-            <p:ph type="sldImg" idx="2"/>
-          </p:nvPr>
-        </p:nvSpPr>
-        <p:spPr>
-          <a:xfrm>
-            <a:off x="685800" y="1143000"/>
-            <a:ext cx="5486400" cy="3086100"/>
-          </a:xfrm>
-          <a:prstGeom prst="rect">
-            <a:avLst/>
-          </a:prstGeom>
-          <a:noFill/>
-          <a:ln w="12700">
-            <a:solidFill>
-              <a:prstClr val="black"/>
-            </a:solidFill>
-          </a:ln>
-        </p:spPr>
-        <p:txBody>
-          <a:bodyPr vert="horz" lIns="91440" tIns="45720" rIns="91440" bIns="45720" rtlCol="0" anchor="ctr"/>
-          <a:lstStyle/>
-          <a:p>
-            <a:endParaRPr lang="en-US"/>
-          </a:p>
-        </p:txBody>
-      </p:sp>
-      <p:sp>
-        <p:nvSpPr>
-          <p:cNvPr id="5" name="Notes Placeholder 4"/>
-          <p:cNvSpPr>
-            <a:spLocks noGrp="1"/>
-          </p:cNvSpPr>
-          <p:nvPr>
-            <p:ph type="body" sz="quarter" idx="3"/>
-          </p:nvPr>
-        </p:nvSpPr>
-        <p:spPr>
-          <a:xfrm>
-            <a:off x="685800" y="4400550"/>
-            <a:ext cx="5486400" cy="3600450"/>
-          </a:xfrm>
-          <a:prstGeom prst="rect">
-            <a:avLst/>
-          </a:prstGeom>
-        </p:spPr>
-        <p:txBody>
-          <a:bodyPr vert="horz" lIns="91440" tIns="45720" rIns="91440" bIns="45720" rtlCol="0"/>
-          <a:lstStyle/>
-          <a:p>
-            <a:pPr lvl="0"/>
-            <a:r>
-              <a:rPr lang="en-US"/>
-              <a:t>Click to edit Master text styles</a:t>
-            </a:r>
-          </a:p>
-          <a:p>
-            <a:pPr lvl="1"/>
-            <a:r>
-              <a:rPr lang="en-US"/>
-              <a:t>Second level</a:t>
-            </a:r>
-          </a:p>
-          <a:p>
-            <a:pPr lvl="2"/>
-            <a:r>
-              <a:rPr lang="en-US"/>
-              <a:t>Third level</a:t>
-            </a:r>
-          </a:p>
-          <a:p>
-            <a:pPr lvl="3"/>
-            <a:r>
-              <a:rPr lang="en-US"/>
-              <a:t>Fourth level</a:t>
-            </a:r>
-          </a:p>
-          <a:p>
-            <a:pPr lvl="4"/>
-            <a:r>
-              <a:rPr lang="en-US"/>
-              <a:t>Fifth level</a:t>
-            </a:r>
-          </a:p>
-        </p:txBody>
-      </p:sp>
-      <p:sp>
-        <p:nvSpPr>
-          <p:cNvPr id="6" name="Footer Placeholder 5"/>
-          <p:cNvSpPr>
-            <a:spLocks noGrp="1"/>
-          </p:cNvSpPr>
-          <p:nvPr>
-            <p:ph type="ftr" sz="quarter" idx="4"/>
-          </p:nvPr>
-        </p:nvSpPr>
-        <p:spPr>
-          <a:xfrm>
-            <a:off x="0" y="8685213"/>
-            <a:ext cx="2971800" cy="458787"/>
-          </a:xfrm>
-          <a:prstGeom prst="rect">
-            <a:avLst/>
-          </a:prstGeom>
-        </p:spPr>
-        <p:txBody>
-          <a:bodyPr vert="horz" lIns="91440" tIns="45720" rIns="91440" bIns="45720" rtlCol="0" anchor="b"/>
-          <a:lstStyle>
-            <a:lvl1pPr algn="l">
-              <a:defRPr sz="1200"/>
-            </a:lvl1pPr>
-          </a:lstStyle>
-          <a:p>
-            <a:endParaRPr lang="en-US"/>
-          </a:p>
-        </p:txBody>
-      </p:sp>
-      <p:sp>
-        <p:nvSpPr>
-          <p:cNvPr id="7" name="Slide Number Placeholder 6"/>
-          <p:cNvSpPr>
-            <a:spLocks noGrp="1"/>
-          </p:cNvSpPr>
-          <p:nvPr>
-            <p:ph type="sldNum" sz="quarter" idx="5"/>
-          </p:nvPr>
-        </p:nvSpPr>
-        <p:spPr>
-          <a:xfrm>
-            <a:off x="3884613" y="8685213"/>
-            <a:ext cx="2971800" cy="458787"/>
-          </a:xfrm>
-          <a:prstGeom prst="rect">
-            <a:avLst/>
-          </a:prstGeom>
-        </p:spPr>
-        <p:txBody>
-          <a:bodyPr vert="horz" lIns="91440" tIns="45720" rIns="91440" bIns="45720" rtlCol="0" anchor="b"/>
-          <a:lstStyle>
-            <a:lvl1pPr algn="r">
-              <a:defRPr sz="1200"/>
-            </a:lvl1pPr>
-          </a:lstStyle>
-          <a:p>
-            <a:fld id="{CE5E9CC1-C706-0F49-92D6-E571CC5EEA8F}" type="slidenum">
-              <a:rPr lang="en-US"/>
-              <a:t>‹#›</a:t>
-            </a:fld>
-            <a:endParaRPr lang="en-US"/>
-          </a:p>
-        </p:txBody>
-      </p:sp>
     </p:spTree>
     <p:extLst>
       <p:ext uri="{BB962C8B-B14F-4D97-AF65-F5344CB8AC3E}">
-        <p14:creationId xmlns:p14="http://schemas.microsoft.com/office/powerpoint/2010/main" val="1024086991"/>
+        <p14:creationId xmlns:p14="http://schemas.microsoft.com/office/powerpoint/2010/main" val="1909805209"/>
       </p:ext>
     </p:extLst>
   </p:cSld>
@@ -521,10 +302,6 @@
           <a:bodyPr/>
           <a:lstStyle/>
           <a:p>
-            <a:r>
-              <a:rPr lang="en-US" dirty="0"/>
-              <a:t/>
-            </a:r>
             <a:endParaRPr lang="en-US" dirty="0"/>
           </a:p>
         </p:txBody>
@@ -609,10 +386,6 @@
           <a:bodyPr/>
           <a:lstStyle/>
           <a:p>
-            <a:r>
-              <a:rPr lang="en-US" dirty="0"/>
-              <a:t/>
-            </a:r>
             <a:endParaRPr lang="en-US" dirty="0"/>
           </a:p>
         </p:txBody>
@@ -697,10 +470,6 @@
           <a:bodyPr/>
           <a:lstStyle/>
           <a:p>
-            <a:r>
-              <a:rPr lang="en-US" dirty="0"/>
-              <a:t/>
-            </a:r>
             <a:endParaRPr lang="en-US" dirty="0"/>
           </a:p>
         </p:txBody>
@@ -785,10 +554,6 @@
           <a:bodyPr/>
           <a:lstStyle/>
           <a:p>
-            <a:r>
-              <a:rPr lang="en-US" dirty="0"/>
-              <a:t/>
-            </a:r>
             <a:endParaRPr lang="en-US" dirty="0"/>
           </a:p>
         </p:txBody>
@@ -873,10 +638,6 @@
           <a:bodyPr/>
           <a:lstStyle/>
           <a:p>
-            <a:r>
-              <a:rPr lang="en-US" dirty="0"/>
-              <a:t/>
-            </a:r>
             <a:endParaRPr lang="en-US" dirty="0"/>
           </a:p>
         </p:txBody>
@@ -961,10 +722,6 @@
           <a:bodyPr/>
           <a:lstStyle/>
           <a:p>
-            <a:r>
-              <a:rPr lang="en-US" dirty="0"/>
-              <a:t/>
-            </a:r>
             <a:endParaRPr lang="en-US" dirty="0"/>
           </a:p>
         </p:txBody>
@@ -1049,10 +806,6 @@
           <a:bodyPr/>
           <a:lstStyle/>
           <a:p>
-            <a:r>
-              <a:rPr lang="en-US" dirty="0"/>
-              <a:t/>
-            </a:r>
             <a:endParaRPr lang="en-US" dirty="0"/>
           </a:p>
         </p:txBody>
@@ -1137,10 +890,6 @@
           <a:bodyPr/>
           <a:lstStyle/>
           <a:p>
-            <a:r>
-              <a:rPr lang="en-US" dirty="0"/>
-              <a:t/>
-            </a:r>
             <a:endParaRPr lang="en-US" dirty="0"/>
           </a:p>
         </p:txBody>
@@ -1225,10 +974,6 @@
           <a:bodyPr/>
           <a:lstStyle/>
           <a:p>
-            <a:r>
-              <a:rPr lang="en-US" dirty="0"/>
-              <a:t/>
-            </a:r>
             <a:endParaRPr lang="en-US" dirty="0"/>
           </a:p>
         </p:txBody>
@@ -1313,10 +1058,6 @@
           <a:bodyPr/>
           <a:lstStyle/>
           <a:p>
-            <a:r>
-              <a:rPr lang="en-US" dirty="0"/>
-              <a:t/>
-            </a:r>
             <a:endParaRPr lang="en-US" dirty="0"/>
           </a:p>
         </p:txBody>
@@ -1401,10 +1142,6 @@
           <a:bodyPr/>
           <a:lstStyle/>
           <a:p>
-            <a:r>
-              <a:rPr lang="en-US" dirty="0"/>
-              <a:t/>
-            </a:r>
             <a:endParaRPr lang="en-US" dirty="0"/>
           </a:p>
         </p:txBody>
@@ -1489,10 +1226,6 @@
           <a:bodyPr/>
           <a:lstStyle/>
           <a:p>
-            <a:r>
-              <a:rPr lang="en-US" dirty="0"/>
-              <a:t/>
-            </a:r>
             <a:endParaRPr lang="en-US" dirty="0"/>
           </a:p>
         </p:txBody>
@@ -1577,10 +1310,6 @@
           <a:bodyPr/>
           <a:lstStyle/>
           <a:p>
-            <a:r>
-              <a:rPr lang="en-US" dirty="0"/>
-              <a:t/>
-            </a:r>
             <a:endParaRPr lang="en-US" dirty="0"/>
           </a:p>
         </p:txBody>
@@ -1665,10 +1394,6 @@
           <a:bodyPr/>
           <a:lstStyle/>
           <a:p>
-            <a:r>
-              <a:rPr lang="en-US" dirty="0"/>
-              <a:t/>
-            </a:r>
             <a:endParaRPr lang="en-US" dirty="0"/>
           </a:p>
         </p:txBody>
@@ -1753,10 +1478,6 @@
           <a:bodyPr/>
           <a:lstStyle/>
           <a:p>
-            <a:r>
-              <a:rPr lang="en-US" dirty="0"/>
-              <a:t/>
-            </a:r>
             <a:endParaRPr lang="en-US" dirty="0"/>
           </a:p>
         </p:txBody>
@@ -1841,10 +1562,6 @@
           <a:bodyPr/>
           <a:lstStyle/>
           <a:p>
-            <a:r>
-              <a:rPr lang="en-US" dirty="0"/>
-              <a:t/>
-            </a:r>
             <a:endParaRPr lang="en-US" dirty="0"/>
           </a:p>
         </p:txBody>
@@ -1929,10 +1646,6 @@
           <a:bodyPr/>
           <a:lstStyle/>
           <a:p>
-            <a:r>
-              <a:rPr lang="en-US" dirty="0"/>
-              <a:t/>
-            </a:r>
             <a:endParaRPr lang="en-US" dirty="0"/>
           </a:p>
         </p:txBody>
@@ -2017,10 +1730,6 @@
           <a:bodyPr/>
           <a:lstStyle/>
           <a:p>
-            <a:r>
-              <a:rPr lang="en-US" dirty="0"/>
-              <a:t/>
-            </a:r>
             <a:endParaRPr lang="en-US" dirty="0"/>
           </a:p>
         </p:txBody>
@@ -2105,10 +1814,6 @@
           <a:bodyPr/>
           <a:lstStyle/>
           <a:p>
-            <a:r>
-              <a:rPr lang="en-US" dirty="0"/>
-              <a:t/>
-            </a:r>
             <a:endParaRPr lang="en-US" dirty="0"/>
           </a:p>
         </p:txBody>
@@ -2193,10 +1898,6 @@
           <a:bodyPr/>
           <a:lstStyle/>
           <a:p>
-            <a:r>
-              <a:rPr lang="en-US" dirty="0"/>
-              <a:t/>
-            </a:r>
             <a:endParaRPr lang="en-US" dirty="0"/>
           </a:p>
         </p:txBody>
@@ -2281,10 +1982,6 @@
           <a:bodyPr/>
           <a:lstStyle/>
           <a:p>
-            <a:r>
-              <a:rPr lang="en-US" dirty="0"/>
-              <a:t/>
-            </a:r>
             <a:endParaRPr lang="en-US" dirty="0"/>
           </a:p>
         </p:txBody>
@@ -2369,10 +2066,6 @@
           <a:bodyPr/>
           <a:lstStyle/>
           <a:p>
-            <a:r>
-              <a:rPr lang="en-US" dirty="0"/>
-              <a:t/>
-            </a:r>
             <a:endParaRPr lang="en-US" dirty="0"/>
           </a:p>
         </p:txBody>
@@ -2446,6 +2139,11 @@
 <file path=ppt/slideMasters/slideMaster1.xml><?xml version="1.0" encoding="utf-8"?>
 <p:sldMaster xmlns:a="http://schemas.openxmlformats.org/drawingml/2006/main" xmlns:r="http://schemas.openxmlformats.org/officeDocument/2006/relationships" xmlns:p="http://schemas.openxmlformats.org/presentationml/2006/main">
   <p:cSld>
+    <p:bg>
+      <p:bgRef idx="1001">
+        <a:schemeClr val="bg1"/>
+      </p:bgRef>
+    </p:bg>
     <p:spTree>
       <p:nvGrpSpPr>
         <p:cNvPr id="1" name=""/>
@@ -2726,7 +2424,7 @@
     <p:bg>
       <p:bgPr>
         <a:blipFill dpi="0" rotWithShape="1">
-          <a:blip r:embed="rId1">
+          <a:blip r:embed="rId3">
             <a:lum/>
           </a:blip>
           <a:srcRect/>
@@ -2782,14 +2480,14 @@
       </p:sp>
       <p:pic>
         <p:nvPicPr>
-          <p:cNvPr id="3" name="Image 0" descr="/home/claude/carboncheck/icons/network_white.png">    </p:cNvPr>
+          <p:cNvPr id="3" name="Image 0" descr="/home/claude/carboncheck/icons/network_white.png"/>
           <p:cNvPicPr>
             <a:picLocks noChangeAspect="1"/>
           </p:cNvPicPr>
           <p:nvPr/>
         </p:nvPicPr>
         <p:blipFill>
-          <a:blip r:embed="rId2"/>
+          <a:blip r:embed="rId4"/>
           <a:stretch>
             <a:fillRect/>
           </a:stretch>
@@ -2835,99 +2533,7 @@
       </p:sp>
       <p:pic>
         <p:nvPicPr>
-          <p:cNvPr id="5" name="Image 1" descr="/home/claude/carboncheck/icons/earth_white.png">    </p:cNvPr>
-          <p:cNvPicPr>
-            <a:picLocks noChangeAspect="1"/>
-          </p:cNvPicPr>
-          <p:nvPr/>
-        </p:nvPicPr>
-        <p:blipFill>
-          <a:blip r:embed="rId3"/>
-          <a:stretch>
-            <a:fillRect/>
-          </a:stretch>
-        </p:blipFill>
-        <p:spPr>
-          <a:xfrm>
-            <a:off x="10195560" y="3749040"/>
-            <a:ext cx="1188720" cy="1188720"/>
-          </a:xfrm>
-          <a:prstGeom prst="rect">
-            <a:avLst/>
-          </a:prstGeom>
-        </p:spPr>
-      </p:pic>
-      <p:sp>
-        <p:nvSpPr>
-          <p:cNvPr id="6" name="Shape 2"/>
-          <p:cNvSpPr/>
-          <p:nvPr/>
-        </p:nvSpPr>
-        <p:spPr>
-          <a:xfrm>
-            <a:off x="10607040" y="1737360"/>
-            <a:ext cx="822960" cy="822960"/>
-          </a:xfrm>
-          <a:prstGeom prst="ellipse">
-            <a:avLst/>
-          </a:prstGeom>
-          <a:solidFill>
-            <a:srgbClr val="52D68D">
-              <a:alpha val="18000"/>
-            </a:srgbClr>
-          </a:solidFill>
-          <a:ln/>
-        </p:spPr>
-      </p:sp>
-      <p:pic>
-        <p:nvPicPr>
-          <p:cNvPr id="7" name="Image 2" descr="/home/claude/carboncheck/icons/leaf_white.png">    </p:cNvPr>
-          <p:cNvPicPr>
-            <a:picLocks noChangeAspect="1"/>
-          </p:cNvPicPr>
-          <p:nvPr/>
-        </p:nvPicPr>
-        <p:blipFill>
-          <a:blip r:embed="rId4"/>
-          <a:stretch>
-            <a:fillRect/>
-          </a:stretch>
-        </p:blipFill>
-        <p:spPr>
-          <a:xfrm>
-            <a:off x="10817352" y="1947672"/>
-            <a:ext cx="402336" cy="402336"/>
-          </a:xfrm>
-          <a:prstGeom prst="rect">
-            <a:avLst/>
-          </a:prstGeom>
-        </p:spPr>
-      </p:pic>
-      <p:sp>
-        <p:nvSpPr>
-          <p:cNvPr id="8" name="Shape 3"/>
-          <p:cNvSpPr/>
-          <p:nvPr/>
-        </p:nvSpPr>
-        <p:spPr>
-          <a:xfrm>
-            <a:off x="457200" y="5212080"/>
-            <a:ext cx="731520" cy="731520"/>
-          </a:xfrm>
-          <a:prstGeom prst="ellipse">
-            <a:avLst/>
-          </a:prstGeom>
-          <a:solidFill>
-            <a:srgbClr val="52D68D">
-              <a:alpha val="15000"/>
-            </a:srgbClr>
-          </a:solidFill>
-          <a:ln/>
-        </p:spPr>
-      </p:sp>
-      <p:pic>
-        <p:nvPicPr>
-          <p:cNvPr id="9" name="Image 3" descr="/home/claude/carboncheck/icons/leaf_white.png">    </p:cNvPr>
+          <p:cNvPr id="5" name="Image 1" descr="/home/claude/carboncheck/icons/earth_white.png"/>
           <p:cNvPicPr>
             <a:picLocks noChangeAspect="1"/>
           </p:cNvPicPr>
@@ -2941,6 +2547,98 @@
         </p:blipFill>
         <p:spPr>
           <a:xfrm>
+            <a:off x="10195560" y="3749040"/>
+            <a:ext cx="1188720" cy="1188720"/>
+          </a:xfrm>
+          <a:prstGeom prst="rect">
+            <a:avLst/>
+          </a:prstGeom>
+        </p:spPr>
+      </p:pic>
+      <p:sp>
+        <p:nvSpPr>
+          <p:cNvPr id="6" name="Shape 2"/>
+          <p:cNvSpPr/>
+          <p:nvPr/>
+        </p:nvSpPr>
+        <p:spPr>
+          <a:xfrm>
+            <a:off x="10607040" y="1737360"/>
+            <a:ext cx="822960" cy="822960"/>
+          </a:xfrm>
+          <a:prstGeom prst="ellipse">
+            <a:avLst/>
+          </a:prstGeom>
+          <a:solidFill>
+            <a:srgbClr val="52D68D">
+              <a:alpha val="18000"/>
+            </a:srgbClr>
+          </a:solidFill>
+          <a:ln/>
+        </p:spPr>
+      </p:sp>
+      <p:pic>
+        <p:nvPicPr>
+          <p:cNvPr id="7" name="Image 2" descr="/home/claude/carboncheck/icons/leaf_white.png"/>
+          <p:cNvPicPr>
+            <a:picLocks noChangeAspect="1"/>
+          </p:cNvPicPr>
+          <p:nvPr/>
+        </p:nvPicPr>
+        <p:blipFill>
+          <a:blip r:embed="rId6"/>
+          <a:stretch>
+            <a:fillRect/>
+          </a:stretch>
+        </p:blipFill>
+        <p:spPr>
+          <a:xfrm>
+            <a:off x="10817352" y="1947672"/>
+            <a:ext cx="402336" cy="402336"/>
+          </a:xfrm>
+          <a:prstGeom prst="rect">
+            <a:avLst/>
+          </a:prstGeom>
+        </p:spPr>
+      </p:pic>
+      <p:sp>
+        <p:nvSpPr>
+          <p:cNvPr id="8" name="Shape 3"/>
+          <p:cNvSpPr/>
+          <p:nvPr/>
+        </p:nvSpPr>
+        <p:spPr>
+          <a:xfrm>
+            <a:off x="457200" y="5212080"/>
+            <a:ext cx="731520" cy="731520"/>
+          </a:xfrm>
+          <a:prstGeom prst="ellipse">
+            <a:avLst/>
+          </a:prstGeom>
+          <a:solidFill>
+            <a:srgbClr val="52D68D">
+              <a:alpha val="15000"/>
+            </a:srgbClr>
+          </a:solidFill>
+          <a:ln/>
+        </p:spPr>
+      </p:sp>
+      <p:pic>
+        <p:nvPicPr>
+          <p:cNvPr id="9" name="Image 3" descr="/home/claude/carboncheck/icons/leaf_white.png"/>
+          <p:cNvPicPr>
+            <a:picLocks noChangeAspect="1"/>
+          </p:cNvPicPr>
+          <p:nvPr/>
+        </p:nvPicPr>
+        <p:blipFill>
+          <a:blip r:embed="rId6"/>
+          <a:stretch>
+            <a:fillRect/>
+          </a:stretch>
+        </p:blipFill>
+        <p:spPr>
+          <a:xfrm>
             <a:off x="640080" y="5394960"/>
             <a:ext cx="365760" cy="365760"/>
           </a:xfrm>
@@ -2970,11 +2668,11 @@
           <a:bodyPr wrap="square" rtlCol="0" anchor="ctr"/>
           <a:lstStyle/>
           <a:p>
-            <a:pPr indent="0" marL="0">
-              <a:buNone/>
-            </a:pPr>
-            <a:r>
-              <a:rPr lang="en-US" sz="1300" b="1" spc="300" kern="0" dirty="0">
+            <a:pPr marL="0" indent="0">
+              <a:buNone/>
+            </a:pPr>
+            <a:r>
+              <a:rPr lang="en-US" sz="1300" b="1" kern="0" spc="300" dirty="0">
                 <a:solidFill>
                   <a:srgbClr val="52D68D"/>
                 </a:solidFill>
@@ -3009,7 +2707,7 @@
           <a:bodyPr wrap="square" rtlCol="0" anchor="ctr"/>
           <a:lstStyle/>
           <a:p>
-            <a:pPr indent="0" marL="0">
+            <a:pPr marL="0" indent="0">
               <a:buNone/>
             </a:pPr>
             <a:r>
@@ -3048,7 +2746,7 @@
           <a:bodyPr wrap="square" rtlCol="0" anchor="ctr"/>
           <a:lstStyle/>
           <a:p>
-            <a:pPr indent="0" marL="0">
+            <a:pPr marL="0" indent="0">
               <a:buNone/>
             </a:pPr>
             <a:r>
@@ -3087,7 +2785,7 @@
           <a:bodyPr wrap="square" rtlCol="0" anchor="ctr"/>
           <a:lstStyle/>
           <a:p>
-            <a:pPr indent="0" marL="0">
+            <a:pPr marL="0" indent="0">
               <a:buNone/>
             </a:pPr>
             <a:r>
@@ -3113,7 +2811,7 @@
         </p:nvSpPr>
         <p:spPr>
           <a:xfrm>
-            <a:off x="640080" y="4709160"/>
+            <a:off x="411480" y="4667359"/>
             <a:ext cx="8046720" cy="1600200"/>
           </a:xfrm>
           <a:prstGeom prst="roundRect">
@@ -3133,33 +2831,12 @@
             <a:prstDash val="solid"/>
           </a:ln>
         </p:spPr>
-      </p:sp>
-      <p:sp>
-        <p:nvSpPr>
-          <p:cNvPr id="15" name="Text 9"/>
-          <p:cNvSpPr/>
-          <p:nvPr/>
-        </p:nvSpPr>
-        <p:spPr>
-          <a:xfrm>
-            <a:off x="914400" y="4873752"/>
-            <a:ext cx="3566160" cy="219456"/>
-          </a:xfrm>
-          <a:prstGeom prst="rect">
-            <a:avLst/>
-          </a:prstGeom>
-          <a:noFill/>
-          <a:ln/>
-        </p:spPr>
-        <p:txBody>
-          <a:bodyPr wrap="square" rtlCol="0" anchor="ctr"/>
-          <a:lstStyle/>
-          <a:p>
-            <a:pPr indent="0" marL="0">
-              <a:buNone/>
-            </a:pPr>
-            <a:r>
-              <a:rPr lang="en-US" sz="850" b="1" spc="100" kern="0" dirty="0">
+        <p:txBody>
+          <a:bodyPr/>
+          <a:lstStyle/>
+          <a:p>
+            <a:r>
+              <a:rPr lang="en-US" b="1" kern="0" spc="100" dirty="0">
                 <a:solidFill>
                   <a:srgbClr val="52D68D"/>
                 </a:solidFill>
@@ -3167,38 +2844,12 @@
                 <a:ea typeface="Arial" pitchFamily="34" charset="-122"/>
                 <a:cs typeface="Arial" pitchFamily="34" charset="-120"/>
               </a:rPr>
-              <a:t>UNIVERSITY LOGO</a:t>
-            </a:r>
-            <a:endParaRPr lang="en-US" sz="850" dirty="0"/>
-          </a:p>
-        </p:txBody>
-      </p:sp>
-      <p:sp>
-        <p:nvSpPr>
-          <p:cNvPr id="16" name="Text 10"/>
-          <p:cNvSpPr/>
-          <p:nvPr/>
-        </p:nvSpPr>
-        <p:spPr>
-          <a:xfrm>
-            <a:off x="914400" y="5074920"/>
-            <a:ext cx="3566160" cy="274320"/>
-          </a:xfrm>
-          <a:prstGeom prst="rect">
-            <a:avLst/>
-          </a:prstGeom>
-          <a:noFill/>
-          <a:ln/>
-        </p:spPr>
-        <p:txBody>
-          <a:bodyPr wrap="square" rtlCol="0" anchor="ctr"/>
-          <a:lstStyle/>
-          <a:p>
-            <a:pPr indent="0" marL="0">
-              <a:buNone/>
-            </a:pPr>
-            <a:r>
-              <a:rPr lang="en-US" sz="1200" dirty="0">
+              <a:t>DEPARTMENT</a:t>
+            </a:r>
+          </a:p>
+          <a:p>
+            <a:r>
+              <a:rPr lang="en-US" dirty="0">
                 <a:solidFill>
                   <a:srgbClr val="FFFFFF"/>
                 </a:solidFill>
@@ -3206,8 +2857,67 @@
                 <a:ea typeface="Arial" pitchFamily="34" charset="-122"/>
                 <a:cs typeface="Arial" pitchFamily="34" charset="-120"/>
               </a:rPr>
-              <a:t>[ University Logo Placeholder ]</a:t>
-            </a:r>
+              <a:t>[ Computer Engineering]</a:t>
+            </a:r>
+            <a:endParaRPr lang="en-US" dirty="0"/>
+          </a:p>
+          <a:p>
+            <a:endParaRPr lang="en-IN" dirty="0"/>
+          </a:p>
+        </p:txBody>
+      </p:sp>
+      <p:sp>
+        <p:nvSpPr>
+          <p:cNvPr id="15" name="Text 9"/>
+          <p:cNvSpPr/>
+          <p:nvPr/>
+        </p:nvSpPr>
+        <p:spPr>
+          <a:xfrm>
+            <a:off x="914400" y="4873752"/>
+            <a:ext cx="3566160" cy="219456"/>
+          </a:xfrm>
+          <a:prstGeom prst="rect">
+            <a:avLst/>
+          </a:prstGeom>
+          <a:noFill/>
+          <a:ln/>
+        </p:spPr>
+        <p:txBody>
+          <a:bodyPr wrap="square" rtlCol="0" anchor="ctr"/>
+          <a:lstStyle/>
+          <a:p>
+            <a:pPr marL="0" indent="0">
+              <a:buNone/>
+            </a:pPr>
+            <a:endParaRPr lang="en-US" sz="850" dirty="0"/>
+          </a:p>
+        </p:txBody>
+      </p:sp>
+      <p:sp>
+        <p:nvSpPr>
+          <p:cNvPr id="16" name="Text 10"/>
+          <p:cNvSpPr/>
+          <p:nvPr/>
+        </p:nvSpPr>
+        <p:spPr>
+          <a:xfrm>
+            <a:off x="914400" y="5074920"/>
+            <a:ext cx="3566160" cy="274320"/>
+          </a:xfrm>
+          <a:prstGeom prst="rect">
+            <a:avLst/>
+          </a:prstGeom>
+          <a:noFill/>
+          <a:ln/>
+        </p:spPr>
+        <p:txBody>
+          <a:bodyPr wrap="square" rtlCol="0" anchor="ctr"/>
+          <a:lstStyle/>
+          <a:p>
+            <a:pPr marL="0" indent="0">
+              <a:buNone/>
+            </a:pPr>
             <a:endParaRPr lang="en-US" sz="1200" dirty="0"/>
           </a:p>
         </p:txBody>
@@ -3233,11 +2943,11 @@
           <a:bodyPr wrap="square" rtlCol="0" anchor="ctr"/>
           <a:lstStyle/>
           <a:p>
-            <a:pPr indent="0" marL="0">
-              <a:buNone/>
-            </a:pPr>
-            <a:r>
-              <a:rPr lang="en-US" sz="850" b="1" spc="100" kern="0" dirty="0">
+            <a:pPr marL="0" indent="0">
+              <a:buNone/>
+            </a:pPr>
+            <a:r>
+              <a:rPr lang="en-US" sz="850" b="1" kern="0" spc="100" dirty="0">
                 <a:solidFill>
                   <a:srgbClr val="52D68D"/>
                 </a:solidFill>
@@ -3272,7 +2982,46 @@
           <a:bodyPr wrap="square" rtlCol="0" anchor="ctr"/>
           <a:lstStyle/>
           <a:p>
-            <a:pPr indent="0" marL="0">
+            <a:pPr marL="0" indent="0">
+              <a:buNone/>
+            </a:pPr>
+            <a:endParaRPr lang="en-US" sz="1200" dirty="0">
+              <a:solidFill>
+                <a:srgbClr val="FFFFFF"/>
+              </a:solidFill>
+              <a:latin typeface="Arial" pitchFamily="34" charset="0"/>
+              <a:ea typeface="Arial" pitchFamily="34" charset="-122"/>
+              <a:cs typeface="Arial" pitchFamily="34" charset="-120"/>
+            </a:endParaRPr>
+          </a:p>
+          <a:p>
+            <a:pPr marL="0" indent="0">
+              <a:buNone/>
+            </a:pPr>
+            <a:endParaRPr lang="en-US" sz="1200" dirty="0">
+              <a:solidFill>
+                <a:srgbClr val="FFFFFF"/>
+              </a:solidFill>
+              <a:latin typeface="Arial" pitchFamily="34" charset="0"/>
+              <a:ea typeface="Arial" pitchFamily="34" charset="-122"/>
+              <a:cs typeface="Arial" pitchFamily="34" charset="-120"/>
+            </a:endParaRPr>
+          </a:p>
+          <a:p>
+            <a:pPr marL="0" indent="0">
+              <a:buNone/>
+            </a:pPr>
+            <a:endParaRPr lang="en-US" sz="1200" dirty="0">
+              <a:solidFill>
+                <a:srgbClr val="FFFFFF"/>
+              </a:solidFill>
+              <a:latin typeface="Arial" pitchFamily="34" charset="0"/>
+              <a:ea typeface="Arial" pitchFamily="34" charset="-122"/>
+              <a:cs typeface="Arial" pitchFamily="34" charset="-120"/>
+            </a:endParaRPr>
+          </a:p>
+          <a:p>
+            <a:pPr marL="0" indent="0">
               <a:buNone/>
             </a:pPr>
             <a:r>
@@ -3284,75 +3033,43 @@
                 <a:ea typeface="Arial" pitchFamily="34" charset="-122"/>
                 <a:cs typeface="Arial" pitchFamily="34" charset="-120"/>
               </a:rPr>
-              <a:t>[ Student Name Placeholder ]</a:t>
-            </a:r>
-            <a:endParaRPr lang="en-US" sz="1200" dirty="0"/>
-          </a:p>
-        </p:txBody>
-      </p:sp>
-      <p:sp>
-        <p:nvSpPr>
-          <p:cNvPr id="19" name="Text 13"/>
-          <p:cNvSpPr/>
-          <p:nvPr/>
-        </p:nvSpPr>
-        <p:spPr>
-          <a:xfrm>
-            <a:off x="914400" y="5404104"/>
-            <a:ext cx="3566160" cy="219456"/>
-          </a:xfrm>
-          <a:prstGeom prst="rect">
-            <a:avLst/>
-          </a:prstGeom>
-          <a:noFill/>
-          <a:ln/>
-        </p:spPr>
-        <p:txBody>
-          <a:bodyPr wrap="square" rtlCol="0" anchor="ctr"/>
-          <a:lstStyle/>
-          <a:p>
-            <a:pPr indent="0" marL="0">
-              <a:buNone/>
-            </a:pPr>
-            <a:r>
-              <a:rPr lang="en-US" sz="850" b="1" spc="100" kern="0" dirty="0">
-                <a:solidFill>
-                  <a:srgbClr val="52D68D"/>
+              <a:t>[ Adarsh Mishra </a:t>
+            </a:r>
+          </a:p>
+          <a:p>
+            <a:r>
+              <a:rPr lang="en-US" sz="1200" dirty="0">
+                <a:solidFill>
+                  <a:srgbClr val="FFFFFF"/>
                 </a:solidFill>
                 <a:latin typeface="Arial" pitchFamily="34" charset="0"/>
                 <a:ea typeface="Arial" pitchFamily="34" charset="-122"/>
                 <a:cs typeface="Arial" pitchFamily="34" charset="-120"/>
               </a:rPr>
-              <a:t>GUIDE NAME</a:t>
-            </a:r>
-            <a:endParaRPr lang="en-US" sz="850" dirty="0"/>
-          </a:p>
-        </p:txBody>
-      </p:sp>
-      <p:sp>
-        <p:nvSpPr>
-          <p:cNvPr id="20" name="Text 14"/>
-          <p:cNvSpPr/>
-          <p:nvPr/>
-        </p:nvSpPr>
-        <p:spPr>
-          <a:xfrm>
-            <a:off x="914400" y="5605272"/>
-            <a:ext cx="3566160" cy="274320"/>
-          </a:xfrm>
-          <a:prstGeom prst="rect">
-            <a:avLst/>
-          </a:prstGeom>
-          <a:noFill/>
-          <a:ln/>
-        </p:spPr>
-        <p:txBody>
-          <a:bodyPr wrap="square" rtlCol="0" anchor="ctr"/>
-          <a:lstStyle/>
-          <a:p>
-            <a:pPr indent="0" marL="0">
-              <a:buNone/>
-            </a:pPr>
+              <a:t>Shriya Vyas</a:t>
+            </a:r>
+          </a:p>
+          <a:p>
+            <a:r>
+              <a:rPr lang="en-IN" sz="1200" dirty="0">
+                <a:solidFill>
+                  <a:schemeClr val="bg1"/>
+                </a:solidFill>
+                <a:latin typeface="Arial" panose="020B0604020202020204" pitchFamily="34" charset="0"/>
+                <a:cs typeface="Arial" panose="020B0604020202020204" pitchFamily="34" charset="0"/>
+              </a:rPr>
+              <a:t>Bansari Makwana</a:t>
+            </a:r>
+            <a:endParaRPr lang="en-US" sz="1200" dirty="0">
+              <a:solidFill>
+                <a:schemeClr val="bg1"/>
+              </a:solidFill>
+              <a:latin typeface="Arial" panose="020B0604020202020204" pitchFamily="34" charset="0"/>
+              <a:ea typeface="Arial" pitchFamily="34" charset="-122"/>
+              <a:cs typeface="Arial" panose="020B0604020202020204" pitchFamily="34" charset="0"/>
+            </a:endParaRPr>
+          </a:p>
+          <a:p>
             <a:r>
               <a:rPr lang="en-US" sz="1200" dirty="0">
                 <a:solidFill>
@@ -3362,8 +3079,64 @@
                 <a:ea typeface="Arial" pitchFamily="34" charset="-122"/>
                 <a:cs typeface="Arial" pitchFamily="34" charset="-120"/>
               </a:rPr>
-              <a:t>[ Guide Name Placeholder ]</a:t>
-            </a:r>
+              <a:t>]</a:t>
+            </a:r>
+            <a:endParaRPr lang="en-US" sz="1200" dirty="0"/>
+          </a:p>
+        </p:txBody>
+      </p:sp>
+      <p:sp>
+        <p:nvSpPr>
+          <p:cNvPr id="19" name="Text 13"/>
+          <p:cNvSpPr/>
+          <p:nvPr/>
+        </p:nvSpPr>
+        <p:spPr>
+          <a:xfrm>
+            <a:off x="914400" y="5404104"/>
+            <a:ext cx="3566160" cy="219456"/>
+          </a:xfrm>
+          <a:prstGeom prst="rect">
+            <a:avLst/>
+          </a:prstGeom>
+          <a:noFill/>
+          <a:ln/>
+        </p:spPr>
+        <p:txBody>
+          <a:bodyPr wrap="square" rtlCol="0" anchor="ctr"/>
+          <a:lstStyle/>
+          <a:p>
+            <a:pPr marL="0" indent="0">
+              <a:buNone/>
+            </a:pPr>
+            <a:endParaRPr lang="en-US" sz="850" dirty="0"/>
+          </a:p>
+        </p:txBody>
+      </p:sp>
+      <p:sp>
+        <p:nvSpPr>
+          <p:cNvPr id="20" name="Text 14"/>
+          <p:cNvSpPr/>
+          <p:nvPr/>
+        </p:nvSpPr>
+        <p:spPr>
+          <a:xfrm>
+            <a:off x="914400" y="5605272"/>
+            <a:ext cx="3566160" cy="274320"/>
+          </a:xfrm>
+          <a:prstGeom prst="rect">
+            <a:avLst/>
+          </a:prstGeom>
+          <a:noFill/>
+          <a:ln/>
+        </p:spPr>
+        <p:txBody>
+          <a:bodyPr wrap="square" rtlCol="0" anchor="ctr"/>
+          <a:lstStyle/>
+          <a:p>
+            <a:pPr marL="0" indent="0">
+              <a:buNone/>
+            </a:pPr>
             <a:endParaRPr lang="en-US" sz="1200" dirty="0"/>
           </a:p>
         </p:txBody>
@@ -3389,252 +3162,186 @@
           <a:bodyPr wrap="square" rtlCol="0" anchor="ctr"/>
           <a:lstStyle/>
           <a:p>
-            <a:pPr indent="0" marL="0">
-              <a:buNone/>
-            </a:pPr>
-            <a:r>
-              <a:rPr lang="en-US" sz="850" b="1" spc="100" kern="0" dirty="0">
-                <a:solidFill>
-                  <a:srgbClr val="52D68D"/>
+            <a:pPr marL="0" indent="0">
+              <a:buNone/>
+            </a:pPr>
+            <a:endParaRPr lang="en-US" sz="850" dirty="0"/>
+          </a:p>
+        </p:txBody>
+      </p:sp>
+      <p:sp>
+        <p:nvSpPr>
+          <p:cNvPr id="22" name="Text 16"/>
+          <p:cNvSpPr/>
+          <p:nvPr/>
+        </p:nvSpPr>
+        <p:spPr>
+          <a:xfrm>
+            <a:off x="4754880" y="5605272"/>
+            <a:ext cx="3566160" cy="274320"/>
+          </a:xfrm>
+          <a:prstGeom prst="rect">
+            <a:avLst/>
+          </a:prstGeom>
+          <a:noFill/>
+          <a:ln/>
+        </p:spPr>
+        <p:txBody>
+          <a:bodyPr wrap="square" rtlCol="0" anchor="ctr"/>
+          <a:lstStyle/>
+          <a:p>
+            <a:pPr marL="0" indent="0">
+              <a:buNone/>
+            </a:pPr>
+            <a:endParaRPr lang="en-US" sz="1200" dirty="0"/>
+          </a:p>
+        </p:txBody>
+      </p:sp>
+      <p:sp>
+        <p:nvSpPr>
+          <p:cNvPr id="23" name="Text 17"/>
+          <p:cNvSpPr/>
+          <p:nvPr/>
+        </p:nvSpPr>
+        <p:spPr>
+          <a:xfrm>
+            <a:off x="914400" y="5934456"/>
+            <a:ext cx="3566160" cy="219456"/>
+          </a:xfrm>
+          <a:prstGeom prst="rect">
+            <a:avLst/>
+          </a:prstGeom>
+          <a:noFill/>
+          <a:ln/>
+        </p:spPr>
+        <p:txBody>
+          <a:bodyPr wrap="square" rtlCol="0" anchor="ctr"/>
+          <a:lstStyle/>
+          <a:p>
+            <a:pPr marL="0" indent="0">
+              <a:buNone/>
+            </a:pPr>
+            <a:endParaRPr lang="en-US" sz="850" dirty="0"/>
+          </a:p>
+        </p:txBody>
+      </p:sp>
+      <p:sp>
+        <p:nvSpPr>
+          <p:cNvPr id="24" name="Text 18"/>
+          <p:cNvSpPr/>
+          <p:nvPr/>
+        </p:nvSpPr>
+        <p:spPr>
+          <a:xfrm>
+            <a:off x="914400" y="6135624"/>
+            <a:ext cx="3566160" cy="274320"/>
+          </a:xfrm>
+          <a:prstGeom prst="rect">
+            <a:avLst/>
+          </a:prstGeom>
+          <a:noFill/>
+          <a:ln/>
+        </p:spPr>
+        <p:txBody>
+          <a:bodyPr wrap="square" rtlCol="0" anchor="ctr"/>
+          <a:lstStyle/>
+          <a:p>
+            <a:pPr marL="0" indent="0">
+              <a:buNone/>
+            </a:pPr>
+            <a:endParaRPr lang="en-US" sz="1200" dirty="0"/>
+          </a:p>
+        </p:txBody>
+      </p:sp>
+      <p:sp>
+        <p:nvSpPr>
+          <p:cNvPr id="25" name="Text 19"/>
+          <p:cNvSpPr/>
+          <p:nvPr/>
+        </p:nvSpPr>
+        <p:spPr>
+          <a:xfrm>
+            <a:off x="4754880" y="5934456"/>
+            <a:ext cx="3566160" cy="219456"/>
+          </a:xfrm>
+          <a:prstGeom prst="rect">
+            <a:avLst/>
+          </a:prstGeom>
+          <a:noFill/>
+          <a:ln/>
+        </p:spPr>
+        <p:txBody>
+          <a:bodyPr wrap="square" rtlCol="0" anchor="ctr"/>
+          <a:lstStyle/>
+          <a:p>
+            <a:pPr marL="0" indent="0">
+              <a:buNone/>
+            </a:pPr>
+            <a:endParaRPr lang="en-US" sz="850" dirty="0"/>
+          </a:p>
+        </p:txBody>
+      </p:sp>
+      <p:sp>
+        <p:nvSpPr>
+          <p:cNvPr id="26" name="Text 20"/>
+          <p:cNvSpPr/>
+          <p:nvPr/>
+        </p:nvSpPr>
+        <p:spPr>
+          <a:xfrm>
+            <a:off x="4754880" y="6135624"/>
+            <a:ext cx="3566160" cy="274320"/>
+          </a:xfrm>
+          <a:prstGeom prst="rect">
+            <a:avLst/>
+          </a:prstGeom>
+          <a:noFill/>
+          <a:ln/>
+        </p:spPr>
+        <p:txBody>
+          <a:bodyPr wrap="square" rtlCol="0" anchor="ctr"/>
+          <a:lstStyle/>
+          <a:p>
+            <a:pPr marL="0" indent="0">
+              <a:buNone/>
+            </a:pPr>
+            <a:endParaRPr lang="en-US" sz="1200" dirty="0"/>
+          </a:p>
+        </p:txBody>
+      </p:sp>
+      <p:sp>
+        <p:nvSpPr>
+          <p:cNvPr id="27" name="Text 21"/>
+          <p:cNvSpPr/>
+          <p:nvPr/>
+        </p:nvSpPr>
+        <p:spPr>
+          <a:xfrm>
+            <a:off x="457200" y="6473952"/>
+            <a:ext cx="2743200" cy="256032"/>
+          </a:xfrm>
+          <a:prstGeom prst="rect">
+            <a:avLst/>
+          </a:prstGeom>
+          <a:noFill/>
+          <a:ln/>
+        </p:spPr>
+        <p:txBody>
+          <a:bodyPr wrap="square" rtlCol="0" anchor="ctr"/>
+          <a:lstStyle/>
+          <a:p>
+            <a:pPr marL="0" indent="0">
+              <a:buNone/>
+            </a:pPr>
+            <a:r>
+              <a:rPr lang="en-US" sz="900" b="1" kern="0" spc="200" dirty="0">
+                <a:solidFill>
+                  <a:srgbClr val="BFE3CF"/>
                 </a:solidFill>
                 <a:latin typeface="Arial" pitchFamily="34" charset="0"/>
                 <a:ea typeface="Arial" pitchFamily="34" charset="-122"/>
                 <a:cs typeface="Arial" pitchFamily="34" charset="-120"/>
               </a:rPr>
-              <a:t>DEPARTMENT</a:t>
-            </a:r>
-            <a:endParaRPr lang="en-US" sz="850" dirty="0"/>
-          </a:p>
-        </p:txBody>
-      </p:sp>
-      <p:sp>
-        <p:nvSpPr>
-          <p:cNvPr id="22" name="Text 16"/>
-          <p:cNvSpPr/>
-          <p:nvPr/>
-        </p:nvSpPr>
-        <p:spPr>
-          <a:xfrm>
-            <a:off x="4754880" y="5605272"/>
-            <a:ext cx="3566160" cy="274320"/>
-          </a:xfrm>
-          <a:prstGeom prst="rect">
-            <a:avLst/>
-          </a:prstGeom>
-          <a:noFill/>
-          <a:ln/>
-        </p:spPr>
-        <p:txBody>
-          <a:bodyPr wrap="square" rtlCol="0" anchor="ctr"/>
-          <a:lstStyle/>
-          <a:p>
-            <a:pPr indent="0" marL="0">
-              <a:buNone/>
-            </a:pPr>
-            <a:r>
-              <a:rPr lang="en-US" sz="1200" dirty="0">
-                <a:solidFill>
-                  <a:srgbClr val="FFFFFF"/>
-                </a:solidFill>
-                <a:latin typeface="Arial" pitchFamily="34" charset="0"/>
-                <a:ea typeface="Arial" pitchFamily="34" charset="-122"/>
-                <a:cs typeface="Arial" pitchFamily="34" charset="-120"/>
-              </a:rPr>
-              <a:t>[ Department Placeholder ]</a:t>
-            </a:r>
-            <a:endParaRPr lang="en-US" sz="1200" dirty="0"/>
-          </a:p>
-        </p:txBody>
-      </p:sp>
-      <p:sp>
-        <p:nvSpPr>
-          <p:cNvPr id="23" name="Text 17"/>
-          <p:cNvSpPr/>
-          <p:nvPr/>
-        </p:nvSpPr>
-        <p:spPr>
-          <a:xfrm>
-            <a:off x="914400" y="5934456"/>
-            <a:ext cx="3566160" cy="219456"/>
-          </a:xfrm>
-          <a:prstGeom prst="rect">
-            <a:avLst/>
-          </a:prstGeom>
-          <a:noFill/>
-          <a:ln/>
-        </p:spPr>
-        <p:txBody>
-          <a:bodyPr wrap="square" rtlCol="0" anchor="ctr"/>
-          <a:lstStyle/>
-          <a:p>
-            <a:pPr indent="0" marL="0">
-              <a:buNone/>
-            </a:pPr>
-            <a:r>
-              <a:rPr lang="en-US" sz="850" b="1" spc="100" kern="0" dirty="0">
-                <a:solidFill>
-                  <a:srgbClr val="52D68D"/>
-                </a:solidFill>
-                <a:latin typeface="Arial" pitchFamily="34" charset="0"/>
-                <a:ea typeface="Arial" pitchFamily="34" charset="-122"/>
-                <a:cs typeface="Arial" pitchFamily="34" charset="-120"/>
-              </a:rPr>
-              <a:t>COLLEGE</a:t>
-            </a:r>
-            <a:endParaRPr lang="en-US" sz="850" dirty="0"/>
-          </a:p>
-        </p:txBody>
-      </p:sp>
-      <p:sp>
-        <p:nvSpPr>
-          <p:cNvPr id="24" name="Text 18"/>
-          <p:cNvSpPr/>
-          <p:nvPr/>
-        </p:nvSpPr>
-        <p:spPr>
-          <a:xfrm>
-            <a:off x="914400" y="6135624"/>
-            <a:ext cx="3566160" cy="274320"/>
-          </a:xfrm>
-          <a:prstGeom prst="rect">
-            <a:avLst/>
-          </a:prstGeom>
-          <a:noFill/>
-          <a:ln/>
-        </p:spPr>
-        <p:txBody>
-          <a:bodyPr wrap="square" rtlCol="0" anchor="ctr"/>
-          <a:lstStyle/>
-          <a:p>
-            <a:pPr indent="0" marL="0">
-              <a:buNone/>
-            </a:pPr>
-            <a:r>
-              <a:rPr lang="en-US" sz="1200" dirty="0">
-                <a:solidFill>
-                  <a:srgbClr val="FFFFFF"/>
-                </a:solidFill>
-                <a:latin typeface="Arial" pitchFamily="34" charset="0"/>
-                <a:ea typeface="Arial" pitchFamily="34" charset="-122"/>
-                <a:cs typeface="Arial" pitchFamily="34" charset="-120"/>
-              </a:rPr>
-              <a:t>[ College Name Placeholder ]</a:t>
-            </a:r>
-            <a:endParaRPr lang="en-US" sz="1200" dirty="0"/>
-          </a:p>
-        </p:txBody>
-      </p:sp>
-      <p:sp>
-        <p:nvSpPr>
-          <p:cNvPr id="25" name="Text 19"/>
-          <p:cNvSpPr/>
-          <p:nvPr/>
-        </p:nvSpPr>
-        <p:spPr>
-          <a:xfrm>
-            <a:off x="4754880" y="5934456"/>
-            <a:ext cx="3566160" cy="219456"/>
-          </a:xfrm>
-          <a:prstGeom prst="rect">
-            <a:avLst/>
-          </a:prstGeom>
-          <a:noFill/>
-          <a:ln/>
-        </p:spPr>
-        <p:txBody>
-          <a:bodyPr wrap="square" rtlCol="0" anchor="ctr"/>
-          <a:lstStyle/>
-          <a:p>
-            <a:pPr indent="0" marL="0">
-              <a:buNone/>
-            </a:pPr>
-            <a:r>
-              <a:rPr lang="en-US" sz="850" b="1" spc="100" kern="0" dirty="0">
-                <a:solidFill>
-                  <a:srgbClr val="52D68D"/>
-                </a:solidFill>
-                <a:latin typeface="Arial" pitchFamily="34" charset="0"/>
-                <a:ea typeface="Arial" pitchFamily="34" charset="-122"/>
-                <a:cs typeface="Arial" pitchFamily="34" charset="-120"/>
-              </a:rPr>
-              <a:t>ACADEMIC YEAR</a:t>
-            </a:r>
-            <a:endParaRPr lang="en-US" sz="850" dirty="0"/>
-          </a:p>
-        </p:txBody>
-      </p:sp>
-      <p:sp>
-        <p:nvSpPr>
-          <p:cNvPr id="26" name="Text 20"/>
-          <p:cNvSpPr/>
-          <p:nvPr/>
-        </p:nvSpPr>
-        <p:spPr>
-          <a:xfrm>
-            <a:off x="4754880" y="6135624"/>
-            <a:ext cx="3566160" cy="274320"/>
-          </a:xfrm>
-          <a:prstGeom prst="rect">
-            <a:avLst/>
-          </a:prstGeom>
-          <a:noFill/>
-          <a:ln/>
-        </p:spPr>
-        <p:txBody>
-          <a:bodyPr wrap="square" rtlCol="0" anchor="ctr"/>
-          <a:lstStyle/>
-          <a:p>
-            <a:pPr indent="0" marL="0">
-              <a:buNone/>
-            </a:pPr>
-            <a:r>
-              <a:rPr lang="en-US" sz="1200" dirty="0">
-                <a:solidFill>
-                  <a:srgbClr val="FFFFFF"/>
-                </a:solidFill>
-                <a:latin typeface="Arial" pitchFamily="34" charset="0"/>
-                <a:ea typeface="Arial" pitchFamily="34" charset="-122"/>
-                <a:cs typeface="Arial" pitchFamily="34" charset="-120"/>
-              </a:rPr>
-              <a:t>[ Academic Year Placeholder ]</a:t>
-            </a:r>
-            <a:endParaRPr lang="en-US" sz="1200" dirty="0"/>
-          </a:p>
-        </p:txBody>
-      </p:sp>
-      <p:sp>
-        <p:nvSpPr>
-          <p:cNvPr id="27" name="Text 21"/>
-          <p:cNvSpPr/>
-          <p:nvPr/>
-        </p:nvSpPr>
-        <p:spPr>
-          <a:xfrm>
-            <a:off x="457200" y="6473952"/>
-            <a:ext cx="2743200" cy="256032"/>
-          </a:xfrm>
-          <a:prstGeom prst="rect">
-            <a:avLst/>
-          </a:prstGeom>
-          <a:noFill/>
-          <a:ln/>
-        </p:spPr>
-        <p:txBody>
-          <a:bodyPr wrap="square" rtlCol="0" anchor="ctr"/>
-          <a:lstStyle/>
-          <a:p>
-            <a:pPr indent="0" marL="0">
-              <a:buNone/>
-            </a:pPr>
-            <a:r>
-              <a:rPr lang="en-US" sz="900" b="1" spc="200" kern="0" dirty="0">
-                <a:solidFill>
-                  <a:srgbClr val="BFE3CF"/>
-                </a:solidFill>
-                <a:latin typeface="Arial" pitchFamily="34" charset="0"/>
-                <a:ea typeface="Arial" pitchFamily="34" charset="-122"/>
-                <a:cs typeface="Arial" pitchFamily="34" charset="-120"/>
-              </a:rPr>
               <a:t>CARBONCHECK</a:t>
             </a:r>
             <a:endParaRPr lang="en-US" sz="900" dirty="0"/>
@@ -3662,7 +3369,7 @@
           <a:bodyPr wrap="square" rtlCol="0" anchor="ctr"/>
           <a:lstStyle/>
           <a:p>
-            <a:pPr algn="r" indent="0" marL="0">
+            <a:pPr marL="0" indent="0" algn="r">
               <a:buNone/>
             </a:pPr>
             <a:r>
@@ -3694,7 +3401,7 @@
     <p:bg>
       <p:bgPr>
         <a:blipFill dpi="0" rotWithShape="1">
-          <a:blip r:embed="rId1">
+          <a:blip r:embed="rId3">
             <a:lum/>
           </a:blip>
           <a:srcRect/>
@@ -3740,11 +3447,11 @@
           <a:bodyPr wrap="square" rtlCol="0" anchor="ctr"/>
           <a:lstStyle/>
           <a:p>
-            <a:pPr indent="0" marL="0">
-              <a:buNone/>
-            </a:pPr>
-            <a:r>
-              <a:rPr lang="en-US" sz="1200" b="1" spc="200" kern="0" dirty="0">
+            <a:pPr marL="0" indent="0">
+              <a:buNone/>
+            </a:pPr>
+            <a:r>
+              <a:rPr lang="en-US" sz="1200" b="1" kern="0" spc="200" dirty="0">
                 <a:solidFill>
                   <a:srgbClr val="2D9C6F"/>
                 </a:solidFill>
@@ -3779,7 +3486,7 @@
           <a:bodyPr wrap="square" rtlCol="0" anchor="ctr"/>
           <a:lstStyle/>
           <a:p>
-            <a:pPr indent="0" marL="0">
+            <a:pPr marL="0" indent="0">
               <a:buNone/>
             </a:pPr>
             <a:r>
@@ -3823,7 +3530,7 @@
             <a:prstDash val="solid"/>
           </a:ln>
           <a:effectLst>
-            <a:outerShdw sx="100000" sy="100000" kx="0" ky="0" algn="bl" rotWithShape="0" blurRad="127000" dist="38100" dir="5400000">
+            <a:outerShdw blurRad="127000" dist="38100" dir="5400000" algn="bl" rotWithShape="0">
               <a:srgbClr val="1B4332">
                 <a:alpha val="10000"/>
               </a:srgbClr>
@@ -3833,14 +3540,14 @@
       </p:sp>
       <p:pic>
         <p:nvPicPr>
-          <p:cNvPr id="5" name="Image 0" descr="/home/claude/carboncheck/icons/users_white.png">    </p:cNvPr>
+          <p:cNvPr id="5" name="Image 0" descr="/home/claude/carboncheck/icons/users_white.png"/>
           <p:cNvPicPr>
             <a:picLocks noChangeAspect="1"/>
           </p:cNvPicPr>
           <p:nvPr/>
         </p:nvPicPr>
         <p:blipFill>
-          <a:blip r:embed="rId2"/>
+          <a:blip r:embed="rId4"/>
           <a:stretch>
             <a:fillRect/>
           </a:stretch>
@@ -3876,7 +3583,7 @@
           <a:bodyPr wrap="square" rtlCol="0" anchor="ctr"/>
           <a:lstStyle/>
           <a:p>
-            <a:pPr indent="0" marL="0">
+            <a:pPr marL="0" indent="0">
               <a:buNone/>
             </a:pPr>
             <a:r>
@@ -3896,14 +3603,14 @@
       </p:sp>
       <p:pic>
         <p:nvPicPr>
-          <p:cNvPr id="7" name="Image 1" descr="/home/claude/carboncheck/icons/arrow_down.png">    </p:cNvPr>
+          <p:cNvPr id="7" name="Image 1" descr="/home/claude/carboncheck/icons/arrow_down.png"/>
           <p:cNvPicPr>
             <a:picLocks noChangeAspect="1"/>
           </p:cNvPicPr>
           <p:nvPr/>
         </p:nvPicPr>
         <p:blipFill>
-          <a:blip r:embed="rId3"/>
+          <a:blip r:embed="rId5"/>
           <a:stretch>
             <a:fillRect/>
           </a:stretch>
@@ -3944,7 +3651,7 @@
             <a:prstDash val="solid"/>
           </a:ln>
           <a:effectLst>
-            <a:outerShdw sx="100000" sy="100000" kx="0" ky="0" algn="bl" rotWithShape="0" blurRad="127000" dist="38100" dir="5400000">
+            <a:outerShdw blurRad="127000" dist="38100" dir="5400000" algn="bl" rotWithShape="0">
               <a:srgbClr val="1B4332">
                 <a:alpha val="10000"/>
               </a:srgbClr>
@@ -3954,14 +3661,14 @@
       </p:sp>
       <p:pic>
         <p:nvPicPr>
-          <p:cNvPr id="9" name="Image 2" descr="/home/claude/carboncheck/icons/react_logo.png">    </p:cNvPr>
+          <p:cNvPr id="9" name="Image 2" descr="/home/claude/carboncheck/icons/react_logo.png"/>
           <p:cNvPicPr>
             <a:picLocks noChangeAspect="1"/>
           </p:cNvPicPr>
           <p:nvPr/>
         </p:nvPicPr>
         <p:blipFill>
-          <a:blip r:embed="rId4"/>
+          <a:blip r:embed="rId6"/>
           <a:stretch>
             <a:fillRect/>
           </a:stretch>
@@ -3997,7 +3704,7 @@
           <a:bodyPr wrap="square" rtlCol="0" anchor="ctr"/>
           <a:lstStyle/>
           <a:p>
-            <a:pPr indent="0" marL="0">
+            <a:pPr marL="0" indent="0">
               <a:buNone/>
             </a:pPr>
             <a:r>
@@ -4017,7 +3724,7 @@
       </p:sp>
       <p:pic>
         <p:nvPicPr>
-          <p:cNvPr id="11" name="Image 3" descr="/home/claude/carboncheck/icons/arrow_down.png">    </p:cNvPr>
+          <p:cNvPr id="11" name="Image 3" descr="/home/claude/carboncheck/icons/arrow_down.png"/>
           <p:cNvPicPr>
             <a:picLocks noChangeAspect="1"/>
           </p:cNvPicPr>
@@ -4065,7 +3772,7 @@
             <a:prstDash val="solid"/>
           </a:ln>
           <a:effectLst>
-            <a:outerShdw sx="100000" sy="100000" kx="0" ky="0" algn="bl" rotWithShape="0" blurRad="127000" dist="38100" dir="5400000">
+            <a:outerShdw blurRad="127000" dist="38100" dir="5400000" algn="bl" rotWithShape="0">
               <a:srgbClr val="1B4332">
                 <a:alpha val="10000"/>
               </a:srgbClr>
@@ -4075,14 +3782,14 @@
       </p:sp>
       <p:pic>
         <p:nvPicPr>
-          <p:cNvPr id="13" name="Image 4" descr="/home/claude/carboncheck/icons/server.png">    </p:cNvPr>
+          <p:cNvPr id="13" name="Image 4" descr="/home/claude/carboncheck/icons/server.png"/>
           <p:cNvPicPr>
             <a:picLocks noChangeAspect="1"/>
           </p:cNvPicPr>
           <p:nvPr/>
         </p:nvPicPr>
         <p:blipFill>
-          <a:blip r:embed="rId6"/>
+          <a:blip r:embed="rId7"/>
           <a:stretch>
             <a:fillRect/>
           </a:stretch>
@@ -4118,7 +3825,7 @@
           <a:bodyPr wrap="square" rtlCol="0" anchor="ctr"/>
           <a:lstStyle/>
           <a:p>
-            <a:pPr indent="0" marL="0">
+            <a:pPr marL="0" indent="0">
               <a:buNone/>
             </a:pPr>
             <a:r>
@@ -4138,14 +3845,14 @@
       </p:sp>
       <p:pic>
         <p:nvPicPr>
-          <p:cNvPr id="15" name="Image 5" descr="/home/claude/carboncheck/icons/arrow_down.png">    </p:cNvPr>
+          <p:cNvPr id="15" name="Image 5" descr="/home/claude/carboncheck/icons/arrow_down.png"/>
           <p:cNvPicPr>
             <a:picLocks noChangeAspect="1"/>
           </p:cNvPicPr>
           <p:nvPr/>
         </p:nvPicPr>
         <p:blipFill>
-          <a:blip r:embed="rId7"/>
+          <a:blip r:embed="rId5"/>
           <a:stretch>
             <a:fillRect/>
           </a:stretch>
@@ -4186,7 +3893,7 @@
             <a:prstDash val="solid"/>
           </a:ln>
           <a:effectLst>
-            <a:outerShdw sx="100000" sy="100000" kx="0" ky="0" algn="bl" rotWithShape="0" blurRad="127000" dist="38100" dir="5400000">
+            <a:outerShdw blurRad="127000" dist="38100" dir="5400000" algn="bl" rotWithShape="0">
               <a:srgbClr val="1B4332">
                 <a:alpha val="10000"/>
               </a:srgbClr>
@@ -4196,7 +3903,7 @@
       </p:sp>
       <p:pic>
         <p:nvPicPr>
-          <p:cNvPr id="17" name="Image 6" descr="/home/claude/carboncheck/icons/database.png">    </p:cNvPr>
+          <p:cNvPr id="17" name="Image 6" descr="/home/claude/carboncheck/icons/database.png"/>
           <p:cNvPicPr>
             <a:picLocks noChangeAspect="1"/>
           </p:cNvPicPr>
@@ -4239,7 +3946,7 @@
           <a:bodyPr wrap="square" rtlCol="0" anchor="ctr"/>
           <a:lstStyle/>
           <a:p>
-            <a:pPr indent="0" marL="0">
+            <a:pPr marL="0" indent="0">
               <a:buNone/>
             </a:pPr>
             <a:r>
@@ -4259,14 +3966,14 @@
       </p:sp>
       <p:pic>
         <p:nvPicPr>
-          <p:cNvPr id="19" name="Image 7" descr="/home/claude/carboncheck/icons/arrow_down.png">    </p:cNvPr>
+          <p:cNvPr id="19" name="Image 7" descr="/home/claude/carboncheck/icons/arrow_down.png"/>
           <p:cNvPicPr>
             <a:picLocks noChangeAspect="1"/>
           </p:cNvPicPr>
           <p:nvPr/>
         </p:nvPicPr>
         <p:blipFill>
-          <a:blip r:embed="rId9"/>
+          <a:blip r:embed="rId5"/>
           <a:stretch>
             <a:fillRect/>
           </a:stretch>
@@ -4307,7 +4014,7 @@
             <a:prstDash val="solid"/>
           </a:ln>
           <a:effectLst>
-            <a:outerShdw sx="100000" sy="100000" kx="0" ky="0" algn="bl" rotWithShape="0" blurRad="127000" dist="38100" dir="5400000">
+            <a:outerShdw blurRad="127000" dist="38100" dir="5400000" algn="bl" rotWithShape="0">
               <a:srgbClr val="1B4332">
                 <a:alpha val="10000"/>
               </a:srgbClr>
@@ -4317,14 +4024,14 @@
       </p:sp>
       <p:pic>
         <p:nvPicPr>
-          <p:cNvPr id="21" name="Image 8" descr="/home/claude/carboncheck/icons/brain.png">    </p:cNvPr>
+          <p:cNvPr id="21" name="Image 8" descr="/home/claude/carboncheck/icons/brain.png"/>
           <p:cNvPicPr>
             <a:picLocks noChangeAspect="1"/>
           </p:cNvPicPr>
           <p:nvPr/>
         </p:nvPicPr>
         <p:blipFill>
-          <a:blip r:embed="rId10"/>
+          <a:blip r:embed="rId9"/>
           <a:stretch>
             <a:fillRect/>
           </a:stretch>
@@ -4360,7 +4067,7 @@
           <a:bodyPr wrap="square" rtlCol="0" anchor="ctr"/>
           <a:lstStyle/>
           <a:p>
-            <a:pPr indent="0" marL="0">
+            <a:pPr marL="0" indent="0">
               <a:buNone/>
             </a:pPr>
             <a:r>
@@ -4380,14 +4087,14 @@
       </p:sp>
       <p:pic>
         <p:nvPicPr>
-          <p:cNvPr id="23" name="Image 9" descr="/home/claude/carboncheck/icons/arrow_down.png">    </p:cNvPr>
+          <p:cNvPr id="23" name="Image 9" descr="/home/claude/carboncheck/icons/arrow_down.png"/>
           <p:cNvPicPr>
             <a:picLocks noChangeAspect="1"/>
           </p:cNvPicPr>
           <p:nvPr/>
         </p:nvPicPr>
         <p:blipFill>
-          <a:blip r:embed="rId11"/>
+          <a:blip r:embed="rId5"/>
           <a:stretch>
             <a:fillRect/>
           </a:stretch>
@@ -4428,7 +4135,7 @@
             <a:prstDash val="solid"/>
           </a:ln>
           <a:effectLst>
-            <a:outerShdw sx="100000" sy="100000" kx="0" ky="0" algn="bl" rotWithShape="0" blurRad="127000" dist="38100" dir="5400000">
+            <a:outerShdw blurRad="127000" dist="38100" dir="5400000" algn="bl" rotWithShape="0">
               <a:srgbClr val="1B4332">
                 <a:alpha val="10000"/>
               </a:srgbClr>
@@ -4438,14 +4145,14 @@
       </p:sp>
       <p:pic>
         <p:nvPicPr>
-          <p:cNvPr id="25" name="Image 10" descr="/home/claude/carboncheck/icons/network.png">    </p:cNvPr>
+          <p:cNvPr id="25" name="Image 10" descr="/home/claude/carboncheck/icons/network.png"/>
           <p:cNvPicPr>
             <a:picLocks noChangeAspect="1"/>
           </p:cNvPicPr>
           <p:nvPr/>
         </p:nvPicPr>
         <p:blipFill>
-          <a:blip r:embed="rId12"/>
+          <a:blip r:embed="rId10"/>
           <a:stretch>
             <a:fillRect/>
           </a:stretch>
@@ -4481,7 +4188,7 @@
           <a:bodyPr wrap="square" rtlCol="0" anchor="ctr"/>
           <a:lstStyle/>
           <a:p>
-            <a:pPr indent="0" marL="0">
+            <a:pPr marL="0" indent="0">
               <a:buNone/>
             </a:pPr>
             <a:r>
@@ -4501,14 +4208,14 @@
       </p:sp>
       <p:pic>
         <p:nvPicPr>
-          <p:cNvPr id="27" name="Image 11" descr="/home/claude/carboncheck/icons/arrow_down.png">    </p:cNvPr>
+          <p:cNvPr id="27" name="Image 11" descr="/home/claude/carboncheck/icons/arrow_down.png"/>
           <p:cNvPicPr>
             <a:picLocks noChangeAspect="1"/>
           </p:cNvPicPr>
           <p:nvPr/>
         </p:nvPicPr>
         <p:blipFill>
-          <a:blip r:embed="rId13"/>
+          <a:blip r:embed="rId5"/>
           <a:stretch>
             <a:fillRect/>
           </a:stretch>
@@ -4549,7 +4256,7 @@
             <a:prstDash val="solid"/>
           </a:ln>
           <a:effectLst>
-            <a:outerShdw sx="100000" sy="100000" kx="0" ky="0" algn="bl" rotWithShape="0" blurRad="127000" dist="38100" dir="5400000">
+            <a:outerShdw blurRad="127000" dist="38100" dir="5400000" algn="bl" rotWithShape="0">
               <a:srgbClr val="1B4332">
                 <a:alpha val="10000"/>
               </a:srgbClr>
@@ -4559,14 +4266,14 @@
       </p:sp>
       <p:pic>
         <p:nvPicPr>
-          <p:cNvPr id="29" name="Image 12" descr="/home/claude/carboncheck/icons/chart_white.png">    </p:cNvPr>
+          <p:cNvPr id="29" name="Image 12" descr="/home/claude/carboncheck/icons/chart_white.png"/>
           <p:cNvPicPr>
             <a:picLocks noChangeAspect="1"/>
           </p:cNvPicPr>
           <p:nvPr/>
         </p:nvPicPr>
         <p:blipFill>
-          <a:blip r:embed="rId14"/>
+          <a:blip r:embed="rId11"/>
           <a:stretch>
             <a:fillRect/>
           </a:stretch>
@@ -4602,7 +4309,7 @@
           <a:bodyPr wrap="square" rtlCol="0" anchor="ctr"/>
           <a:lstStyle/>
           <a:p>
-            <a:pPr indent="0" marL="0">
+            <a:pPr marL="0" indent="0">
               <a:buNone/>
             </a:pPr>
             <a:r>
@@ -4641,11 +4348,11 @@
           <a:bodyPr wrap="square" rtlCol="0" anchor="ctr"/>
           <a:lstStyle/>
           <a:p>
-            <a:pPr indent="0" marL="0">
-              <a:buNone/>
-            </a:pPr>
-            <a:r>
-              <a:rPr lang="en-US" sz="900" b="1" spc="200" kern="0" dirty="0">
+            <a:pPr marL="0" indent="0">
+              <a:buNone/>
+            </a:pPr>
+            <a:r>
+              <a:rPr lang="en-US" sz="900" b="1" kern="0" spc="200" dirty="0">
                 <a:solidFill>
                   <a:srgbClr val="8FA69A"/>
                 </a:solidFill>
@@ -4680,7 +4387,7 @@
           <a:bodyPr wrap="square" rtlCol="0" anchor="ctr"/>
           <a:lstStyle/>
           <a:p>
-            <a:pPr algn="r" indent="0" marL="0">
+            <a:pPr marL="0" indent="0" algn="r">
               <a:buNone/>
             </a:pPr>
             <a:r>
@@ -4712,7 +4419,7 @@
     <p:bg>
       <p:bgPr>
         <a:blipFill dpi="0" rotWithShape="1">
-          <a:blip r:embed="rId1">
+          <a:blip r:embed="rId3">
             <a:lum/>
           </a:blip>
           <a:srcRect/>
@@ -4758,11 +4465,11 @@
           <a:bodyPr wrap="square" rtlCol="0" anchor="ctr"/>
           <a:lstStyle/>
           <a:p>
-            <a:pPr indent="0" marL="0">
-              <a:buNone/>
-            </a:pPr>
-            <a:r>
-              <a:rPr lang="en-US" sz="1200" b="1" spc="200" kern="0" dirty="0">
+            <a:pPr marL="0" indent="0">
+              <a:buNone/>
+            </a:pPr>
+            <a:r>
+              <a:rPr lang="en-US" sz="1200" b="1" kern="0" spc="200" dirty="0">
                 <a:solidFill>
                   <a:srgbClr val="2D9C6F"/>
                 </a:solidFill>
@@ -4797,7 +4504,7 @@
           <a:bodyPr wrap="square" rtlCol="0" anchor="ctr"/>
           <a:lstStyle/>
           <a:p>
-            <a:pPr indent="0" marL="0">
+            <a:pPr marL="0" indent="0">
               <a:buNone/>
             </a:pPr>
             <a:r>
@@ -4879,7 +4586,7 @@
           <a:bodyPr wrap="square" rtlCol="0" anchor="ctr"/>
           <a:lstStyle/>
           <a:p>
-            <a:pPr algn="ctr" indent="0" marL="0">
+            <a:pPr marL="0" indent="0" algn="ctr">
               <a:buNone/>
             </a:pPr>
             <a:r>
@@ -4945,7 +4652,7 @@
           <a:bodyPr wrap="square" rtlCol="0" anchor="ctr"/>
           <a:lstStyle/>
           <a:p>
-            <a:pPr indent="0" marL="0">
+            <a:pPr marL="0" indent="0">
               <a:buNone/>
             </a:pPr>
             <a:r>
@@ -5004,7 +4711,7 @@
           <a:bodyPr wrap="square" rtlCol="0" anchor="ctr"/>
           <a:lstStyle/>
           <a:p>
-            <a:pPr algn="ctr" indent="0" marL="0">
+            <a:pPr marL="0" indent="0" algn="ctr">
               <a:buNone/>
             </a:pPr>
             <a:r>
@@ -5070,7 +4777,7 @@
           <a:bodyPr wrap="square" rtlCol="0" anchor="ctr"/>
           <a:lstStyle/>
           <a:p>
-            <a:pPr indent="0" marL="0">
+            <a:pPr marL="0" indent="0">
               <a:buNone/>
             </a:pPr>
             <a:r>
@@ -5129,7 +4836,7 @@
           <a:bodyPr wrap="square" rtlCol="0" anchor="ctr"/>
           <a:lstStyle/>
           <a:p>
-            <a:pPr algn="ctr" indent="0" marL="0">
+            <a:pPr marL="0" indent="0" algn="ctr">
               <a:buNone/>
             </a:pPr>
             <a:r>
@@ -5195,7 +4902,7 @@
           <a:bodyPr wrap="square" rtlCol="0" anchor="ctr"/>
           <a:lstStyle/>
           <a:p>
-            <a:pPr indent="0" marL="0">
+            <a:pPr marL="0" indent="0">
               <a:buNone/>
             </a:pPr>
             <a:r>
@@ -5254,7 +4961,7 @@
           <a:bodyPr wrap="square" rtlCol="0" anchor="ctr"/>
           <a:lstStyle/>
           <a:p>
-            <a:pPr algn="ctr" indent="0" marL="0">
+            <a:pPr marL="0" indent="0" algn="ctr">
               <a:buNone/>
             </a:pPr>
             <a:r>
@@ -5320,7 +5027,7 @@
           <a:bodyPr wrap="square" rtlCol="0" anchor="ctr"/>
           <a:lstStyle/>
           <a:p>
-            <a:pPr indent="0" marL="0">
+            <a:pPr marL="0" indent="0">
               <a:buNone/>
             </a:pPr>
             <a:r>
@@ -5379,7 +5086,7 @@
           <a:bodyPr wrap="square" rtlCol="0" anchor="ctr"/>
           <a:lstStyle/>
           <a:p>
-            <a:pPr algn="ctr" indent="0" marL="0">
+            <a:pPr marL="0" indent="0" algn="ctr">
               <a:buNone/>
             </a:pPr>
             <a:r>
@@ -5445,7 +5152,7 @@
           <a:bodyPr wrap="square" rtlCol="0" anchor="ctr"/>
           <a:lstStyle/>
           <a:p>
-            <a:pPr indent="0" marL="0">
+            <a:pPr marL="0" indent="0">
               <a:buNone/>
             </a:pPr>
             <a:r>
@@ -5504,7 +5211,7 @@
           <a:bodyPr wrap="square" rtlCol="0" anchor="ctr"/>
           <a:lstStyle/>
           <a:p>
-            <a:pPr algn="ctr" indent="0" marL="0">
+            <a:pPr marL="0" indent="0" algn="ctr">
               <a:buNone/>
             </a:pPr>
             <a:r>
@@ -5570,7 +5277,7 @@
           <a:bodyPr wrap="square" rtlCol="0" anchor="ctr"/>
           <a:lstStyle/>
           <a:p>
-            <a:pPr indent="0" marL="0">
+            <a:pPr marL="0" indent="0">
               <a:buNone/>
             </a:pPr>
             <a:r>
@@ -5629,7 +5336,7 @@
           <a:bodyPr wrap="square" rtlCol="0" anchor="ctr"/>
           <a:lstStyle/>
           <a:p>
-            <a:pPr algn="ctr" indent="0" marL="0">
+            <a:pPr marL="0" indent="0" algn="ctr">
               <a:buNone/>
             </a:pPr>
             <a:r>
@@ -5695,7 +5402,7 @@
           <a:bodyPr wrap="square" rtlCol="0" anchor="ctr"/>
           <a:lstStyle/>
           <a:p>
-            <a:pPr indent="0" marL="0">
+            <a:pPr marL="0" indent="0">
               <a:buNone/>
             </a:pPr>
             <a:r>
@@ -5734,11 +5441,11 @@
           <a:bodyPr wrap="square" rtlCol="0" anchor="ctr"/>
           <a:lstStyle/>
           <a:p>
-            <a:pPr indent="0" marL="0">
-              <a:buNone/>
-            </a:pPr>
-            <a:r>
-              <a:rPr lang="en-US" sz="900" b="1" spc="200" kern="0" dirty="0">
+            <a:pPr marL="0" indent="0">
+              <a:buNone/>
+            </a:pPr>
+            <a:r>
+              <a:rPr lang="en-US" sz="900" b="1" kern="0" spc="200" dirty="0">
                 <a:solidFill>
                   <a:srgbClr val="8FA69A"/>
                 </a:solidFill>
@@ -5773,7 +5480,7 @@
           <a:bodyPr wrap="square" rtlCol="0" anchor="ctr"/>
           <a:lstStyle/>
           <a:p>
-            <a:pPr algn="r" indent="0" marL="0">
+            <a:pPr marL="0" indent="0" algn="r">
               <a:buNone/>
             </a:pPr>
             <a:r>
@@ -5805,7 +5512,7 @@
     <p:bg>
       <p:bgPr>
         <a:blipFill dpi="0" rotWithShape="1">
-          <a:blip r:embed="rId1">
+          <a:blip r:embed="rId3">
             <a:lum/>
           </a:blip>
           <a:srcRect/>
@@ -5851,11 +5558,11 @@
           <a:bodyPr wrap="square" rtlCol="0" anchor="ctr"/>
           <a:lstStyle/>
           <a:p>
-            <a:pPr indent="0" marL="0">
-              <a:buNone/>
-            </a:pPr>
-            <a:r>
-              <a:rPr lang="en-US" sz="1200" b="1" spc="200" kern="0" dirty="0">
+            <a:pPr marL="0" indent="0">
+              <a:buNone/>
+            </a:pPr>
+            <a:r>
+              <a:rPr lang="en-US" sz="1200" b="1" kern="0" spc="200" dirty="0">
                 <a:solidFill>
                   <a:srgbClr val="2D9C6F"/>
                 </a:solidFill>
@@ -5890,7 +5597,7 @@
           <a:bodyPr wrap="square" rtlCol="0" anchor="ctr"/>
           <a:lstStyle/>
           <a:p>
-            <a:pPr indent="0" marL="0">
+            <a:pPr marL="0" indent="0">
               <a:buNone/>
             </a:pPr>
             <a:r>
@@ -5929,11 +5636,11 @@
           <a:bodyPr wrap="square" rtlCol="0" anchor="ctr"/>
           <a:lstStyle/>
           <a:p>
-            <a:pPr indent="0" marL="0">
-              <a:buNone/>
-            </a:pPr>
-            <a:r>
-              <a:rPr lang="en-US" sz="1200" b="1" spc="200" kern="0" dirty="0">
+            <a:pPr marL="0" indent="0">
+              <a:buNone/>
+            </a:pPr>
+            <a:r>
+              <a:rPr lang="en-US" sz="1200" b="1" kern="0" spc="200" dirty="0">
                 <a:solidFill>
                   <a:srgbClr val="2D9C6F"/>
                 </a:solidFill>
@@ -5973,7 +5680,7 @@
             <a:prstDash val="solid"/>
           </a:ln>
           <a:effectLst>
-            <a:outerShdw sx="100000" sy="100000" kx="0" ky="0" algn="bl" rotWithShape="0" blurRad="127000" dist="38100" dir="5400000">
+            <a:outerShdw blurRad="127000" dist="38100" dir="5400000" algn="bl" rotWithShape="0">
               <a:srgbClr val="1B4332">
                 <a:alpha val="10000"/>
               </a:srgbClr>
@@ -5983,14 +5690,14 @@
       </p:sp>
       <p:pic>
         <p:nvPicPr>
-          <p:cNvPr id="6" name="Image 0" descr="/home/claude/carboncheck/icons/car.png">    </p:cNvPr>
+          <p:cNvPr id="6" name="Image 0" descr="/home/claude/carboncheck/icons/car.png"/>
           <p:cNvPicPr>
             <a:picLocks noChangeAspect="1"/>
           </p:cNvPicPr>
           <p:nvPr/>
         </p:nvPicPr>
         <p:blipFill>
-          <a:blip r:embed="rId2"/>
+          <a:blip r:embed="rId4"/>
           <a:stretch>
             <a:fillRect/>
           </a:stretch>
@@ -6026,7 +5733,7 @@
           <a:bodyPr wrap="square" rtlCol="0" anchor="ctr"/>
           <a:lstStyle/>
           <a:p>
-            <a:pPr indent="0" marL="0">
+            <a:pPr marL="0" indent="0">
               <a:buNone/>
             </a:pPr>
             <a:r>
@@ -6070,7 +5777,7 @@
             <a:prstDash val="solid"/>
           </a:ln>
           <a:effectLst>
-            <a:outerShdw sx="100000" sy="100000" kx="0" ky="0" algn="bl" rotWithShape="0" blurRad="127000" dist="38100" dir="5400000">
+            <a:outerShdw blurRad="127000" dist="38100" dir="5400000" algn="bl" rotWithShape="0">
               <a:srgbClr val="1B4332">
                 <a:alpha val="10000"/>
               </a:srgbClr>
@@ -6080,14 +5787,14 @@
       </p:sp>
       <p:pic>
         <p:nvPicPr>
-          <p:cNvPr id="9" name="Image 1" descr="/home/claude/carboncheck/icons/bolt.png">    </p:cNvPr>
+          <p:cNvPr id="9" name="Image 1" descr="/home/claude/carboncheck/icons/bolt.png"/>
           <p:cNvPicPr>
             <a:picLocks noChangeAspect="1"/>
           </p:cNvPicPr>
           <p:nvPr/>
         </p:nvPicPr>
         <p:blipFill>
-          <a:blip r:embed="rId3"/>
+          <a:blip r:embed="rId5"/>
           <a:stretch>
             <a:fillRect/>
           </a:stretch>
@@ -6123,7 +5830,7 @@
           <a:bodyPr wrap="square" rtlCol="0" anchor="ctr"/>
           <a:lstStyle/>
           <a:p>
-            <a:pPr indent="0" marL="0">
+            <a:pPr marL="0" indent="0">
               <a:buNone/>
             </a:pPr>
             <a:r>
@@ -6167,7 +5874,7 @@
             <a:prstDash val="solid"/>
           </a:ln>
           <a:effectLst>
-            <a:outerShdw sx="100000" sy="100000" kx="0" ky="0" algn="bl" rotWithShape="0" blurRad="127000" dist="38100" dir="5400000">
+            <a:outerShdw blurRad="127000" dist="38100" dir="5400000" algn="bl" rotWithShape="0">
               <a:srgbClr val="1B4332">
                 <a:alpha val="10000"/>
               </a:srgbClr>
@@ -6177,14 +5884,14 @@
       </p:sp>
       <p:pic>
         <p:nvPicPr>
-          <p:cNvPr id="12" name="Image 2" descr="/home/claude/carboncheck/icons/house.png">    </p:cNvPr>
+          <p:cNvPr id="12" name="Image 2" descr="/home/claude/carboncheck/icons/house.png"/>
           <p:cNvPicPr>
             <a:picLocks noChangeAspect="1"/>
           </p:cNvPicPr>
           <p:nvPr/>
         </p:nvPicPr>
         <p:blipFill>
-          <a:blip r:embed="rId4"/>
+          <a:blip r:embed="rId6"/>
           <a:stretch>
             <a:fillRect/>
           </a:stretch>
@@ -6220,7 +5927,7 @@
           <a:bodyPr wrap="square" rtlCol="0" anchor="ctr"/>
           <a:lstStyle/>
           <a:p>
-            <a:pPr indent="0" marL="0">
+            <a:pPr marL="0" indent="0">
               <a:buNone/>
             </a:pPr>
             <a:r>
@@ -6240,14 +5947,14 @@
       </p:sp>
       <p:pic>
         <p:nvPicPr>
-          <p:cNvPr id="14" name="Image 3" descr="/home/claude/carboncheck/icons/arrow_right.png">    </p:cNvPr>
+          <p:cNvPr id="14" name="Image 3" descr="/home/claude/carboncheck/icons/arrow_right.png"/>
           <p:cNvPicPr>
             <a:picLocks noChangeAspect="1"/>
           </p:cNvPicPr>
           <p:nvPr/>
         </p:nvPicPr>
         <p:blipFill>
-          <a:blip r:embed="rId5"/>
+          <a:blip r:embed="rId7"/>
           <a:stretch>
             <a:fillRect/>
           </a:stretch>
@@ -6288,7 +5995,7 @@
             <a:prstDash val="solid"/>
           </a:ln>
           <a:effectLst>
-            <a:outerShdw sx="100000" sy="100000" kx="0" ky="0" algn="bl" rotWithShape="0" blurRad="127000" dist="38100" dir="5400000">
+            <a:outerShdw blurRad="127000" dist="38100" dir="5400000" algn="bl" rotWithShape="0">
               <a:srgbClr val="1B4332">
                 <a:alpha val="10000"/>
               </a:srgbClr>
@@ -6318,14 +6025,14 @@
       </p:sp>
       <p:pic>
         <p:nvPicPr>
-          <p:cNvPr id="17" name="Image 4" descr="/home/claude/carboncheck/icons/brain_white.png">    </p:cNvPr>
+          <p:cNvPr id="17" name="Image 4" descr="/home/claude/carboncheck/icons/brain_white.png"/>
           <p:cNvPicPr>
             <a:picLocks noChangeAspect="1"/>
           </p:cNvPicPr>
           <p:nvPr/>
         </p:nvPicPr>
         <p:blipFill>
-          <a:blip r:embed="rId6"/>
+          <a:blip r:embed="rId8"/>
           <a:stretch>
             <a:fillRect/>
           </a:stretch>
@@ -6361,7 +6068,7 @@
           <a:bodyPr wrap="square" rtlCol="0" anchor="ctr"/>
           <a:lstStyle/>
           <a:p>
-            <a:pPr algn="ctr" indent="0" marL="0">
+            <a:pPr marL="0" indent="0" algn="ctr">
               <a:buNone/>
             </a:pPr>
             <a:r>
@@ -6400,7 +6107,7 @@
           <a:bodyPr wrap="square" rtlCol="0" anchor="ctr"/>
           <a:lstStyle/>
           <a:p>
-            <a:pPr algn="ctr" indent="0" marL="0">
+            <a:pPr marL="0" indent="0" algn="ctr">
               <a:buNone/>
             </a:pPr>
             <a:r>
@@ -6439,7 +6146,7 @@
           <a:bodyPr wrap="square" rtlCol="0" anchor="ctr"/>
           <a:lstStyle/>
           <a:p>
-            <a:pPr algn="ctr" indent="0" marL="0">
+            <a:pPr marL="0" indent="0" algn="ctr">
               <a:buNone/>
             </a:pPr>
             <a:r>
@@ -6459,7 +6166,7 @@
       </p:sp>
       <p:pic>
         <p:nvPicPr>
-          <p:cNvPr id="21" name="Image 5" descr="/home/claude/carboncheck/icons/arrow_right.png">    </p:cNvPr>
+          <p:cNvPr id="21" name="Image 5" descr="/home/claude/carboncheck/icons/arrow_right.png"/>
           <p:cNvPicPr>
             <a:picLocks noChangeAspect="1"/>
           </p:cNvPicPr>
@@ -6502,11 +6209,11 @@
           <a:bodyPr wrap="square" rtlCol="0" anchor="ctr"/>
           <a:lstStyle/>
           <a:p>
-            <a:pPr indent="0" marL="0">
-              <a:buNone/>
-            </a:pPr>
-            <a:r>
-              <a:rPr lang="en-US" sz="1200" b="1" spc="200" kern="0" dirty="0">
+            <a:pPr marL="0" indent="0">
+              <a:buNone/>
+            </a:pPr>
+            <a:r>
+              <a:rPr lang="en-US" sz="1200" b="1" kern="0" spc="200" dirty="0">
                 <a:solidFill>
                   <a:srgbClr val="2D9C6F"/>
                 </a:solidFill>
@@ -6588,7 +6295,7 @@
           <a:bodyPr wrap="square" rtlCol="0" anchor="ctr"/>
           <a:lstStyle/>
           <a:p>
-            <a:pPr indent="0" marL="0">
+            <a:pPr marL="0" indent="0">
               <a:buNone/>
             </a:pPr>
             <a:r>
@@ -6674,7 +6381,7 @@
           <a:bodyPr wrap="square" rtlCol="0" anchor="ctr"/>
           <a:lstStyle/>
           <a:p>
-            <a:pPr indent="0" marL="0">
+            <a:pPr marL="0" indent="0">
               <a:buNone/>
             </a:pPr>
             <a:r>
@@ -6760,7 +6467,7 @@
           <a:bodyPr wrap="square" rtlCol="0" anchor="ctr"/>
           <a:lstStyle/>
           <a:p>
-            <a:pPr indent="0" marL="0">
+            <a:pPr marL="0" indent="0">
               <a:buNone/>
             </a:pPr>
             <a:r>
@@ -6846,7 +6553,7 @@
           <a:bodyPr wrap="square" rtlCol="0" anchor="ctr"/>
           <a:lstStyle/>
           <a:p>
-            <a:pPr indent="0" marL="0">
+            <a:pPr marL="0" indent="0">
               <a:buNone/>
             </a:pPr>
             <a:r>
@@ -6932,7 +6639,7 @@
           <a:bodyPr wrap="square" rtlCol="0" anchor="ctr"/>
           <a:lstStyle/>
           <a:p>
-            <a:pPr indent="0" marL="0">
+            <a:pPr marL="0" indent="0">
               <a:buNone/>
             </a:pPr>
             <a:r>
@@ -6971,11 +6678,11 @@
           <a:bodyPr wrap="square" rtlCol="0" anchor="ctr"/>
           <a:lstStyle/>
           <a:p>
-            <a:pPr indent="0" marL="0">
-              <a:buNone/>
-            </a:pPr>
-            <a:r>
-              <a:rPr lang="en-US" sz="900" b="1" spc="200" kern="0" dirty="0">
+            <a:pPr marL="0" indent="0">
+              <a:buNone/>
+            </a:pPr>
+            <a:r>
+              <a:rPr lang="en-US" sz="900" b="1" kern="0" spc="200" dirty="0">
                 <a:solidFill>
                   <a:srgbClr val="8FA69A"/>
                 </a:solidFill>
@@ -7010,7 +6717,7 @@
           <a:bodyPr wrap="square" rtlCol="0" anchor="ctr"/>
           <a:lstStyle/>
           <a:p>
-            <a:pPr algn="r" indent="0" marL="0">
+            <a:pPr marL="0" indent="0" algn="r">
               <a:buNone/>
             </a:pPr>
             <a:r>
@@ -7042,7 +6749,7 @@
     <p:bg>
       <p:bgPr>
         <a:blipFill dpi="0" rotWithShape="1">
-          <a:blip r:embed="rId1">
+          <a:blip r:embed="rId3">
             <a:lum/>
           </a:blip>
           <a:srcRect/>
@@ -7088,11 +6795,11 @@
           <a:bodyPr wrap="square" rtlCol="0" anchor="ctr"/>
           <a:lstStyle/>
           <a:p>
-            <a:pPr indent="0" marL="0">
-              <a:buNone/>
-            </a:pPr>
-            <a:r>
-              <a:rPr lang="en-US" sz="1200" b="1" spc="200" kern="0" dirty="0">
+            <a:pPr marL="0" indent="0">
+              <a:buNone/>
+            </a:pPr>
+            <a:r>
+              <a:rPr lang="en-US" sz="1200" b="1" kern="0" spc="200" dirty="0">
                 <a:solidFill>
                   <a:srgbClr val="2D9C6F"/>
                 </a:solidFill>
@@ -7127,7 +6834,7 @@
           <a:bodyPr wrap="square" rtlCol="0" anchor="ctr"/>
           <a:lstStyle/>
           <a:p>
-            <a:pPr indent="0" marL="0">
+            <a:pPr marL="0" indent="0">
               <a:buNone/>
             </a:pPr>
             <a:r>
@@ -7171,7 +6878,7 @@
             <a:prstDash val="solid"/>
           </a:ln>
           <a:effectLst>
-            <a:outerShdw sx="100000" sy="100000" kx="0" ky="0" algn="bl" rotWithShape="0" blurRad="127000" dist="38100" dir="5400000">
+            <a:outerShdw blurRad="127000" dist="38100" dir="5400000" algn="bl" rotWithShape="0">
               <a:srgbClr val="1B4332">
                 <a:alpha val="10000"/>
               </a:srgbClr>
@@ -7201,14 +6908,14 @@
       </p:sp>
       <p:pic>
         <p:nvPicPr>
-          <p:cNvPr id="6" name="Image 0" descr="/home/claude/carboncheck/icons/house.png">    </p:cNvPr>
+          <p:cNvPr id="6" name="Image 0" descr="/home/claude/carboncheck/icons/house.png"/>
           <p:cNvPicPr>
             <a:picLocks noChangeAspect="1"/>
           </p:cNvPicPr>
           <p:nvPr/>
         </p:nvPicPr>
         <p:blipFill>
-          <a:blip r:embed="rId2"/>
+          <a:blip r:embed="rId4"/>
           <a:stretch>
             <a:fillRect/>
           </a:stretch>
@@ -7244,7 +6951,7 @@
           <a:bodyPr wrap="square" rtlCol="0" anchor="ctr"/>
           <a:lstStyle/>
           <a:p>
-            <a:pPr indent="0" marL="0">
+            <a:pPr marL="0" indent="0">
               <a:buNone/>
             </a:pPr>
             <a:r>
@@ -7288,7 +6995,7 @@
             <a:prstDash val="solid"/>
           </a:ln>
           <a:effectLst>
-            <a:outerShdw sx="100000" sy="100000" kx="0" ky="0" algn="bl" rotWithShape="0" blurRad="127000" dist="38100" dir="5400000">
+            <a:outerShdw blurRad="127000" dist="38100" dir="5400000" algn="bl" rotWithShape="0">
               <a:srgbClr val="1B4332">
                 <a:alpha val="10000"/>
               </a:srgbClr>
@@ -7318,14 +7025,14 @@
       </p:sp>
       <p:pic>
         <p:nvPicPr>
-          <p:cNvPr id="10" name="Image 1" descr="/home/claude/carboncheck/icons/gauge.png">    </p:cNvPr>
+          <p:cNvPr id="10" name="Image 1" descr="/home/claude/carboncheck/icons/gauge.png"/>
           <p:cNvPicPr>
             <a:picLocks noChangeAspect="1"/>
           </p:cNvPicPr>
           <p:nvPr/>
         </p:nvPicPr>
         <p:blipFill>
-          <a:blip r:embed="rId3"/>
+          <a:blip r:embed="rId5"/>
           <a:stretch>
             <a:fillRect/>
           </a:stretch>
@@ -7361,7 +7068,7 @@
           <a:bodyPr wrap="square" rtlCol="0" anchor="ctr"/>
           <a:lstStyle/>
           <a:p>
-            <a:pPr indent="0" marL="0">
+            <a:pPr marL="0" indent="0">
               <a:buNone/>
             </a:pPr>
             <a:r>
@@ -7405,7 +7112,7 @@
             <a:prstDash val="solid"/>
           </a:ln>
           <a:effectLst>
-            <a:outerShdw sx="100000" sy="100000" kx="0" ky="0" algn="bl" rotWithShape="0" blurRad="127000" dist="38100" dir="5400000">
+            <a:outerShdw blurRad="127000" dist="38100" dir="5400000" algn="bl" rotWithShape="0">
               <a:srgbClr val="1B4332">
                 <a:alpha val="10000"/>
               </a:srgbClr>
@@ -7435,14 +7142,14 @@
       </p:sp>
       <p:pic>
         <p:nvPicPr>
-          <p:cNvPr id="14" name="Image 2" descr="/home/claude/carboncheck/icons/brain.png">    </p:cNvPr>
+          <p:cNvPr id="14" name="Image 2" descr="/home/claude/carboncheck/icons/brain.png"/>
           <p:cNvPicPr>
             <a:picLocks noChangeAspect="1"/>
           </p:cNvPicPr>
           <p:nvPr/>
         </p:nvPicPr>
         <p:blipFill>
-          <a:blip r:embed="rId4"/>
+          <a:blip r:embed="rId6"/>
           <a:stretch>
             <a:fillRect/>
           </a:stretch>
@@ -7478,7 +7185,7 @@
           <a:bodyPr wrap="square" rtlCol="0" anchor="ctr"/>
           <a:lstStyle/>
           <a:p>
-            <a:pPr indent="0" marL="0">
+            <a:pPr marL="0" indent="0">
               <a:buNone/>
             </a:pPr>
             <a:r>
@@ -7522,7 +7229,7 @@
             <a:prstDash val="solid"/>
           </a:ln>
           <a:effectLst>
-            <a:outerShdw sx="100000" sy="100000" kx="0" ky="0" algn="bl" rotWithShape="0" blurRad="127000" dist="38100" dir="5400000">
+            <a:outerShdw blurRad="127000" dist="38100" dir="5400000" algn="bl" rotWithShape="0">
               <a:srgbClr val="1B4332">
                 <a:alpha val="10000"/>
               </a:srgbClr>
@@ -7552,14 +7259,14 @@
       </p:sp>
       <p:pic>
         <p:nvPicPr>
-          <p:cNvPr id="18" name="Image 3" descr="/home/claude/carboncheck/icons/chart.png">    </p:cNvPr>
+          <p:cNvPr id="18" name="Image 3" descr="/home/claude/carboncheck/icons/chart.png"/>
           <p:cNvPicPr>
             <a:picLocks noChangeAspect="1"/>
           </p:cNvPicPr>
           <p:nvPr/>
         </p:nvPicPr>
         <p:blipFill>
-          <a:blip r:embed="rId5"/>
+          <a:blip r:embed="rId7"/>
           <a:stretch>
             <a:fillRect/>
           </a:stretch>
@@ -7595,7 +7302,7 @@
           <a:bodyPr wrap="square" rtlCol="0" anchor="ctr"/>
           <a:lstStyle/>
           <a:p>
-            <a:pPr indent="0" marL="0">
+            <a:pPr marL="0" indent="0">
               <a:buNone/>
             </a:pPr>
             <a:r>
@@ -7639,7 +7346,7 @@
             <a:prstDash val="solid"/>
           </a:ln>
           <a:effectLst>
-            <a:outerShdw sx="100000" sy="100000" kx="0" ky="0" algn="bl" rotWithShape="0" blurRad="127000" dist="38100" dir="5400000">
+            <a:outerShdw blurRad="127000" dist="38100" dir="5400000" algn="bl" rotWithShape="0">
               <a:srgbClr val="1B4332">
                 <a:alpha val="10000"/>
               </a:srgbClr>
@@ -7669,14 +7376,14 @@
       </p:sp>
       <p:pic>
         <p:nvPicPr>
-          <p:cNvPr id="22" name="Image 4" descr="/home/claude/carboncheck/icons/chartbar.png">    </p:cNvPr>
+          <p:cNvPr id="22" name="Image 4" descr="/home/claude/carboncheck/icons/chartbar.png"/>
           <p:cNvPicPr>
             <a:picLocks noChangeAspect="1"/>
           </p:cNvPicPr>
           <p:nvPr/>
         </p:nvPicPr>
         <p:blipFill>
-          <a:blip r:embed="rId6"/>
+          <a:blip r:embed="rId8"/>
           <a:stretch>
             <a:fillRect/>
           </a:stretch>
@@ -7712,7 +7419,7 @@
           <a:bodyPr wrap="square" rtlCol="0" anchor="ctr"/>
           <a:lstStyle/>
           <a:p>
-            <a:pPr indent="0" marL="0">
+            <a:pPr marL="0" indent="0">
               <a:buNone/>
             </a:pPr>
             <a:r>
@@ -7756,7 +7463,7 @@
             <a:prstDash val="solid"/>
           </a:ln>
           <a:effectLst>
-            <a:outerShdw sx="100000" sy="100000" kx="0" ky="0" algn="bl" rotWithShape="0" blurRad="127000" dist="38100" dir="5400000">
+            <a:outerShdw blurRad="127000" dist="38100" dir="5400000" algn="bl" rotWithShape="0">
               <a:srgbClr val="1B4332">
                 <a:alpha val="10000"/>
               </a:srgbClr>
@@ -7786,7 +7493,7 @@
       </p:sp>
       <p:pic>
         <p:nvPicPr>
-          <p:cNvPr id="26" name="Image 5" descr="/home/claude/carboncheck/icons/chart.png">    </p:cNvPr>
+          <p:cNvPr id="26" name="Image 5" descr="/home/claude/carboncheck/icons/chart.png"/>
           <p:cNvPicPr>
             <a:picLocks noChangeAspect="1"/>
           </p:cNvPicPr>
@@ -7829,7 +7536,7 @@
           <a:bodyPr wrap="square" rtlCol="0" anchor="ctr"/>
           <a:lstStyle/>
           <a:p>
-            <a:pPr indent="0" marL="0">
+            <a:pPr marL="0" indent="0">
               <a:buNone/>
             </a:pPr>
             <a:r>
@@ -7873,7 +7580,7 @@
             <a:prstDash val="solid"/>
           </a:ln>
           <a:effectLst>
-            <a:outerShdw sx="100000" sy="100000" kx="0" ky="0" algn="bl" rotWithShape="0" blurRad="127000" dist="38100" dir="5400000">
+            <a:outerShdw blurRad="127000" dist="38100" dir="5400000" algn="bl" rotWithShape="0">
               <a:srgbClr val="1B4332">
                 <a:alpha val="10000"/>
               </a:srgbClr>
@@ -7903,7 +7610,7 @@
       </p:sp>
       <p:pic>
         <p:nvPicPr>
-          <p:cNvPr id="30" name="Image 6" descr="/home/claude/carboncheck/icons/chartbar.png">    </p:cNvPr>
+          <p:cNvPr id="30" name="Image 6" descr="/home/claude/carboncheck/icons/chartbar.png"/>
           <p:cNvPicPr>
             <a:picLocks noChangeAspect="1"/>
           </p:cNvPicPr>
@@ -7946,7 +7653,7 @@
           <a:bodyPr wrap="square" rtlCol="0" anchor="ctr"/>
           <a:lstStyle/>
           <a:p>
-            <a:pPr indent="0" marL="0">
+            <a:pPr marL="0" indent="0">
               <a:buNone/>
             </a:pPr>
             <a:r>
@@ -7990,7 +7697,7 @@
             <a:prstDash val="solid"/>
           </a:ln>
           <a:effectLst>
-            <a:outerShdw sx="100000" sy="100000" kx="0" ky="0" algn="bl" rotWithShape="0" blurRad="127000" dist="38100" dir="5400000">
+            <a:outerShdw blurRad="127000" dist="38100" dir="5400000" algn="bl" rotWithShape="0">
               <a:srgbClr val="1B4332">
                 <a:alpha val="10000"/>
               </a:srgbClr>
@@ -8020,7 +7727,7 @@
       </p:sp>
       <p:pic>
         <p:nvPicPr>
-          <p:cNvPr id="34" name="Image 7" descr="/home/claude/carboncheck/icons/lightbulb.png">    </p:cNvPr>
+          <p:cNvPr id="34" name="Image 7" descr="/home/claude/carboncheck/icons/lightbulb.png"/>
           <p:cNvPicPr>
             <a:picLocks noChangeAspect="1"/>
           </p:cNvPicPr>
@@ -8063,7 +7770,7 @@
           <a:bodyPr wrap="square" rtlCol="0" anchor="ctr"/>
           <a:lstStyle/>
           <a:p>
-            <a:pPr indent="0" marL="0">
+            <a:pPr marL="0" indent="0">
               <a:buNone/>
             </a:pPr>
             <a:r>
@@ -8107,7 +7814,7 @@
             <a:prstDash val="solid"/>
           </a:ln>
           <a:effectLst>
-            <a:outerShdw sx="100000" sy="100000" kx="0" ky="0" algn="bl" rotWithShape="0" blurRad="127000" dist="38100" dir="5400000">
+            <a:outerShdw blurRad="127000" dist="38100" dir="5400000" algn="bl" rotWithShape="0">
               <a:srgbClr val="1B4332">
                 <a:alpha val="10000"/>
               </a:srgbClr>
@@ -8137,7 +7844,7 @@
       </p:sp>
       <p:pic>
         <p:nvPicPr>
-          <p:cNvPr id="38" name="Image 8" descr="/home/claude/carboncheck/icons/seedling.png">    </p:cNvPr>
+          <p:cNvPr id="38" name="Image 8" descr="/home/claude/carboncheck/icons/seedling.png"/>
           <p:cNvPicPr>
             <a:picLocks noChangeAspect="1"/>
           </p:cNvPicPr>
@@ -8180,7 +7887,7 @@
           <a:bodyPr wrap="square" rtlCol="0" anchor="ctr"/>
           <a:lstStyle/>
           <a:p>
-            <a:pPr indent="0" marL="0">
+            <a:pPr marL="0" indent="0">
               <a:buNone/>
             </a:pPr>
             <a:r>
@@ -8224,7 +7931,7 @@
             <a:prstDash val="solid"/>
           </a:ln>
           <a:effectLst>
-            <a:outerShdw sx="100000" sy="100000" kx="0" ky="0" algn="bl" rotWithShape="0" blurRad="127000" dist="38100" dir="5400000">
+            <a:outerShdw blurRad="127000" dist="38100" dir="5400000" algn="bl" rotWithShape="0">
               <a:srgbClr val="1B4332">
                 <a:alpha val="10000"/>
               </a:srgbClr>
@@ -8254,7 +7961,7 @@
       </p:sp>
       <p:pic>
         <p:nvPicPr>
-          <p:cNvPr id="42" name="Image 9" descr="/home/claude/carboncheck/icons/circle_info.png">    </p:cNvPr>
+          <p:cNvPr id="42" name="Image 9" descr="/home/claude/carboncheck/icons/circle_info.png"/>
           <p:cNvPicPr>
             <a:picLocks noChangeAspect="1"/>
           </p:cNvPicPr>
@@ -8297,7 +8004,7 @@
           <a:bodyPr wrap="square" rtlCol="0" anchor="ctr"/>
           <a:lstStyle/>
           <a:p>
-            <a:pPr indent="0" marL="0">
+            <a:pPr marL="0" indent="0">
               <a:buNone/>
             </a:pPr>
             <a:r>
@@ -8341,7 +8048,7 @@
             <a:prstDash val="solid"/>
           </a:ln>
           <a:effectLst>
-            <a:outerShdw sx="100000" sy="100000" kx="0" ky="0" algn="bl" rotWithShape="0" blurRad="127000" dist="38100" dir="5400000">
+            <a:outerShdw blurRad="127000" dist="38100" dir="5400000" algn="bl" rotWithShape="0">
               <a:srgbClr val="1B4332">
                 <a:alpha val="10000"/>
               </a:srgbClr>
@@ -8371,7 +8078,7 @@
       </p:sp>
       <p:pic>
         <p:nvPicPr>
-          <p:cNvPr id="46" name="Image 10" descr="/home/claude/carboncheck/icons/handshake.png">    </p:cNvPr>
+          <p:cNvPr id="46" name="Image 10" descr="/home/claude/carboncheck/icons/handshake.png"/>
           <p:cNvPicPr>
             <a:picLocks noChangeAspect="1"/>
           </p:cNvPicPr>
@@ -8414,7 +8121,7 @@
           <a:bodyPr wrap="square" rtlCol="0" anchor="ctr"/>
           <a:lstStyle/>
           <a:p>
-            <a:pPr indent="0" marL="0">
+            <a:pPr marL="0" indent="0">
               <a:buNone/>
             </a:pPr>
             <a:r>
@@ -8458,7 +8165,7 @@
             <a:prstDash val="solid"/>
           </a:ln>
           <a:effectLst>
-            <a:outerShdw sx="100000" sy="100000" kx="0" ky="0" algn="bl" rotWithShape="0" blurRad="127000" dist="38100" dir="5400000">
+            <a:outerShdw blurRad="127000" dist="38100" dir="5400000" algn="bl" rotWithShape="0">
               <a:srgbClr val="1B4332">
                 <a:alpha val="10000"/>
               </a:srgbClr>
@@ -8488,7 +8195,7 @@
       </p:sp>
       <p:pic>
         <p:nvPicPr>
-          <p:cNvPr id="50" name="Image 11" descr="/home/claude/carboncheck/icons/mobile.png">    </p:cNvPr>
+          <p:cNvPr id="50" name="Image 11" descr="/home/claude/carboncheck/icons/mobile.png"/>
           <p:cNvPicPr>
             <a:picLocks noChangeAspect="1"/>
           </p:cNvPicPr>
@@ -8531,7 +8238,7 @@
           <a:bodyPr wrap="square" rtlCol="0" anchor="ctr"/>
           <a:lstStyle/>
           <a:p>
-            <a:pPr indent="0" marL="0">
+            <a:pPr marL="0" indent="0">
               <a:buNone/>
             </a:pPr>
             <a:r>
@@ -8570,11 +8277,11 @@
           <a:bodyPr wrap="square" rtlCol="0" anchor="ctr"/>
           <a:lstStyle/>
           <a:p>
-            <a:pPr indent="0" marL="0">
-              <a:buNone/>
-            </a:pPr>
-            <a:r>
-              <a:rPr lang="en-US" sz="900" b="1" spc="200" kern="0" dirty="0">
+            <a:pPr marL="0" indent="0">
+              <a:buNone/>
+            </a:pPr>
+            <a:r>
+              <a:rPr lang="en-US" sz="900" b="1" kern="0" spc="200" dirty="0">
                 <a:solidFill>
                   <a:srgbClr val="8FA69A"/>
                 </a:solidFill>
@@ -8609,7 +8316,7 @@
           <a:bodyPr wrap="square" rtlCol="0" anchor="ctr"/>
           <a:lstStyle/>
           <a:p>
-            <a:pPr algn="r" indent="0" marL="0">
+            <a:pPr marL="0" indent="0" algn="r">
               <a:buNone/>
             </a:pPr>
             <a:r>
@@ -8641,7 +8348,7 @@
     <p:bg>
       <p:bgPr>
         <a:blipFill dpi="0" rotWithShape="1">
-          <a:blip r:embed="rId1">
+          <a:blip r:embed="rId3">
             <a:lum/>
           </a:blip>
           <a:srcRect/>
@@ -8687,11 +8394,11 @@
           <a:bodyPr wrap="square" rtlCol="0" anchor="ctr"/>
           <a:lstStyle/>
           <a:p>
-            <a:pPr indent="0" marL="0">
-              <a:buNone/>
-            </a:pPr>
-            <a:r>
-              <a:rPr lang="en-US" sz="1200" b="1" spc="200" kern="0" dirty="0">
+            <a:pPr marL="0" indent="0">
+              <a:buNone/>
+            </a:pPr>
+            <a:r>
+              <a:rPr lang="en-US" sz="1200" b="1" kern="0" spc="200" dirty="0">
                 <a:solidFill>
                   <a:srgbClr val="2D9C6F"/>
                 </a:solidFill>
@@ -8726,7 +8433,7 @@
           <a:bodyPr wrap="square" rtlCol="0" anchor="ctr"/>
           <a:lstStyle/>
           <a:p>
-            <a:pPr indent="0" marL="0">
+            <a:pPr marL="0" indent="0">
               <a:buNone/>
             </a:pPr>
             <a:r>
@@ -8773,14 +8480,14 @@
       </p:sp>
       <p:pic>
         <p:nvPicPr>
-          <p:cNvPr id="5" name="Image 0" descr="/home/claude/carboncheck/icons/image_icon.png">    </p:cNvPr>
+          <p:cNvPr id="5" name="Image 0" descr="/home/claude/carboncheck/icons/image_icon.png"/>
           <p:cNvPicPr>
             <a:picLocks noChangeAspect="1"/>
           </p:cNvPicPr>
           <p:nvPr/>
         </p:nvPicPr>
         <p:blipFill>
-          <a:blip r:embed="rId2"/>
+          <a:blip r:embed="rId4"/>
           <a:stretch>
             <a:fillRect/>
           </a:stretch>
@@ -8816,7 +8523,7 @@
           <a:bodyPr wrap="square" rtlCol="0" anchor="ctr"/>
           <a:lstStyle/>
           <a:p>
-            <a:pPr algn="ctr" indent="0" marL="0">
+            <a:pPr marL="0" indent="0" algn="ctr">
               <a:buNone/>
             </a:pPr>
             <a:r>
@@ -8855,7 +8562,7 @@
           <a:bodyPr wrap="square" rtlCol="0" anchor="ctr"/>
           <a:lstStyle/>
           <a:p>
-            <a:pPr algn="ctr" indent="0" marL="0">
+            <a:pPr marL="0" indent="0" algn="ctr">
               <a:buNone/>
             </a:pPr>
             <a:r>
@@ -8902,14 +8609,14 @@
       </p:sp>
       <p:pic>
         <p:nvPicPr>
-          <p:cNvPr id="9" name="Image 1" descr="/home/claude/carboncheck/icons/image_icon.png">    </p:cNvPr>
+          <p:cNvPr id="9" name="Image 1" descr="/home/claude/carboncheck/icons/image_icon.png"/>
           <p:cNvPicPr>
             <a:picLocks noChangeAspect="1"/>
           </p:cNvPicPr>
           <p:nvPr/>
         </p:nvPicPr>
         <p:blipFill>
-          <a:blip r:embed="rId3"/>
+          <a:blip r:embed="rId4"/>
           <a:stretch>
             <a:fillRect/>
           </a:stretch>
@@ -8945,7 +8652,7 @@
           <a:bodyPr wrap="square" rtlCol="0" anchor="ctr"/>
           <a:lstStyle/>
           <a:p>
-            <a:pPr algn="ctr" indent="0" marL="0">
+            <a:pPr marL="0" indent="0" algn="ctr">
               <a:buNone/>
             </a:pPr>
             <a:r>
@@ -8984,7 +8691,7 @@
           <a:bodyPr wrap="square" rtlCol="0" anchor="ctr"/>
           <a:lstStyle/>
           <a:p>
-            <a:pPr algn="ctr" indent="0" marL="0">
+            <a:pPr marL="0" indent="0" algn="ctr">
               <a:buNone/>
             </a:pPr>
             <a:r>
@@ -9031,7 +8738,7 @@
       </p:sp>
       <p:pic>
         <p:nvPicPr>
-          <p:cNvPr id="13" name="Image 2" descr="/home/claude/carboncheck/icons/image_icon.png">    </p:cNvPr>
+          <p:cNvPr id="13" name="Image 2" descr="/home/claude/carboncheck/icons/image_icon.png"/>
           <p:cNvPicPr>
             <a:picLocks noChangeAspect="1"/>
           </p:cNvPicPr>
@@ -9074,7 +8781,7 @@
           <a:bodyPr wrap="square" rtlCol="0" anchor="ctr"/>
           <a:lstStyle/>
           <a:p>
-            <a:pPr algn="ctr" indent="0" marL="0">
+            <a:pPr marL="0" indent="0" algn="ctr">
               <a:buNone/>
             </a:pPr>
             <a:r>
@@ -9113,7 +8820,7 @@
           <a:bodyPr wrap="square" rtlCol="0" anchor="ctr"/>
           <a:lstStyle/>
           <a:p>
-            <a:pPr algn="ctr" indent="0" marL="0">
+            <a:pPr marL="0" indent="0" algn="ctr">
               <a:buNone/>
             </a:pPr>
             <a:r>
@@ -9160,14 +8867,14 @@
       </p:sp>
       <p:pic>
         <p:nvPicPr>
-          <p:cNvPr id="17" name="Image 3" descr="/home/claude/carboncheck/icons/image_icon.png">    </p:cNvPr>
+          <p:cNvPr id="17" name="Image 3" descr="/home/claude/carboncheck/icons/image_icon.png"/>
           <p:cNvPicPr>
             <a:picLocks noChangeAspect="1"/>
           </p:cNvPicPr>
           <p:nvPr/>
         </p:nvPicPr>
         <p:blipFill>
-          <a:blip r:embed="rId5"/>
+          <a:blip r:embed="rId4"/>
           <a:stretch>
             <a:fillRect/>
           </a:stretch>
@@ -9203,7 +8910,7 @@
           <a:bodyPr wrap="square" rtlCol="0" anchor="ctr"/>
           <a:lstStyle/>
           <a:p>
-            <a:pPr algn="ctr" indent="0" marL="0">
+            <a:pPr marL="0" indent="0" algn="ctr">
               <a:buNone/>
             </a:pPr>
             <a:r>
@@ -9242,7 +8949,7 @@
           <a:bodyPr wrap="square" rtlCol="0" anchor="ctr"/>
           <a:lstStyle/>
           <a:p>
-            <a:pPr algn="ctr" indent="0" marL="0">
+            <a:pPr marL="0" indent="0" algn="ctr">
               <a:buNone/>
             </a:pPr>
             <a:r>
@@ -9289,14 +8996,14 @@
       </p:sp>
       <p:pic>
         <p:nvPicPr>
-          <p:cNvPr id="21" name="Image 4" descr="/home/claude/carboncheck/icons/image_icon.png">    </p:cNvPr>
+          <p:cNvPr id="21" name="Image 4" descr="/home/claude/carboncheck/icons/image_icon.png"/>
           <p:cNvPicPr>
             <a:picLocks noChangeAspect="1"/>
           </p:cNvPicPr>
           <p:nvPr/>
         </p:nvPicPr>
         <p:blipFill>
-          <a:blip r:embed="rId6"/>
+          <a:blip r:embed="rId4"/>
           <a:stretch>
             <a:fillRect/>
           </a:stretch>
@@ -9332,7 +9039,7 @@
           <a:bodyPr wrap="square" rtlCol="0" anchor="ctr"/>
           <a:lstStyle/>
           <a:p>
-            <a:pPr algn="ctr" indent="0" marL="0">
+            <a:pPr marL="0" indent="0" algn="ctr">
               <a:buNone/>
             </a:pPr>
             <a:r>
@@ -9371,7 +9078,7 @@
           <a:bodyPr wrap="square" rtlCol="0" anchor="ctr"/>
           <a:lstStyle/>
           <a:p>
-            <a:pPr algn="ctr" indent="0" marL="0">
+            <a:pPr marL="0" indent="0" algn="ctr">
               <a:buNone/>
             </a:pPr>
             <a:r>
@@ -9410,11 +9117,11 @@
           <a:bodyPr wrap="square" rtlCol="0" anchor="ctr"/>
           <a:lstStyle/>
           <a:p>
-            <a:pPr indent="0" marL="0">
-              <a:buNone/>
-            </a:pPr>
-            <a:r>
-              <a:rPr lang="en-US" sz="900" b="1" spc="200" kern="0" dirty="0">
+            <a:pPr marL="0" indent="0">
+              <a:buNone/>
+            </a:pPr>
+            <a:r>
+              <a:rPr lang="en-US" sz="900" b="1" kern="0" spc="200" dirty="0">
                 <a:solidFill>
                   <a:srgbClr val="8FA69A"/>
                 </a:solidFill>
@@ -9449,7 +9156,7 @@
           <a:bodyPr wrap="square" rtlCol="0" anchor="ctr"/>
           <a:lstStyle/>
           <a:p>
-            <a:pPr algn="r" indent="0" marL="0">
+            <a:pPr marL="0" indent="0" algn="r">
               <a:buNone/>
             </a:pPr>
             <a:r>
@@ -9481,7 +9188,7 @@
     <p:bg>
       <p:bgPr>
         <a:blipFill dpi="0" rotWithShape="1">
-          <a:blip r:embed="rId1">
+          <a:blip r:embed="rId3">
             <a:lum/>
           </a:blip>
           <a:srcRect/>
@@ -9527,11 +9234,11 @@
           <a:bodyPr wrap="square" rtlCol="0" anchor="ctr"/>
           <a:lstStyle/>
           <a:p>
-            <a:pPr indent="0" marL="0">
-              <a:buNone/>
-            </a:pPr>
-            <a:r>
-              <a:rPr lang="en-US" sz="1200" b="1" spc="200" kern="0" dirty="0">
+            <a:pPr marL="0" indent="0">
+              <a:buNone/>
+            </a:pPr>
+            <a:r>
+              <a:rPr lang="en-US" sz="1200" b="1" kern="0" spc="200" dirty="0">
                 <a:solidFill>
                   <a:srgbClr val="2D9C6F"/>
                 </a:solidFill>
@@ -9566,7 +9273,7 @@
           <a:bodyPr wrap="square" rtlCol="0" anchor="ctr"/>
           <a:lstStyle/>
           <a:p>
-            <a:pPr indent="0" marL="0">
+            <a:pPr marL="0" indent="0">
               <a:buNone/>
             </a:pPr>
             <a:r>
@@ -9613,14 +9320,14 @@
       </p:sp>
       <p:pic>
         <p:nvPicPr>
-          <p:cNvPr id="5" name="Image 0" descr="/home/claude/carboncheck/icons/image_icon.png">    </p:cNvPr>
+          <p:cNvPr id="5" name="Image 0" descr="/home/claude/carboncheck/icons/image_icon.png"/>
           <p:cNvPicPr>
             <a:picLocks noChangeAspect="1"/>
           </p:cNvPicPr>
           <p:nvPr/>
         </p:nvPicPr>
         <p:blipFill>
-          <a:blip r:embed="rId2"/>
+          <a:blip r:embed="rId4"/>
           <a:stretch>
             <a:fillRect/>
           </a:stretch>
@@ -9656,7 +9363,7 @@
           <a:bodyPr wrap="square" rtlCol="0" anchor="ctr"/>
           <a:lstStyle/>
           <a:p>
-            <a:pPr algn="ctr" indent="0" marL="0">
+            <a:pPr marL="0" indent="0" algn="ctr">
               <a:buNone/>
             </a:pPr>
             <a:r>
@@ -9695,7 +9402,7 @@
           <a:bodyPr wrap="square" rtlCol="0" anchor="ctr"/>
           <a:lstStyle/>
           <a:p>
-            <a:pPr algn="ctr" indent="0" marL="0">
+            <a:pPr marL="0" indent="0" algn="ctr">
               <a:buNone/>
             </a:pPr>
             <a:r>
@@ -9742,14 +9449,14 @@
       </p:sp>
       <p:pic>
         <p:nvPicPr>
-          <p:cNvPr id="9" name="Image 1" descr="/home/claude/carboncheck/icons/image_icon.png">    </p:cNvPr>
+          <p:cNvPr id="9" name="Image 1" descr="/home/claude/carboncheck/icons/image_icon.png"/>
           <p:cNvPicPr>
             <a:picLocks noChangeAspect="1"/>
           </p:cNvPicPr>
           <p:nvPr/>
         </p:nvPicPr>
         <p:blipFill>
-          <a:blip r:embed="rId3"/>
+          <a:blip r:embed="rId4"/>
           <a:stretch>
             <a:fillRect/>
           </a:stretch>
@@ -9785,7 +9492,7 @@
           <a:bodyPr wrap="square" rtlCol="0" anchor="ctr"/>
           <a:lstStyle/>
           <a:p>
-            <a:pPr algn="ctr" indent="0" marL="0">
+            <a:pPr marL="0" indent="0" algn="ctr">
               <a:buNone/>
             </a:pPr>
             <a:r>
@@ -9824,7 +9531,7 @@
           <a:bodyPr wrap="square" rtlCol="0" anchor="ctr"/>
           <a:lstStyle/>
           <a:p>
-            <a:pPr algn="ctr" indent="0" marL="0">
+            <a:pPr marL="0" indent="0" algn="ctr">
               <a:buNone/>
             </a:pPr>
             <a:r>
@@ -9871,7 +9578,7 @@
       </p:sp>
       <p:pic>
         <p:nvPicPr>
-          <p:cNvPr id="13" name="Image 2" descr="/home/claude/carboncheck/icons/image_icon.png">    </p:cNvPr>
+          <p:cNvPr id="13" name="Image 2" descr="/home/claude/carboncheck/icons/image_icon.png"/>
           <p:cNvPicPr>
             <a:picLocks noChangeAspect="1"/>
           </p:cNvPicPr>
@@ -9914,7 +9621,7 @@
           <a:bodyPr wrap="square" rtlCol="0" anchor="ctr"/>
           <a:lstStyle/>
           <a:p>
-            <a:pPr algn="ctr" indent="0" marL="0">
+            <a:pPr marL="0" indent="0" algn="ctr">
               <a:buNone/>
             </a:pPr>
             <a:r>
@@ -9953,7 +9660,7 @@
           <a:bodyPr wrap="square" rtlCol="0" anchor="ctr"/>
           <a:lstStyle/>
           <a:p>
-            <a:pPr algn="ctr" indent="0" marL="0">
+            <a:pPr marL="0" indent="0" algn="ctr">
               <a:buNone/>
             </a:pPr>
             <a:r>
@@ -10000,14 +9707,14 @@
       </p:sp>
       <p:pic>
         <p:nvPicPr>
-          <p:cNvPr id="17" name="Image 3" descr="/home/claude/carboncheck/icons/image_icon.png">    </p:cNvPr>
+          <p:cNvPr id="17" name="Image 3" descr="/home/claude/carboncheck/icons/image_icon.png"/>
           <p:cNvPicPr>
             <a:picLocks noChangeAspect="1"/>
           </p:cNvPicPr>
           <p:nvPr/>
         </p:nvPicPr>
         <p:blipFill>
-          <a:blip r:embed="rId5"/>
+          <a:blip r:embed="rId4"/>
           <a:stretch>
             <a:fillRect/>
           </a:stretch>
@@ -10043,7 +9750,7 @@
           <a:bodyPr wrap="square" rtlCol="0" anchor="ctr"/>
           <a:lstStyle/>
           <a:p>
-            <a:pPr algn="ctr" indent="0" marL="0">
+            <a:pPr marL="0" indent="0" algn="ctr">
               <a:buNone/>
             </a:pPr>
             <a:r>
@@ -10082,7 +9789,7 @@
           <a:bodyPr wrap="square" rtlCol="0" anchor="ctr"/>
           <a:lstStyle/>
           <a:p>
-            <a:pPr algn="ctr" indent="0" marL="0">
+            <a:pPr marL="0" indent="0" algn="ctr">
               <a:buNone/>
             </a:pPr>
             <a:r>
@@ -10129,14 +9836,14 @@
       </p:sp>
       <p:pic>
         <p:nvPicPr>
-          <p:cNvPr id="21" name="Image 4" descr="/home/claude/carboncheck/icons/image_icon.png">    </p:cNvPr>
+          <p:cNvPr id="21" name="Image 4" descr="/home/claude/carboncheck/icons/image_icon.png"/>
           <p:cNvPicPr>
             <a:picLocks noChangeAspect="1"/>
           </p:cNvPicPr>
           <p:nvPr/>
         </p:nvPicPr>
         <p:blipFill>
-          <a:blip r:embed="rId6"/>
+          <a:blip r:embed="rId4"/>
           <a:stretch>
             <a:fillRect/>
           </a:stretch>
@@ -10172,7 +9879,7 @@
           <a:bodyPr wrap="square" rtlCol="0" anchor="ctr"/>
           <a:lstStyle/>
           <a:p>
-            <a:pPr algn="ctr" indent="0" marL="0">
+            <a:pPr marL="0" indent="0" algn="ctr">
               <a:buNone/>
             </a:pPr>
             <a:r>
@@ -10211,7 +9918,7 @@
           <a:bodyPr wrap="square" rtlCol="0" anchor="ctr"/>
           <a:lstStyle/>
           <a:p>
-            <a:pPr algn="ctr" indent="0" marL="0">
+            <a:pPr marL="0" indent="0" algn="ctr">
               <a:buNone/>
             </a:pPr>
             <a:r>
@@ -10258,14 +9965,14 @@
       </p:sp>
       <p:pic>
         <p:nvPicPr>
-          <p:cNvPr id="25" name="Image 5" descr="/home/claude/carboncheck/icons/image_icon.png">    </p:cNvPr>
+          <p:cNvPr id="25" name="Image 5" descr="/home/claude/carboncheck/icons/image_icon.png"/>
           <p:cNvPicPr>
             <a:picLocks noChangeAspect="1"/>
           </p:cNvPicPr>
           <p:nvPr/>
         </p:nvPicPr>
         <p:blipFill>
-          <a:blip r:embed="rId7"/>
+          <a:blip r:embed="rId4"/>
           <a:stretch>
             <a:fillRect/>
           </a:stretch>
@@ -10301,7 +10008,7 @@
           <a:bodyPr wrap="square" rtlCol="0" anchor="ctr"/>
           <a:lstStyle/>
           <a:p>
-            <a:pPr algn="ctr" indent="0" marL="0">
+            <a:pPr marL="0" indent="0" algn="ctr">
               <a:buNone/>
             </a:pPr>
             <a:r>
@@ -10340,7 +10047,7 @@
           <a:bodyPr wrap="square" rtlCol="0" anchor="ctr"/>
           <a:lstStyle/>
           <a:p>
-            <a:pPr algn="ctr" indent="0" marL="0">
+            <a:pPr marL="0" indent="0" algn="ctr">
               <a:buNone/>
             </a:pPr>
             <a:r>
@@ -10387,14 +10094,14 @@
       </p:sp>
       <p:pic>
         <p:nvPicPr>
-          <p:cNvPr id="29" name="Image 6" descr="/home/claude/carboncheck/icons/image_icon.png">    </p:cNvPr>
+          <p:cNvPr id="29" name="Image 6" descr="/home/claude/carboncheck/icons/image_icon.png"/>
           <p:cNvPicPr>
             <a:picLocks noChangeAspect="1"/>
           </p:cNvPicPr>
           <p:nvPr/>
         </p:nvPicPr>
         <p:blipFill>
-          <a:blip r:embed="rId8"/>
+          <a:blip r:embed="rId4"/>
           <a:stretch>
             <a:fillRect/>
           </a:stretch>
@@ -10430,7 +10137,7 @@
           <a:bodyPr wrap="square" rtlCol="0" anchor="ctr"/>
           <a:lstStyle/>
           <a:p>
-            <a:pPr algn="ctr" indent="0" marL="0">
+            <a:pPr marL="0" indent="0" algn="ctr">
               <a:buNone/>
             </a:pPr>
             <a:r>
@@ -10469,7 +10176,7 @@
           <a:bodyPr wrap="square" rtlCol="0" anchor="ctr"/>
           <a:lstStyle/>
           <a:p>
-            <a:pPr algn="ctr" indent="0" marL="0">
+            <a:pPr marL="0" indent="0" algn="ctr">
               <a:buNone/>
             </a:pPr>
             <a:r>
@@ -10508,11 +10215,11 @@
           <a:bodyPr wrap="square" rtlCol="0" anchor="ctr"/>
           <a:lstStyle/>
           <a:p>
-            <a:pPr indent="0" marL="0">
-              <a:buNone/>
-            </a:pPr>
-            <a:r>
-              <a:rPr lang="en-US" sz="900" b="1" spc="200" kern="0" dirty="0">
+            <a:pPr marL="0" indent="0">
+              <a:buNone/>
+            </a:pPr>
+            <a:r>
+              <a:rPr lang="en-US" sz="900" b="1" kern="0" spc="200" dirty="0">
                 <a:solidFill>
                   <a:srgbClr val="8FA69A"/>
                 </a:solidFill>
@@ -10547,7 +10254,7 @@
           <a:bodyPr wrap="square" rtlCol="0" anchor="ctr"/>
           <a:lstStyle/>
           <a:p>
-            <a:pPr algn="r" indent="0" marL="0">
+            <a:pPr marL="0" indent="0" algn="r">
               <a:buNone/>
             </a:pPr>
             <a:r>
@@ -10579,7 +10286,7 @@
     <p:bg>
       <p:bgPr>
         <a:blipFill dpi="0" rotWithShape="1">
-          <a:blip r:embed="rId1">
+          <a:blip r:embed="rId3">
             <a:lum/>
           </a:blip>
           <a:srcRect/>
@@ -10625,11 +10332,11 @@
           <a:bodyPr wrap="square" rtlCol="0" anchor="ctr"/>
           <a:lstStyle/>
           <a:p>
-            <a:pPr indent="0" marL="0">
-              <a:buNone/>
-            </a:pPr>
-            <a:r>
-              <a:rPr lang="en-US" sz="1200" b="1" spc="200" kern="0" dirty="0">
+            <a:pPr marL="0" indent="0">
+              <a:buNone/>
+            </a:pPr>
+            <a:r>
+              <a:rPr lang="en-US" sz="1200" b="1" kern="0" spc="200" dirty="0">
                 <a:solidFill>
                   <a:srgbClr val="2D9C6F"/>
                 </a:solidFill>
@@ -10664,7 +10371,7 @@
           <a:bodyPr wrap="square" rtlCol="0" anchor="ctr"/>
           <a:lstStyle/>
           <a:p>
-            <a:pPr indent="0" marL="0">
+            <a:pPr marL="0" indent="0">
               <a:buNone/>
             </a:pPr>
             <a:r>
@@ -10711,14 +10418,14 @@
       </p:sp>
       <p:pic>
         <p:nvPicPr>
-          <p:cNvPr id="5" name="Image 0" descr="/home/claude/carboncheck/icons/image_icon.png">    </p:cNvPr>
+          <p:cNvPr id="5" name="Image 0" descr="/home/claude/carboncheck/icons/image_icon.png"/>
           <p:cNvPicPr>
             <a:picLocks noChangeAspect="1"/>
           </p:cNvPicPr>
           <p:nvPr/>
         </p:nvPicPr>
         <p:blipFill>
-          <a:blip r:embed="rId2"/>
+          <a:blip r:embed="rId4"/>
           <a:stretch>
             <a:fillRect/>
           </a:stretch>
@@ -10754,7 +10461,7 @@
           <a:bodyPr wrap="square" rtlCol="0" anchor="ctr"/>
           <a:lstStyle/>
           <a:p>
-            <a:pPr algn="ctr" indent="0" marL="0">
+            <a:pPr marL="0" indent="0" algn="ctr">
               <a:buNone/>
             </a:pPr>
             <a:r>
@@ -10793,7 +10500,7 @@
           <a:bodyPr wrap="square" rtlCol="0" anchor="ctr"/>
           <a:lstStyle/>
           <a:p>
-            <a:pPr algn="ctr" indent="0" marL="0">
+            <a:pPr marL="0" indent="0" algn="ctr">
               <a:buNone/>
             </a:pPr>
             <a:r>
@@ -10840,14 +10547,14 @@
       </p:sp>
       <p:pic>
         <p:nvPicPr>
-          <p:cNvPr id="9" name="Image 1" descr="/home/claude/carboncheck/icons/image_icon.png">    </p:cNvPr>
+          <p:cNvPr id="9" name="Image 1" descr="/home/claude/carboncheck/icons/image_icon.png"/>
           <p:cNvPicPr>
             <a:picLocks noChangeAspect="1"/>
           </p:cNvPicPr>
           <p:nvPr/>
         </p:nvPicPr>
         <p:blipFill>
-          <a:blip r:embed="rId3"/>
+          <a:blip r:embed="rId4"/>
           <a:stretch>
             <a:fillRect/>
           </a:stretch>
@@ -10883,7 +10590,7 @@
           <a:bodyPr wrap="square" rtlCol="0" anchor="ctr"/>
           <a:lstStyle/>
           <a:p>
-            <a:pPr algn="ctr" indent="0" marL="0">
+            <a:pPr marL="0" indent="0" algn="ctr">
               <a:buNone/>
             </a:pPr>
             <a:r>
@@ -10922,7 +10629,7 @@
           <a:bodyPr wrap="square" rtlCol="0" anchor="ctr"/>
           <a:lstStyle/>
           <a:p>
-            <a:pPr algn="ctr" indent="0" marL="0">
+            <a:pPr marL="0" indent="0" algn="ctr">
               <a:buNone/>
             </a:pPr>
             <a:r>
@@ -10969,7 +10676,7 @@
       </p:sp>
       <p:pic>
         <p:nvPicPr>
-          <p:cNvPr id="13" name="Image 2" descr="/home/claude/carboncheck/icons/image_icon.png">    </p:cNvPr>
+          <p:cNvPr id="13" name="Image 2" descr="/home/claude/carboncheck/icons/image_icon.png"/>
           <p:cNvPicPr>
             <a:picLocks noChangeAspect="1"/>
           </p:cNvPicPr>
@@ -11012,7 +10719,7 @@
           <a:bodyPr wrap="square" rtlCol="0" anchor="ctr"/>
           <a:lstStyle/>
           <a:p>
-            <a:pPr algn="ctr" indent="0" marL="0">
+            <a:pPr marL="0" indent="0" algn="ctr">
               <a:buNone/>
             </a:pPr>
             <a:r>
@@ -11051,7 +10758,7 @@
           <a:bodyPr wrap="square" rtlCol="0" anchor="ctr"/>
           <a:lstStyle/>
           <a:p>
-            <a:pPr algn="ctr" indent="0" marL="0">
+            <a:pPr marL="0" indent="0" algn="ctr">
               <a:buNone/>
             </a:pPr>
             <a:r>
@@ -11098,14 +10805,14 @@
       </p:sp>
       <p:pic>
         <p:nvPicPr>
-          <p:cNvPr id="17" name="Image 3" descr="/home/claude/carboncheck/icons/image_icon.png">    </p:cNvPr>
+          <p:cNvPr id="17" name="Image 3" descr="/home/claude/carboncheck/icons/image_icon.png"/>
           <p:cNvPicPr>
             <a:picLocks noChangeAspect="1"/>
           </p:cNvPicPr>
           <p:nvPr/>
         </p:nvPicPr>
         <p:blipFill>
-          <a:blip r:embed="rId5"/>
+          <a:blip r:embed="rId4"/>
           <a:stretch>
             <a:fillRect/>
           </a:stretch>
@@ -11141,7 +10848,7 @@
           <a:bodyPr wrap="square" rtlCol="0" anchor="ctr"/>
           <a:lstStyle/>
           <a:p>
-            <a:pPr algn="ctr" indent="0" marL="0">
+            <a:pPr marL="0" indent="0" algn="ctr">
               <a:buNone/>
             </a:pPr>
             <a:r>
@@ -11180,7 +10887,7 @@
           <a:bodyPr wrap="square" rtlCol="0" anchor="ctr"/>
           <a:lstStyle/>
           <a:p>
-            <a:pPr algn="ctr" indent="0" marL="0">
+            <a:pPr marL="0" indent="0" algn="ctr">
               <a:buNone/>
             </a:pPr>
             <a:r>
@@ -11227,14 +10934,14 @@
       </p:sp>
       <p:pic>
         <p:nvPicPr>
-          <p:cNvPr id="21" name="Image 4" descr="/home/claude/carboncheck/icons/image_icon.png">    </p:cNvPr>
+          <p:cNvPr id="21" name="Image 4" descr="/home/claude/carboncheck/icons/image_icon.png"/>
           <p:cNvPicPr>
             <a:picLocks noChangeAspect="1"/>
           </p:cNvPicPr>
           <p:nvPr/>
         </p:nvPicPr>
         <p:blipFill>
-          <a:blip r:embed="rId6"/>
+          <a:blip r:embed="rId4"/>
           <a:stretch>
             <a:fillRect/>
           </a:stretch>
@@ -11270,7 +10977,7 @@
           <a:bodyPr wrap="square" rtlCol="0" anchor="ctr"/>
           <a:lstStyle/>
           <a:p>
-            <a:pPr algn="ctr" indent="0" marL="0">
+            <a:pPr marL="0" indent="0" algn="ctr">
               <a:buNone/>
             </a:pPr>
             <a:r>
@@ -11309,7 +11016,7 @@
           <a:bodyPr wrap="square" rtlCol="0" anchor="ctr"/>
           <a:lstStyle/>
           <a:p>
-            <a:pPr algn="ctr" indent="0" marL="0">
+            <a:pPr marL="0" indent="0" algn="ctr">
               <a:buNone/>
             </a:pPr>
             <a:r>
@@ -11356,14 +11063,14 @@
       </p:sp>
       <p:pic>
         <p:nvPicPr>
-          <p:cNvPr id="25" name="Image 5" descr="/home/claude/carboncheck/icons/image_icon.png">    </p:cNvPr>
+          <p:cNvPr id="25" name="Image 5" descr="/home/claude/carboncheck/icons/image_icon.png"/>
           <p:cNvPicPr>
             <a:picLocks noChangeAspect="1"/>
           </p:cNvPicPr>
           <p:nvPr/>
         </p:nvPicPr>
         <p:blipFill>
-          <a:blip r:embed="rId7"/>
+          <a:blip r:embed="rId4"/>
           <a:stretch>
             <a:fillRect/>
           </a:stretch>
@@ -11399,7 +11106,7 @@
           <a:bodyPr wrap="square" rtlCol="0" anchor="ctr"/>
           <a:lstStyle/>
           <a:p>
-            <a:pPr algn="ctr" indent="0" marL="0">
+            <a:pPr marL="0" indent="0" algn="ctr">
               <a:buNone/>
             </a:pPr>
             <a:r>
@@ -11438,7 +11145,7 @@
           <a:bodyPr wrap="square" rtlCol="0" anchor="ctr"/>
           <a:lstStyle/>
           <a:p>
-            <a:pPr algn="ctr" indent="0" marL="0">
+            <a:pPr marL="0" indent="0" algn="ctr">
               <a:buNone/>
             </a:pPr>
             <a:r>
@@ -11477,11 +11184,11 @@
           <a:bodyPr wrap="square" rtlCol="0" anchor="ctr"/>
           <a:lstStyle/>
           <a:p>
-            <a:pPr indent="0" marL="0">
-              <a:buNone/>
-            </a:pPr>
-            <a:r>
-              <a:rPr lang="en-US" sz="900" b="1" spc="200" kern="0" dirty="0">
+            <a:pPr marL="0" indent="0">
+              <a:buNone/>
+            </a:pPr>
+            <a:r>
+              <a:rPr lang="en-US" sz="900" b="1" kern="0" spc="200" dirty="0">
                 <a:solidFill>
                   <a:srgbClr val="8FA69A"/>
                 </a:solidFill>
@@ -11516,7 +11223,7 @@
           <a:bodyPr wrap="square" rtlCol="0" anchor="ctr"/>
           <a:lstStyle/>
           <a:p>
-            <a:pPr algn="r" indent="0" marL="0">
+            <a:pPr marL="0" indent="0" algn="r">
               <a:buNone/>
             </a:pPr>
             <a:r>
@@ -11548,7 +11255,7 @@
     <p:bg>
       <p:bgPr>
         <a:blipFill dpi="0" rotWithShape="1">
-          <a:blip r:embed="rId1">
+          <a:blip r:embed="rId3">
             <a:lum/>
           </a:blip>
           <a:srcRect/>
@@ -11594,11 +11301,11 @@
           <a:bodyPr wrap="square" rtlCol="0" anchor="ctr"/>
           <a:lstStyle/>
           <a:p>
-            <a:pPr indent="0" marL="0">
-              <a:buNone/>
-            </a:pPr>
-            <a:r>
-              <a:rPr lang="en-US" sz="1200" b="1" spc="200" kern="0" dirty="0">
+            <a:pPr marL="0" indent="0">
+              <a:buNone/>
+            </a:pPr>
+            <a:r>
+              <a:rPr lang="en-US" sz="1200" b="1" kern="0" spc="200" dirty="0">
                 <a:solidFill>
                   <a:srgbClr val="2D9C6F"/>
                 </a:solidFill>
@@ -11633,7 +11340,7 @@
           <a:bodyPr wrap="square" rtlCol="0" anchor="ctr"/>
           <a:lstStyle/>
           <a:p>
-            <a:pPr indent="0" marL="0">
+            <a:pPr marL="0" indent="0">
               <a:buNone/>
             </a:pPr>
             <a:r>
@@ -11677,7 +11384,7 @@
             <a:prstDash val="solid"/>
           </a:ln>
           <a:effectLst>
-            <a:outerShdw sx="100000" sy="100000" kx="0" ky="0" algn="bl" rotWithShape="0" blurRad="127000" dist="38100" dir="5400000">
+            <a:outerShdw blurRad="127000" dist="38100" dir="5400000" algn="bl" rotWithShape="0">
               <a:srgbClr val="1B4332">
                 <a:alpha val="10000"/>
               </a:srgbClr>
@@ -11707,14 +11414,14 @@
       </p:sp>
       <p:pic>
         <p:nvPicPr>
-          <p:cNvPr id="6" name="Image 0" descr="/home/claude/carboncheck/icons/check.png">    </p:cNvPr>
+          <p:cNvPr id="6" name="Image 0" descr="/home/claude/carboncheck/icons/check.png"/>
           <p:cNvPicPr>
             <a:picLocks noChangeAspect="1"/>
           </p:cNvPicPr>
           <p:nvPr/>
         </p:nvPicPr>
         <p:blipFill>
-          <a:blip r:embed="rId2"/>
+          <a:blip r:embed="rId4"/>
           <a:stretch>
             <a:fillRect/>
           </a:stretch>
@@ -11750,7 +11457,7 @@
           <a:bodyPr wrap="square" rtlCol="0" anchor="ctr"/>
           <a:lstStyle/>
           <a:p>
-            <a:pPr indent="0" marL="0">
+            <a:pPr marL="0" indent="0">
               <a:buNone/>
             </a:pPr>
             <a:r>
@@ -11789,7 +11496,7 @@
           <a:bodyPr wrap="square" rtlCol="0" anchor="ctr"/>
           <a:lstStyle/>
           <a:p>
-            <a:pPr indent="0" marL="0">
+            <a:pPr marL="0" indent="0">
               <a:buNone/>
             </a:pPr>
             <a:r>
@@ -11833,7 +11540,7 @@
             <a:prstDash val="solid"/>
           </a:ln>
           <a:effectLst>
-            <a:outerShdw sx="100000" sy="100000" kx="0" ky="0" algn="bl" rotWithShape="0" blurRad="127000" dist="38100" dir="5400000">
+            <a:outerShdw blurRad="127000" dist="38100" dir="5400000" algn="bl" rotWithShape="0">
               <a:srgbClr val="1B4332">
                 <a:alpha val="10000"/>
               </a:srgbClr>
@@ -11863,14 +11570,14 @@
       </p:sp>
       <p:pic>
         <p:nvPicPr>
-          <p:cNvPr id="11" name="Image 1" descr="/home/claude/carboncheck/icons/gauge.png">    </p:cNvPr>
+          <p:cNvPr id="11" name="Image 1" descr="/home/claude/carboncheck/icons/gauge.png"/>
           <p:cNvPicPr>
             <a:picLocks noChangeAspect="1"/>
           </p:cNvPicPr>
           <p:nvPr/>
         </p:nvPicPr>
         <p:blipFill>
-          <a:blip r:embed="rId3"/>
+          <a:blip r:embed="rId5"/>
           <a:stretch>
             <a:fillRect/>
           </a:stretch>
@@ -11906,7 +11613,7 @@
           <a:bodyPr wrap="square" rtlCol="0" anchor="ctr"/>
           <a:lstStyle/>
           <a:p>
-            <a:pPr indent="0" marL="0">
+            <a:pPr marL="0" indent="0">
               <a:buNone/>
             </a:pPr>
             <a:r>
@@ -11945,7 +11652,7 @@
           <a:bodyPr wrap="square" rtlCol="0" anchor="ctr"/>
           <a:lstStyle/>
           <a:p>
-            <a:pPr indent="0" marL="0">
+            <a:pPr marL="0" indent="0">
               <a:buNone/>
             </a:pPr>
             <a:r>
@@ -11989,7 +11696,7 @@
             <a:prstDash val="solid"/>
           </a:ln>
           <a:effectLst>
-            <a:outerShdw sx="100000" sy="100000" kx="0" ky="0" algn="bl" rotWithShape="0" blurRad="127000" dist="38100" dir="5400000">
+            <a:outerShdw blurRad="127000" dist="38100" dir="5400000" algn="bl" rotWithShape="0">
               <a:srgbClr val="1B4332">
                 <a:alpha val="10000"/>
               </a:srgbClr>
@@ -12019,14 +11726,14 @@
       </p:sp>
       <p:pic>
         <p:nvPicPr>
-          <p:cNvPr id="16" name="Image 2" descr="/home/claude/carboncheck/icons/chart.png">    </p:cNvPr>
+          <p:cNvPr id="16" name="Image 2" descr="/home/claude/carboncheck/icons/chart.png"/>
           <p:cNvPicPr>
             <a:picLocks noChangeAspect="1"/>
           </p:cNvPicPr>
           <p:nvPr/>
         </p:nvPicPr>
         <p:blipFill>
-          <a:blip r:embed="rId4"/>
+          <a:blip r:embed="rId6"/>
           <a:stretch>
             <a:fillRect/>
           </a:stretch>
@@ -12062,7 +11769,7 @@
           <a:bodyPr wrap="square" rtlCol="0" anchor="ctr"/>
           <a:lstStyle/>
           <a:p>
-            <a:pPr indent="0" marL="0">
+            <a:pPr marL="0" indent="0">
               <a:buNone/>
             </a:pPr>
             <a:r>
@@ -12101,7 +11808,7 @@
           <a:bodyPr wrap="square" rtlCol="0" anchor="ctr"/>
           <a:lstStyle/>
           <a:p>
-            <a:pPr indent="0" marL="0">
+            <a:pPr marL="0" indent="0">
               <a:buNone/>
             </a:pPr>
             <a:r>
@@ -12145,7 +11852,7 @@
             <a:prstDash val="solid"/>
           </a:ln>
           <a:effectLst>
-            <a:outerShdw sx="100000" sy="100000" kx="0" ky="0" algn="bl" rotWithShape="0" blurRad="127000" dist="38100" dir="5400000">
+            <a:outerShdw blurRad="127000" dist="38100" dir="5400000" algn="bl" rotWithShape="0">
               <a:srgbClr val="1B4332">
                 <a:alpha val="10000"/>
               </a:srgbClr>
@@ -12175,14 +11882,14 @@
       </p:sp>
       <p:pic>
         <p:nvPicPr>
-          <p:cNvPr id="21" name="Image 3" descr="/home/claude/carboncheck/icons/lightbulb.png">    </p:cNvPr>
+          <p:cNvPr id="21" name="Image 3" descr="/home/claude/carboncheck/icons/lightbulb.png"/>
           <p:cNvPicPr>
             <a:picLocks noChangeAspect="1"/>
           </p:cNvPicPr>
           <p:nvPr/>
         </p:nvPicPr>
         <p:blipFill>
-          <a:blip r:embed="rId5"/>
+          <a:blip r:embed="rId7"/>
           <a:stretch>
             <a:fillRect/>
           </a:stretch>
@@ -12218,7 +11925,7 @@
           <a:bodyPr wrap="square" rtlCol="0" anchor="ctr"/>
           <a:lstStyle/>
           <a:p>
-            <a:pPr indent="0" marL="0">
+            <a:pPr marL="0" indent="0">
               <a:buNone/>
             </a:pPr>
             <a:r>
@@ -12257,7 +11964,7 @@
           <a:bodyPr wrap="square" rtlCol="0" anchor="ctr"/>
           <a:lstStyle/>
           <a:p>
-            <a:pPr indent="0" marL="0">
+            <a:pPr marL="0" indent="0">
               <a:buNone/>
             </a:pPr>
             <a:r>
@@ -12301,7 +12008,7 @@
             <a:prstDash val="solid"/>
           </a:ln>
           <a:effectLst>
-            <a:outerShdw sx="100000" sy="100000" kx="0" ky="0" algn="bl" rotWithShape="0" blurRad="127000" dist="38100" dir="5400000">
+            <a:outerShdw blurRad="127000" dist="38100" dir="5400000" algn="bl" rotWithShape="0">
               <a:srgbClr val="1B4332">
                 <a:alpha val="10000"/>
               </a:srgbClr>
@@ -12331,14 +12038,14 @@
       </p:sp>
       <p:pic>
         <p:nvPicPr>
-          <p:cNvPr id="26" name="Image 4" descr="/home/claude/carboncheck/icons/rocket.png">    </p:cNvPr>
+          <p:cNvPr id="26" name="Image 4" descr="/home/claude/carboncheck/icons/rocket.png"/>
           <p:cNvPicPr>
             <a:picLocks noChangeAspect="1"/>
           </p:cNvPicPr>
           <p:nvPr/>
         </p:nvPicPr>
         <p:blipFill>
-          <a:blip r:embed="rId6"/>
+          <a:blip r:embed="rId8"/>
           <a:stretch>
             <a:fillRect/>
           </a:stretch>
@@ -12374,7 +12081,7 @@
           <a:bodyPr wrap="square" rtlCol="0" anchor="ctr"/>
           <a:lstStyle/>
           <a:p>
-            <a:pPr indent="0" marL="0">
+            <a:pPr marL="0" indent="0">
               <a:buNone/>
             </a:pPr>
             <a:r>
@@ -12413,7 +12120,7 @@
           <a:bodyPr wrap="square" rtlCol="0" anchor="ctr"/>
           <a:lstStyle/>
           <a:p>
-            <a:pPr indent="0" marL="0">
+            <a:pPr marL="0" indent="0">
               <a:buNone/>
             </a:pPr>
             <a:r>
@@ -12457,7 +12164,7 @@
             <a:prstDash val="solid"/>
           </a:ln>
           <a:effectLst>
-            <a:outerShdw sx="100000" sy="100000" kx="0" ky="0" algn="bl" rotWithShape="0" blurRad="127000" dist="38100" dir="5400000">
+            <a:outerShdw blurRad="127000" dist="38100" dir="5400000" algn="bl" rotWithShape="0">
               <a:srgbClr val="1B4332">
                 <a:alpha val="10000"/>
               </a:srgbClr>
@@ -12487,14 +12194,14 @@
       </p:sp>
       <p:pic>
         <p:nvPicPr>
-          <p:cNvPr id="31" name="Image 5" descr="/home/claude/carboncheck/icons/mobile.png">    </p:cNvPr>
+          <p:cNvPr id="31" name="Image 5" descr="/home/claude/carboncheck/icons/mobile.png"/>
           <p:cNvPicPr>
             <a:picLocks noChangeAspect="1"/>
           </p:cNvPicPr>
           <p:nvPr/>
         </p:nvPicPr>
         <p:blipFill>
-          <a:blip r:embed="rId7"/>
+          <a:blip r:embed="rId9"/>
           <a:stretch>
             <a:fillRect/>
           </a:stretch>
@@ -12530,7 +12237,7 @@
           <a:bodyPr wrap="square" rtlCol="0" anchor="ctr"/>
           <a:lstStyle/>
           <a:p>
-            <a:pPr indent="0" marL="0">
+            <a:pPr marL="0" indent="0">
               <a:buNone/>
             </a:pPr>
             <a:r>
@@ -12569,7 +12276,7 @@
           <a:bodyPr wrap="square" rtlCol="0" anchor="ctr"/>
           <a:lstStyle/>
           <a:p>
-            <a:pPr indent="0" marL="0">
+            <a:pPr marL="0" indent="0">
               <a:buNone/>
             </a:pPr>
             <a:r>
@@ -12608,11 +12315,11 @@
           <a:bodyPr wrap="square" rtlCol="0" anchor="ctr"/>
           <a:lstStyle/>
           <a:p>
-            <a:pPr indent="0" marL="0">
-              <a:buNone/>
-            </a:pPr>
-            <a:r>
-              <a:rPr lang="en-US" sz="900" b="1" spc="200" kern="0" dirty="0">
+            <a:pPr marL="0" indent="0">
+              <a:buNone/>
+            </a:pPr>
+            <a:r>
+              <a:rPr lang="en-US" sz="900" b="1" kern="0" spc="200" dirty="0">
                 <a:solidFill>
                   <a:srgbClr val="8FA69A"/>
                 </a:solidFill>
@@ -12647,7 +12354,7 @@
           <a:bodyPr wrap="square" rtlCol="0" anchor="ctr"/>
           <a:lstStyle/>
           <a:p>
-            <a:pPr algn="r" indent="0" marL="0">
+            <a:pPr marL="0" indent="0" algn="r">
               <a:buNone/>
             </a:pPr>
             <a:r>
@@ -12679,7 +12386,7 @@
     <p:bg>
       <p:bgPr>
         <a:blipFill dpi="0" rotWithShape="1">
-          <a:blip r:embed="rId1">
+          <a:blip r:embed="rId3">
             <a:lum/>
           </a:blip>
           <a:srcRect/>
@@ -12725,11 +12432,11 @@
           <a:bodyPr wrap="square" rtlCol="0" anchor="ctr"/>
           <a:lstStyle/>
           <a:p>
-            <a:pPr indent="0" marL="0">
-              <a:buNone/>
-            </a:pPr>
-            <a:r>
-              <a:rPr lang="en-US" sz="1200" b="1" spc="200" kern="0" dirty="0">
+            <a:pPr marL="0" indent="0">
+              <a:buNone/>
+            </a:pPr>
+            <a:r>
+              <a:rPr lang="en-US" sz="1200" b="1" kern="0" spc="200" dirty="0">
                 <a:solidFill>
                   <a:srgbClr val="2D9C6F"/>
                 </a:solidFill>
@@ -12764,7 +12471,7 @@
           <a:bodyPr wrap="square" rtlCol="0" anchor="ctr"/>
           <a:lstStyle/>
           <a:p>
-            <a:pPr indent="0" marL="0">
+            <a:pPr marL="0" indent="0">
               <a:buNone/>
             </a:pPr>
             <a:r>
@@ -12808,7 +12515,7 @@
             <a:prstDash val="solid"/>
           </a:ln>
           <a:effectLst>
-            <a:outerShdw sx="100000" sy="100000" kx="0" ky="0" algn="bl" rotWithShape="0" blurRad="127000" dist="38100" dir="5400000">
+            <a:outerShdw blurRad="127000" dist="38100" dir="5400000" algn="bl" rotWithShape="0">
               <a:srgbClr val="1B4332">
                 <a:alpha val="10000"/>
               </a:srgbClr>
@@ -12838,14 +12545,14 @@
       </p:sp>
       <p:pic>
         <p:nvPicPr>
-          <p:cNvPr id="6" name="Image 0" descr="/home/claude/carboncheck/icons/brain.png">    </p:cNvPr>
+          <p:cNvPr id="6" name="Image 0" descr="/home/claude/carboncheck/icons/brain.png"/>
           <p:cNvPicPr>
             <a:picLocks noChangeAspect="1"/>
           </p:cNvPicPr>
           <p:nvPr/>
         </p:nvPicPr>
         <p:blipFill>
-          <a:blip r:embed="rId2"/>
+          <a:blip r:embed="rId4"/>
           <a:stretch>
             <a:fillRect/>
           </a:stretch>
@@ -12881,7 +12588,7 @@
           <a:bodyPr wrap="square" rtlCol="0" anchor="ctr"/>
           <a:lstStyle/>
           <a:p>
-            <a:pPr algn="ctr" indent="0" marL="0">
+            <a:pPr marL="0" indent="0" algn="ctr">
               <a:buNone/>
             </a:pPr>
             <a:r>
@@ -12925,7 +12632,7 @@
             <a:prstDash val="solid"/>
           </a:ln>
           <a:effectLst>
-            <a:outerShdw sx="100000" sy="100000" kx="0" ky="0" algn="bl" rotWithShape="0" blurRad="127000" dist="38100" dir="5400000">
+            <a:outerShdw blurRad="127000" dist="38100" dir="5400000" algn="bl" rotWithShape="0">
               <a:srgbClr val="1B4332">
                 <a:alpha val="10000"/>
               </a:srgbClr>
@@ -12955,14 +12662,14 @@
       </p:sp>
       <p:pic>
         <p:nvPicPr>
-          <p:cNvPr id="10" name="Image 1" descr="/home/claude/carboncheck/icons/gauge.png">    </p:cNvPr>
+          <p:cNvPr id="10" name="Image 1" descr="/home/claude/carboncheck/icons/gauge.png"/>
           <p:cNvPicPr>
             <a:picLocks noChangeAspect="1"/>
           </p:cNvPicPr>
           <p:nvPr/>
         </p:nvPicPr>
         <p:blipFill>
-          <a:blip r:embed="rId3"/>
+          <a:blip r:embed="rId5"/>
           <a:stretch>
             <a:fillRect/>
           </a:stretch>
@@ -12998,7 +12705,7 @@
           <a:bodyPr wrap="square" rtlCol="0" anchor="ctr"/>
           <a:lstStyle/>
           <a:p>
-            <a:pPr algn="ctr" indent="0" marL="0">
+            <a:pPr marL="0" indent="0" algn="ctr">
               <a:buNone/>
             </a:pPr>
             <a:r>
@@ -13042,7 +12749,7 @@
             <a:prstDash val="solid"/>
           </a:ln>
           <a:effectLst>
-            <a:outerShdw sx="100000" sy="100000" kx="0" ky="0" algn="bl" rotWithShape="0" blurRad="127000" dist="38100" dir="5400000">
+            <a:outerShdw blurRad="127000" dist="38100" dir="5400000" algn="bl" rotWithShape="0">
               <a:srgbClr val="1B4332">
                 <a:alpha val="10000"/>
               </a:srgbClr>
@@ -13072,14 +12779,14 @@
       </p:sp>
       <p:pic>
         <p:nvPicPr>
-          <p:cNvPr id="14" name="Image 2" descr="/home/claude/carboncheck/icons/chart.png">    </p:cNvPr>
+          <p:cNvPr id="14" name="Image 2" descr="/home/claude/carboncheck/icons/chart.png"/>
           <p:cNvPicPr>
             <a:picLocks noChangeAspect="1"/>
           </p:cNvPicPr>
           <p:nvPr/>
         </p:nvPicPr>
         <p:blipFill>
-          <a:blip r:embed="rId4"/>
+          <a:blip r:embed="rId6"/>
           <a:stretch>
             <a:fillRect/>
           </a:stretch>
@@ -13115,7 +12822,7 @@
           <a:bodyPr wrap="square" rtlCol="0" anchor="ctr"/>
           <a:lstStyle/>
           <a:p>
-            <a:pPr algn="ctr" indent="0" marL="0">
+            <a:pPr marL="0" indent="0" algn="ctr">
               <a:buNone/>
             </a:pPr>
             <a:r>
@@ -13159,7 +12866,7 @@
             <a:prstDash val="solid"/>
           </a:ln>
           <a:effectLst>
-            <a:outerShdw sx="100000" sy="100000" kx="0" ky="0" algn="bl" rotWithShape="0" blurRad="127000" dist="38100" dir="5400000">
+            <a:outerShdw blurRad="127000" dist="38100" dir="5400000" algn="bl" rotWithShape="0">
               <a:srgbClr val="1B4332">
                 <a:alpha val="10000"/>
               </a:srgbClr>
@@ -13189,14 +12896,14 @@
       </p:sp>
       <p:pic>
         <p:nvPicPr>
-          <p:cNvPr id="18" name="Image 3" descr="/home/claude/carboncheck/icons/seedling.png">    </p:cNvPr>
+          <p:cNvPr id="18" name="Image 3" descr="/home/claude/carboncheck/icons/seedling.png"/>
           <p:cNvPicPr>
             <a:picLocks noChangeAspect="1"/>
           </p:cNvPicPr>
           <p:nvPr/>
         </p:nvPicPr>
         <p:blipFill>
-          <a:blip r:embed="rId5"/>
+          <a:blip r:embed="rId7"/>
           <a:stretch>
             <a:fillRect/>
           </a:stretch>
@@ -13232,7 +12939,7 @@
           <a:bodyPr wrap="square" rtlCol="0" anchor="ctr"/>
           <a:lstStyle/>
           <a:p>
-            <a:pPr algn="ctr" indent="0" marL="0">
+            <a:pPr marL="0" indent="0" algn="ctr">
               <a:buNone/>
             </a:pPr>
             <a:r>
@@ -13276,7 +12983,7 @@
             <a:prstDash val="solid"/>
           </a:ln>
           <a:effectLst>
-            <a:outerShdw sx="100000" sy="100000" kx="0" ky="0" algn="bl" rotWithShape="0" blurRad="127000" dist="38100" dir="5400000">
+            <a:outerShdw blurRad="127000" dist="38100" dir="5400000" algn="bl" rotWithShape="0">
               <a:srgbClr val="1B4332">
                 <a:alpha val="10000"/>
               </a:srgbClr>
@@ -13306,14 +13013,14 @@
       </p:sp>
       <p:pic>
         <p:nvPicPr>
-          <p:cNvPr id="22" name="Image 4" descr="/home/claude/carboncheck/icons/leaf.png">    </p:cNvPr>
+          <p:cNvPr id="22" name="Image 4" descr="/home/claude/carboncheck/icons/leaf.png"/>
           <p:cNvPicPr>
             <a:picLocks noChangeAspect="1"/>
           </p:cNvPicPr>
           <p:nvPr/>
         </p:nvPicPr>
         <p:blipFill>
-          <a:blip r:embed="rId6"/>
+          <a:blip r:embed="rId8"/>
           <a:stretch>
             <a:fillRect/>
           </a:stretch>
@@ -13349,7 +13056,7 @@
           <a:bodyPr wrap="square" rtlCol="0" anchor="ctr"/>
           <a:lstStyle/>
           <a:p>
-            <a:pPr algn="ctr" indent="0" marL="0">
+            <a:pPr marL="0" indent="0" algn="ctr">
               <a:buNone/>
             </a:pPr>
             <a:r>
@@ -13393,7 +13100,7 @@
             <a:prstDash val="solid"/>
           </a:ln>
           <a:effectLst>
-            <a:outerShdw sx="100000" sy="100000" kx="0" ky="0" algn="bl" rotWithShape="0" blurRad="127000" dist="38100" dir="5400000">
+            <a:outerShdw blurRad="127000" dist="38100" dir="5400000" algn="bl" rotWithShape="0">
               <a:srgbClr val="1B4332">
                 <a:alpha val="10000"/>
               </a:srgbClr>
@@ -13423,14 +13130,14 @@
       </p:sp>
       <p:pic>
         <p:nvPicPr>
-          <p:cNvPr id="26" name="Image 5" descr="/home/claude/carboncheck/icons/chartbar.png">    </p:cNvPr>
+          <p:cNvPr id="26" name="Image 5" descr="/home/claude/carboncheck/icons/chartbar.png"/>
           <p:cNvPicPr>
             <a:picLocks noChangeAspect="1"/>
           </p:cNvPicPr>
           <p:nvPr/>
         </p:nvPicPr>
         <p:blipFill>
-          <a:blip r:embed="rId7"/>
+          <a:blip r:embed="rId9"/>
           <a:stretch>
             <a:fillRect/>
           </a:stretch>
@@ -13466,7 +13173,7 @@
           <a:bodyPr wrap="square" rtlCol="0" anchor="ctr"/>
           <a:lstStyle/>
           <a:p>
-            <a:pPr algn="ctr" indent="0" marL="0">
+            <a:pPr marL="0" indent="0" algn="ctr">
               <a:buNone/>
             </a:pPr>
             <a:r>
@@ -13505,11 +13212,11 @@
           <a:bodyPr wrap="square" rtlCol="0" anchor="ctr"/>
           <a:lstStyle/>
           <a:p>
-            <a:pPr indent="0" marL="0">
-              <a:buNone/>
-            </a:pPr>
-            <a:r>
-              <a:rPr lang="en-US" sz="900" b="1" spc="200" kern="0" dirty="0">
+            <a:pPr marL="0" indent="0">
+              <a:buNone/>
+            </a:pPr>
+            <a:r>
+              <a:rPr lang="en-US" sz="900" b="1" kern="0" spc="200" dirty="0">
                 <a:solidFill>
                   <a:srgbClr val="8FA69A"/>
                 </a:solidFill>
@@ -13544,7 +13251,7 @@
           <a:bodyPr wrap="square" rtlCol="0" anchor="ctr"/>
           <a:lstStyle/>
           <a:p>
-            <a:pPr algn="r" indent="0" marL="0">
+            <a:pPr marL="0" indent="0" algn="r">
               <a:buNone/>
             </a:pPr>
             <a:r>
@@ -13576,7 +13283,7 @@
     <p:bg>
       <p:bgPr>
         <a:blipFill dpi="0" rotWithShape="1">
-          <a:blip r:embed="rId1">
+          <a:blip r:embed="rId3">
             <a:lum/>
           </a:blip>
           <a:srcRect/>
@@ -13622,11 +13329,11 @@
           <a:bodyPr wrap="square" rtlCol="0" anchor="ctr"/>
           <a:lstStyle/>
           <a:p>
-            <a:pPr indent="0" marL="0">
-              <a:buNone/>
-            </a:pPr>
-            <a:r>
-              <a:rPr lang="en-US" sz="1200" b="1" spc="200" kern="0" dirty="0">
+            <a:pPr marL="0" indent="0">
+              <a:buNone/>
+            </a:pPr>
+            <a:r>
+              <a:rPr lang="en-US" sz="1200" b="1" kern="0" spc="200" dirty="0">
                 <a:solidFill>
                   <a:srgbClr val="2D9C6F"/>
                 </a:solidFill>
@@ -13661,7 +13368,7 @@
           <a:bodyPr wrap="square" rtlCol="0" anchor="ctr"/>
           <a:lstStyle/>
           <a:p>
-            <a:pPr indent="0" marL="0">
+            <a:pPr marL="0" indent="0">
               <a:buNone/>
             </a:pPr>
             <a:r>
@@ -13705,7 +13412,7 @@
             <a:prstDash val="solid"/>
           </a:ln>
           <a:effectLst>
-            <a:outerShdw sx="100000" sy="100000" kx="0" ky="0" algn="bl" rotWithShape="0" blurRad="127000" dist="38100" dir="5400000">
+            <a:outerShdw blurRad="127000" dist="38100" dir="5400000" algn="bl" rotWithShape="0">
               <a:srgbClr val="1B4332">
                 <a:alpha val="10000"/>
               </a:srgbClr>
@@ -13735,14 +13442,14 @@
       </p:sp>
       <p:pic>
         <p:nvPicPr>
-          <p:cNvPr id="6" name="Image 0" descr="/home/claude/carboncheck/icons/brain.png">    </p:cNvPr>
+          <p:cNvPr id="6" name="Image 0" descr="/home/claude/carboncheck/icons/brain.png"/>
           <p:cNvPicPr>
             <a:picLocks noChangeAspect="1"/>
           </p:cNvPicPr>
           <p:nvPr/>
         </p:nvPicPr>
         <p:blipFill>
-          <a:blip r:embed="rId2"/>
+          <a:blip r:embed="rId4"/>
           <a:stretch>
             <a:fillRect/>
           </a:stretch>
@@ -13778,7 +13485,7 @@
           <a:bodyPr wrap="square" rtlCol="0" anchor="ctr"/>
           <a:lstStyle/>
           <a:p>
-            <a:pPr algn="ctr" indent="0" marL="0">
+            <a:pPr marL="0" indent="0" algn="ctr">
               <a:buNone/>
             </a:pPr>
             <a:r>
@@ -13822,7 +13529,7 @@
             <a:prstDash val="solid"/>
           </a:ln>
           <a:effectLst>
-            <a:outerShdw sx="100000" sy="100000" kx="0" ky="0" algn="bl" rotWithShape="0" blurRad="127000" dist="38100" dir="5400000">
+            <a:outerShdw blurRad="127000" dist="38100" dir="5400000" algn="bl" rotWithShape="0">
               <a:srgbClr val="1B4332">
                 <a:alpha val="10000"/>
               </a:srgbClr>
@@ -13852,14 +13559,14 @@
       </p:sp>
       <p:pic>
         <p:nvPicPr>
-          <p:cNvPr id="10" name="Image 1" descr="/home/claude/carboncheck/icons/mobile.png">    </p:cNvPr>
+          <p:cNvPr id="10" name="Image 1" descr="/home/claude/carboncheck/icons/mobile.png"/>
           <p:cNvPicPr>
             <a:picLocks noChangeAspect="1"/>
           </p:cNvPicPr>
           <p:nvPr/>
         </p:nvPicPr>
         <p:blipFill>
-          <a:blip r:embed="rId3"/>
+          <a:blip r:embed="rId5"/>
           <a:stretch>
             <a:fillRect/>
           </a:stretch>
@@ -13895,7 +13602,7 @@
           <a:bodyPr wrap="square" rtlCol="0" anchor="ctr"/>
           <a:lstStyle/>
           <a:p>
-            <a:pPr algn="ctr" indent="0" marL="0">
+            <a:pPr marL="0" indent="0" algn="ctr">
               <a:buNone/>
             </a:pPr>
             <a:r>
@@ -13939,7 +13646,7 @@
             <a:prstDash val="solid"/>
           </a:ln>
           <a:effectLst>
-            <a:outerShdw sx="100000" sy="100000" kx="0" ky="0" algn="bl" rotWithShape="0" blurRad="127000" dist="38100" dir="5400000">
+            <a:outerShdw blurRad="127000" dist="38100" dir="5400000" algn="bl" rotWithShape="0">
               <a:srgbClr val="1B4332">
                 <a:alpha val="10000"/>
               </a:srgbClr>
@@ -13969,14 +13676,14 @@
       </p:sp>
       <p:pic>
         <p:nvPicPr>
-          <p:cNvPr id="14" name="Image 2" descr="/home/claude/carboncheck/icons/home_iot.png">    </p:cNvPr>
+          <p:cNvPr id="14" name="Image 2" descr="/home/claude/carboncheck/icons/home_iot.png"/>
           <p:cNvPicPr>
             <a:picLocks noChangeAspect="1"/>
           </p:cNvPicPr>
           <p:nvPr/>
         </p:nvPicPr>
         <p:blipFill>
-          <a:blip r:embed="rId4"/>
+          <a:blip r:embed="rId6"/>
           <a:stretch>
             <a:fillRect/>
           </a:stretch>
@@ -14012,7 +13719,7 @@
           <a:bodyPr wrap="square" rtlCol="0" anchor="ctr"/>
           <a:lstStyle/>
           <a:p>
-            <a:pPr algn="ctr" indent="0" marL="0">
+            <a:pPr marL="0" indent="0" algn="ctr">
               <a:buNone/>
             </a:pPr>
             <a:r>
@@ -14056,7 +13763,7 @@
             <a:prstDash val="solid"/>
           </a:ln>
           <a:effectLst>
-            <a:outerShdw sx="100000" sy="100000" kx="0" ky="0" algn="bl" rotWithShape="0" blurRad="127000" dist="38100" dir="5400000">
+            <a:outerShdw blurRad="127000" dist="38100" dir="5400000" algn="bl" rotWithShape="0">
               <a:srgbClr val="1B4332">
                 <a:alpha val="10000"/>
               </a:srgbClr>
@@ -14086,14 +13793,14 @@
       </p:sp>
       <p:pic>
         <p:nvPicPr>
-          <p:cNvPr id="18" name="Image 3" descr="/home/claude/carboncheck/icons/map.png">    </p:cNvPr>
+          <p:cNvPr id="18" name="Image 3" descr="/home/claude/carboncheck/icons/map.png"/>
           <p:cNvPicPr>
             <a:picLocks noChangeAspect="1"/>
           </p:cNvPicPr>
           <p:nvPr/>
         </p:nvPicPr>
         <p:blipFill>
-          <a:blip r:embed="rId5"/>
+          <a:blip r:embed="rId7"/>
           <a:stretch>
             <a:fillRect/>
           </a:stretch>
@@ -14129,7 +13836,7 @@
           <a:bodyPr wrap="square" rtlCol="0" anchor="ctr"/>
           <a:lstStyle/>
           <a:p>
-            <a:pPr algn="ctr" indent="0" marL="0">
+            <a:pPr marL="0" indent="0" algn="ctr">
               <a:buNone/>
             </a:pPr>
             <a:r>
@@ -14173,7 +13880,7 @@
             <a:prstDash val="solid"/>
           </a:ln>
           <a:effectLst>
-            <a:outerShdw sx="100000" sy="100000" kx="0" ky="0" algn="bl" rotWithShape="0" blurRad="127000" dist="38100" dir="5400000">
+            <a:outerShdw blurRad="127000" dist="38100" dir="5400000" algn="bl" rotWithShape="0">
               <a:srgbClr val="1B4332">
                 <a:alpha val="10000"/>
               </a:srgbClr>
@@ -14203,14 +13910,14 @@
       </p:sp>
       <p:pic>
         <p:nvPicPr>
-          <p:cNvPr id="22" name="Image 4" descr="/home/claude/carboncheck/icons/recycle.png">    </p:cNvPr>
+          <p:cNvPr id="22" name="Image 4" descr="/home/claude/carboncheck/icons/recycle.png"/>
           <p:cNvPicPr>
             <a:picLocks noChangeAspect="1"/>
           </p:cNvPicPr>
           <p:nvPr/>
         </p:nvPicPr>
         <p:blipFill>
-          <a:blip r:embed="rId6"/>
+          <a:blip r:embed="rId8"/>
           <a:stretch>
             <a:fillRect/>
           </a:stretch>
@@ -14246,7 +13953,7 @@
           <a:bodyPr wrap="square" rtlCol="0" anchor="ctr"/>
           <a:lstStyle/>
           <a:p>
-            <a:pPr algn="ctr" indent="0" marL="0">
+            <a:pPr marL="0" indent="0" algn="ctr">
               <a:buNone/>
             </a:pPr>
             <a:r>
@@ -14290,7 +13997,7 @@
             <a:prstDash val="solid"/>
           </a:ln>
           <a:effectLst>
-            <a:outerShdw sx="100000" sy="100000" kx="0" ky="0" algn="bl" rotWithShape="0" blurRad="127000" dist="38100" dir="5400000">
+            <a:outerShdw blurRad="127000" dist="38100" dir="5400000" algn="bl" rotWithShape="0">
               <a:srgbClr val="1B4332">
                 <a:alpha val="10000"/>
               </a:srgbClr>
@@ -14320,14 +14027,14 @@
       </p:sp>
       <p:pic>
         <p:nvPicPr>
-          <p:cNvPr id="26" name="Image 5" descr="/home/claude/carboncheck/icons/house.png">    </p:cNvPr>
+          <p:cNvPr id="26" name="Image 5" descr="/home/claude/carboncheck/icons/house.png"/>
           <p:cNvPicPr>
             <a:picLocks noChangeAspect="1"/>
           </p:cNvPicPr>
           <p:nvPr/>
         </p:nvPicPr>
         <p:blipFill>
-          <a:blip r:embed="rId7"/>
+          <a:blip r:embed="rId9"/>
           <a:stretch>
             <a:fillRect/>
           </a:stretch>
@@ -14363,7 +14070,7 @@
           <a:bodyPr wrap="square" rtlCol="0" anchor="ctr"/>
           <a:lstStyle/>
           <a:p>
-            <a:pPr algn="ctr" indent="0" marL="0">
+            <a:pPr marL="0" indent="0" algn="ctr">
               <a:buNone/>
             </a:pPr>
             <a:r>
@@ -14407,7 +14114,7 @@
             <a:prstDash val="solid"/>
           </a:ln>
           <a:effectLst>
-            <a:outerShdw sx="100000" sy="100000" kx="0" ky="0" algn="bl" rotWithShape="0" blurRad="127000" dist="38100" dir="5400000">
+            <a:outerShdw blurRad="127000" dist="38100" dir="5400000" algn="bl" rotWithShape="0">
               <a:srgbClr val="1B4332">
                 <a:alpha val="10000"/>
               </a:srgbClr>
@@ -14437,14 +14144,14 @@
       </p:sp>
       <p:pic>
         <p:nvPicPr>
-          <p:cNvPr id="30" name="Image 6" descr="/home/claude/carboncheck/icons/bolt.png">    </p:cNvPr>
+          <p:cNvPr id="30" name="Image 6" descr="/home/claude/carboncheck/icons/bolt.png"/>
           <p:cNvPicPr>
             <a:picLocks noChangeAspect="1"/>
           </p:cNvPicPr>
           <p:nvPr/>
         </p:nvPicPr>
         <p:blipFill>
-          <a:blip r:embed="rId8"/>
+          <a:blip r:embed="rId10"/>
           <a:stretch>
             <a:fillRect/>
           </a:stretch>
@@ -14480,7 +14187,7 @@
           <a:bodyPr wrap="square" rtlCol="0" anchor="ctr"/>
           <a:lstStyle/>
           <a:p>
-            <a:pPr algn="ctr" indent="0" marL="0">
+            <a:pPr marL="0" indent="0" algn="ctr">
               <a:buNone/>
             </a:pPr>
             <a:r>
@@ -14524,7 +14231,7 @@
             <a:prstDash val="solid"/>
           </a:ln>
           <a:effectLst>
-            <a:outerShdw sx="100000" sy="100000" kx="0" ky="0" algn="bl" rotWithShape="0" blurRad="127000" dist="38100" dir="5400000">
+            <a:outerShdw blurRad="127000" dist="38100" dir="5400000" algn="bl" rotWithShape="0">
               <a:srgbClr val="1B4332">
                 <a:alpha val="10000"/>
               </a:srgbClr>
@@ -14554,14 +14261,14 @@
       </p:sp>
       <p:pic>
         <p:nvPicPr>
-          <p:cNvPr id="34" name="Image 7" descr="/home/claude/carboncheck/icons/cloud.png">    </p:cNvPr>
+          <p:cNvPr id="34" name="Image 7" descr="/home/claude/carboncheck/icons/cloud.png"/>
           <p:cNvPicPr>
             <a:picLocks noChangeAspect="1"/>
           </p:cNvPicPr>
           <p:nvPr/>
         </p:nvPicPr>
         <p:blipFill>
-          <a:blip r:embed="rId9"/>
+          <a:blip r:embed="rId11"/>
           <a:stretch>
             <a:fillRect/>
           </a:stretch>
@@ -14597,7 +14304,7 @@
           <a:bodyPr wrap="square" rtlCol="0" anchor="ctr"/>
           <a:lstStyle/>
           <a:p>
-            <a:pPr algn="ctr" indent="0" marL="0">
+            <a:pPr marL="0" indent="0" algn="ctr">
               <a:buNone/>
             </a:pPr>
             <a:r>
@@ -14636,11 +14343,11 @@
           <a:bodyPr wrap="square" rtlCol="0" anchor="ctr"/>
           <a:lstStyle/>
           <a:p>
-            <a:pPr indent="0" marL="0">
-              <a:buNone/>
-            </a:pPr>
-            <a:r>
-              <a:rPr lang="en-US" sz="900" b="1" spc="200" kern="0" dirty="0">
+            <a:pPr marL="0" indent="0">
+              <a:buNone/>
+            </a:pPr>
+            <a:r>
+              <a:rPr lang="en-US" sz="900" b="1" kern="0" spc="200" dirty="0">
                 <a:solidFill>
                   <a:srgbClr val="8FA69A"/>
                 </a:solidFill>
@@ -14675,7 +14382,7 @@
           <a:bodyPr wrap="square" rtlCol="0" anchor="ctr"/>
           <a:lstStyle/>
           <a:p>
-            <a:pPr algn="r" indent="0" marL="0">
+            <a:pPr marL="0" indent="0" algn="r">
               <a:buNone/>
             </a:pPr>
             <a:r>
@@ -14707,7 +14414,7 @@
     <p:bg>
       <p:bgPr>
         <a:blipFill dpi="0" rotWithShape="1">
-          <a:blip r:embed="rId1">
+          <a:blip r:embed="rId3">
             <a:lum/>
           </a:blip>
           <a:srcRect/>
@@ -14753,11 +14460,11 @@
           <a:bodyPr wrap="square" rtlCol="0" anchor="ctr"/>
           <a:lstStyle/>
           <a:p>
-            <a:pPr indent="0" marL="0">
-              <a:buNone/>
-            </a:pPr>
-            <a:r>
-              <a:rPr lang="en-US" sz="1200" b="1" spc="200" kern="0" dirty="0">
+            <a:pPr marL="0" indent="0">
+              <a:buNone/>
+            </a:pPr>
+            <a:r>
+              <a:rPr lang="en-US" sz="1200" b="1" kern="0" spc="200" dirty="0">
                 <a:solidFill>
                   <a:srgbClr val="2D9C6F"/>
                 </a:solidFill>
@@ -14792,7 +14499,7 @@
           <a:bodyPr wrap="square" rtlCol="0" anchor="ctr"/>
           <a:lstStyle/>
           <a:p>
-            <a:pPr indent="0" marL="0">
+            <a:pPr marL="0" indent="0">
               <a:buNone/>
             </a:pPr>
             <a:r>
@@ -14831,7 +14538,7 @@
           <a:bodyPr wrap="square" rtlCol="0" anchor="ctr"/>
           <a:lstStyle/>
           <a:p>
-            <a:pPr indent="0" marL="0">
+            <a:pPr marL="0" indent="0">
               <a:buNone/>
             </a:pPr>
             <a:r>
@@ -14870,7 +14577,7 @@
           <a:bodyPr wrap="square" rtlCol="0" anchor="ctr"/>
           <a:lstStyle/>
           <a:p>
-            <a:pPr indent="0" marL="0">
+            <a:pPr marL="0" indent="0">
               <a:buNone/>
             </a:pPr>
             <a:r>
@@ -14909,7 +14616,7 @@
           <a:bodyPr wrap="square" rtlCol="0" anchor="ctr"/>
           <a:lstStyle/>
           <a:p>
-            <a:pPr indent="0" marL="0">
+            <a:pPr marL="0" indent="0">
               <a:buNone/>
             </a:pPr>
             <a:r>
@@ -14948,7 +14655,7 @@
           <a:bodyPr wrap="square" rtlCol="0" anchor="ctr"/>
           <a:lstStyle/>
           <a:p>
-            <a:pPr indent="0" marL="0">
+            <a:pPr marL="0" indent="0">
               <a:buNone/>
             </a:pPr>
             <a:r>
@@ -14987,7 +14694,7 @@
           <a:bodyPr wrap="square" rtlCol="0" anchor="ctr"/>
           <a:lstStyle/>
           <a:p>
-            <a:pPr indent="0" marL="0">
+            <a:pPr marL="0" indent="0">
               <a:buNone/>
             </a:pPr>
             <a:r>
@@ -15026,7 +14733,7 @@
           <a:bodyPr wrap="square" rtlCol="0" anchor="ctr"/>
           <a:lstStyle/>
           <a:p>
-            <a:pPr indent="0" marL="0">
+            <a:pPr marL="0" indent="0">
               <a:buNone/>
             </a:pPr>
             <a:r>
@@ -15065,7 +14772,7 @@
           <a:bodyPr wrap="square" rtlCol="0" anchor="ctr"/>
           <a:lstStyle/>
           <a:p>
-            <a:pPr indent="0" marL="0">
+            <a:pPr marL="0" indent="0">
               <a:buNone/>
             </a:pPr>
             <a:r>
@@ -15104,7 +14811,7 @@
           <a:bodyPr wrap="square" rtlCol="0" anchor="ctr"/>
           <a:lstStyle/>
           <a:p>
-            <a:pPr indent="0" marL="0">
+            <a:pPr marL="0" indent="0">
               <a:buNone/>
             </a:pPr>
             <a:r>
@@ -15143,7 +14850,7 @@
           <a:bodyPr wrap="square" rtlCol="0" anchor="ctr"/>
           <a:lstStyle/>
           <a:p>
-            <a:pPr indent="0" marL="0">
+            <a:pPr marL="0" indent="0">
               <a:buNone/>
             </a:pPr>
             <a:r>
@@ -15182,7 +14889,7 @@
           <a:bodyPr wrap="square" rtlCol="0" anchor="ctr"/>
           <a:lstStyle/>
           <a:p>
-            <a:pPr indent="0" marL="0">
+            <a:pPr marL="0" indent="0">
               <a:buNone/>
             </a:pPr>
             <a:r>
@@ -15221,7 +14928,7 @@
           <a:bodyPr wrap="square" rtlCol="0" anchor="ctr"/>
           <a:lstStyle/>
           <a:p>
-            <a:pPr indent="0" marL="0">
+            <a:pPr marL="0" indent="0">
               <a:buNone/>
             </a:pPr>
             <a:r>
@@ -15260,7 +14967,7 @@
           <a:bodyPr wrap="square" rtlCol="0" anchor="ctr"/>
           <a:lstStyle/>
           <a:p>
-            <a:pPr indent="0" marL="0">
+            <a:pPr marL="0" indent="0">
               <a:buNone/>
             </a:pPr>
             <a:r>
@@ -15299,7 +15006,7 @@
           <a:bodyPr wrap="square" rtlCol="0" anchor="ctr"/>
           <a:lstStyle/>
           <a:p>
-            <a:pPr indent="0" marL="0">
+            <a:pPr marL="0" indent="0">
               <a:buNone/>
             </a:pPr>
             <a:r>
@@ -15338,7 +15045,7 @@
           <a:bodyPr wrap="square" rtlCol="0" anchor="ctr"/>
           <a:lstStyle/>
           <a:p>
-            <a:pPr indent="0" marL="0">
+            <a:pPr marL="0" indent="0">
               <a:buNone/>
             </a:pPr>
             <a:r>
@@ -15377,7 +15084,7 @@
           <a:bodyPr wrap="square" rtlCol="0" anchor="ctr"/>
           <a:lstStyle/>
           <a:p>
-            <a:pPr indent="0" marL="0">
+            <a:pPr marL="0" indent="0">
               <a:buNone/>
             </a:pPr>
             <a:r>
@@ -15416,7 +15123,7 @@
           <a:bodyPr wrap="square" rtlCol="0" anchor="ctr"/>
           <a:lstStyle/>
           <a:p>
-            <a:pPr indent="0" marL="0">
+            <a:pPr marL="0" indent="0">
               <a:buNone/>
             </a:pPr>
             <a:r>
@@ -15455,7 +15162,7 @@
           <a:bodyPr wrap="square" rtlCol="0" anchor="ctr"/>
           <a:lstStyle/>
           <a:p>
-            <a:pPr indent="0" marL="0">
+            <a:pPr marL="0" indent="0">
               <a:buNone/>
             </a:pPr>
             <a:r>
@@ -15494,7 +15201,7 @@
           <a:bodyPr wrap="square" rtlCol="0" anchor="ctr"/>
           <a:lstStyle/>
           <a:p>
-            <a:pPr indent="0" marL="0">
+            <a:pPr marL="0" indent="0">
               <a:buNone/>
             </a:pPr>
             <a:r>
@@ -15533,7 +15240,7 @@
           <a:bodyPr wrap="square" rtlCol="0" anchor="ctr"/>
           <a:lstStyle/>
           <a:p>
-            <a:pPr indent="0" marL="0">
+            <a:pPr marL="0" indent="0">
               <a:buNone/>
             </a:pPr>
             <a:r>
@@ -15572,7 +15279,7 @@
           <a:bodyPr wrap="square" rtlCol="0" anchor="ctr"/>
           <a:lstStyle/>
           <a:p>
-            <a:pPr indent="0" marL="0">
+            <a:pPr marL="0" indent="0">
               <a:buNone/>
             </a:pPr>
             <a:r>
@@ -15611,7 +15318,7 @@
           <a:bodyPr wrap="square" rtlCol="0" anchor="ctr"/>
           <a:lstStyle/>
           <a:p>
-            <a:pPr indent="0" marL="0">
+            <a:pPr marL="0" indent="0">
               <a:buNone/>
             </a:pPr>
             <a:r>
@@ -15650,7 +15357,7 @@
           <a:bodyPr wrap="square" rtlCol="0" anchor="ctr"/>
           <a:lstStyle/>
           <a:p>
-            <a:pPr indent="0" marL="0">
+            <a:pPr marL="0" indent="0">
               <a:buNone/>
             </a:pPr>
             <a:r>
@@ -15689,7 +15396,7 @@
           <a:bodyPr wrap="square" rtlCol="0" anchor="ctr"/>
           <a:lstStyle/>
           <a:p>
-            <a:pPr indent="0" marL="0">
+            <a:pPr marL="0" indent="0">
               <a:buNone/>
             </a:pPr>
             <a:r>
@@ -15728,7 +15435,7 @@
           <a:bodyPr wrap="square" rtlCol="0" anchor="ctr"/>
           <a:lstStyle/>
           <a:p>
-            <a:pPr indent="0" marL="0">
+            <a:pPr marL="0" indent="0">
               <a:buNone/>
             </a:pPr>
             <a:r>
@@ -15767,7 +15474,7 @@
           <a:bodyPr wrap="square" rtlCol="0" anchor="ctr"/>
           <a:lstStyle/>
           <a:p>
-            <a:pPr indent="0" marL="0">
+            <a:pPr marL="0" indent="0">
               <a:buNone/>
             </a:pPr>
             <a:r>
@@ -15806,7 +15513,7 @@
           <a:bodyPr wrap="square" rtlCol="0" anchor="ctr"/>
           <a:lstStyle/>
           <a:p>
-            <a:pPr indent="0" marL="0">
+            <a:pPr marL="0" indent="0">
               <a:buNone/>
             </a:pPr>
             <a:r>
@@ -15845,7 +15552,7 @@
           <a:bodyPr wrap="square" rtlCol="0" anchor="ctr"/>
           <a:lstStyle/>
           <a:p>
-            <a:pPr indent="0" marL="0">
+            <a:pPr marL="0" indent="0">
               <a:buNone/>
             </a:pPr>
             <a:r>
@@ -15884,7 +15591,7 @@
           <a:bodyPr wrap="square" rtlCol="0" anchor="ctr"/>
           <a:lstStyle/>
           <a:p>
-            <a:pPr indent="0" marL="0">
+            <a:pPr marL="0" indent="0">
               <a:buNone/>
             </a:pPr>
             <a:r>
@@ -15923,7 +15630,7 @@
           <a:bodyPr wrap="square" rtlCol="0" anchor="ctr"/>
           <a:lstStyle/>
           <a:p>
-            <a:pPr indent="0" marL="0">
+            <a:pPr marL="0" indent="0">
               <a:buNone/>
             </a:pPr>
             <a:r>
@@ -15962,7 +15669,7 @@
           <a:bodyPr wrap="square" rtlCol="0" anchor="ctr"/>
           <a:lstStyle/>
           <a:p>
-            <a:pPr indent="0" marL="0">
+            <a:pPr marL="0" indent="0">
               <a:buNone/>
             </a:pPr>
             <a:r>
@@ -16001,7 +15708,7 @@
           <a:bodyPr wrap="square" rtlCol="0" anchor="ctr"/>
           <a:lstStyle/>
           <a:p>
-            <a:pPr indent="0" marL="0">
+            <a:pPr marL="0" indent="0">
               <a:buNone/>
             </a:pPr>
             <a:r>
@@ -16040,7 +15747,7 @@
           <a:bodyPr wrap="square" rtlCol="0" anchor="ctr"/>
           <a:lstStyle/>
           <a:p>
-            <a:pPr indent="0" marL="0">
+            <a:pPr marL="0" indent="0">
               <a:buNone/>
             </a:pPr>
             <a:r>
@@ -16079,7 +15786,7 @@
           <a:bodyPr wrap="square" rtlCol="0" anchor="ctr"/>
           <a:lstStyle/>
           <a:p>
-            <a:pPr indent="0" marL="0">
+            <a:pPr marL="0" indent="0">
               <a:buNone/>
             </a:pPr>
             <a:r>
@@ -16118,7 +15825,7 @@
           <a:bodyPr wrap="square" rtlCol="0" anchor="ctr"/>
           <a:lstStyle/>
           <a:p>
-            <a:pPr indent="0" marL="0">
+            <a:pPr marL="0" indent="0">
               <a:buNone/>
             </a:pPr>
             <a:r>
@@ -16157,7 +15864,7 @@
           <a:bodyPr wrap="square" rtlCol="0" anchor="ctr"/>
           <a:lstStyle/>
           <a:p>
-            <a:pPr indent="0" marL="0">
+            <a:pPr marL="0" indent="0">
               <a:buNone/>
             </a:pPr>
             <a:r>
@@ -16196,7 +15903,7 @@
           <a:bodyPr wrap="square" rtlCol="0" anchor="ctr"/>
           <a:lstStyle/>
           <a:p>
-            <a:pPr indent="0" marL="0">
+            <a:pPr marL="0" indent="0">
               <a:buNone/>
             </a:pPr>
             <a:r>
@@ -16235,7 +15942,7 @@
           <a:bodyPr wrap="square" rtlCol="0" anchor="ctr"/>
           <a:lstStyle/>
           <a:p>
-            <a:pPr indent="0" marL="0">
+            <a:pPr marL="0" indent="0">
               <a:buNone/>
             </a:pPr>
             <a:r>
@@ -16274,7 +15981,7 @@
           <a:bodyPr wrap="square" rtlCol="0" anchor="ctr"/>
           <a:lstStyle/>
           <a:p>
-            <a:pPr indent="0" marL="0">
+            <a:pPr marL="0" indent="0">
               <a:buNone/>
             </a:pPr>
             <a:r>
@@ -16313,7 +16020,7 @@
           <a:bodyPr wrap="square" rtlCol="0" anchor="ctr"/>
           <a:lstStyle/>
           <a:p>
-            <a:pPr indent="0" marL="0">
+            <a:pPr marL="0" indent="0">
               <a:buNone/>
             </a:pPr>
             <a:r>
@@ -16352,7 +16059,7 @@
           <a:bodyPr wrap="square" rtlCol="0" anchor="ctr"/>
           <a:lstStyle/>
           <a:p>
-            <a:pPr indent="0" marL="0">
+            <a:pPr marL="0" indent="0">
               <a:buNone/>
             </a:pPr>
             <a:r>
@@ -16391,11 +16098,11 @@
           <a:bodyPr wrap="square" rtlCol="0" anchor="ctr"/>
           <a:lstStyle/>
           <a:p>
-            <a:pPr indent="0" marL="0">
-              <a:buNone/>
-            </a:pPr>
-            <a:r>
-              <a:rPr lang="en-US" sz="900" b="1" spc="200" kern="0" dirty="0">
+            <a:pPr marL="0" indent="0">
+              <a:buNone/>
+            </a:pPr>
+            <a:r>
+              <a:rPr lang="en-US" sz="900" b="1" kern="0" spc="200" dirty="0">
                 <a:solidFill>
                   <a:srgbClr val="8FA69A"/>
                 </a:solidFill>
@@ -16430,7 +16137,7 @@
           <a:bodyPr wrap="square" rtlCol="0" anchor="ctr"/>
           <a:lstStyle/>
           <a:p>
-            <a:pPr algn="r" indent="0" marL="0">
+            <a:pPr marL="0" indent="0" algn="r">
               <a:buNone/>
             </a:pPr>
             <a:r>
@@ -16462,7 +16169,7 @@
     <p:bg>
       <p:bgPr>
         <a:blipFill dpi="0" rotWithShape="1">
-          <a:blip r:embed="rId1">
+          <a:blip r:embed="rId3">
             <a:lum/>
           </a:blip>
           <a:srcRect/>
@@ -16552,11 +16259,11 @@
           <a:bodyPr wrap="square" rtlCol="0" anchor="ctr"/>
           <a:lstStyle/>
           <a:p>
-            <a:pPr indent="0" marL="0">
-              <a:buNone/>
-            </a:pPr>
-            <a:r>
-              <a:rPr lang="en-US" sz="1200" b="1" spc="200" kern="0" dirty="0">
+            <a:pPr marL="0" indent="0">
+              <a:buNone/>
+            </a:pPr>
+            <a:r>
+              <a:rPr lang="en-US" sz="1200" b="1" kern="0" spc="200" dirty="0">
                 <a:solidFill>
                   <a:srgbClr val="2D9C6F"/>
                 </a:solidFill>
@@ -16591,7 +16298,7 @@
           <a:bodyPr wrap="square" rtlCol="0" anchor="ctr"/>
           <a:lstStyle/>
           <a:p>
-            <a:pPr indent="0" marL="0">
+            <a:pPr marL="0" indent="0">
               <a:buNone/>
             </a:pPr>
             <a:r>
@@ -16633,14 +16340,14 @@
       </p:sp>
       <p:pic>
         <p:nvPicPr>
-          <p:cNvPr id="7" name="Image 0" descr="/home/claude/carboncheck/icons/earth_white.png">    </p:cNvPr>
+          <p:cNvPr id="7" name="Image 0" descr="/home/claude/carboncheck/icons/earth_white.png"/>
           <p:cNvPicPr>
             <a:picLocks noChangeAspect="1"/>
           </p:cNvPicPr>
           <p:nvPr/>
         </p:nvPicPr>
         <p:blipFill>
-          <a:blip r:embed="rId2"/>
+          <a:blip r:embed="rId4"/>
           <a:stretch>
             <a:fillRect/>
           </a:stretch>
@@ -16676,7 +16383,7 @@
           <a:bodyPr wrap="square" rtlCol="0" anchor="ctr"/>
           <a:lstStyle/>
           <a:p>
-            <a:pPr indent="0" marL="0">
+            <a:pPr marL="0" indent="0">
               <a:lnSpc>
                 <a:spcPct val="135000"/>
               </a:lnSpc>
@@ -16747,7 +16454,7 @@
           <a:bodyPr wrap="square" rtlCol="0" anchor="ctr"/>
           <a:lstStyle/>
           <a:p>
-            <a:pPr indent="0" marL="0">
+            <a:pPr marL="0" indent="0">
               <a:buNone/>
             </a:pPr>
             <a:r>
@@ -16786,7 +16493,7 @@
           <a:bodyPr wrap="square" rtlCol="0" anchor="ctr"/>
           <a:lstStyle/>
           <a:p>
-            <a:pPr indent="0" marL="0">
+            <a:pPr marL="0" indent="0">
               <a:buNone/>
             </a:pPr>
             <a:r>
@@ -16854,7 +16561,7 @@
           <a:bodyPr wrap="square" rtlCol="0" anchor="ctr"/>
           <a:lstStyle/>
           <a:p>
-            <a:pPr indent="0" marL="0">
+            <a:pPr marL="0" indent="0">
               <a:buNone/>
             </a:pPr>
             <a:r>
@@ -16893,7 +16600,7 @@
           <a:bodyPr wrap="square" rtlCol="0" anchor="ctr"/>
           <a:lstStyle/>
           <a:p>
-            <a:pPr indent="0" marL="0">
+            <a:pPr marL="0" indent="0">
               <a:buNone/>
             </a:pPr>
             <a:r>
@@ -16961,7 +16668,7 @@
           <a:bodyPr wrap="square" rtlCol="0" anchor="ctr"/>
           <a:lstStyle/>
           <a:p>
-            <a:pPr indent="0" marL="0">
+            <a:pPr marL="0" indent="0">
               <a:buNone/>
             </a:pPr>
             <a:r>
@@ -17000,7 +16707,7 @@
           <a:bodyPr wrap="square" rtlCol="0" anchor="ctr"/>
           <a:lstStyle/>
           <a:p>
-            <a:pPr indent="0" marL="0">
+            <a:pPr marL="0" indent="0">
               <a:buNone/>
             </a:pPr>
             <a:r>
@@ -17039,11 +16746,11 @@
           <a:bodyPr wrap="square" rtlCol="0" anchor="ctr"/>
           <a:lstStyle/>
           <a:p>
-            <a:pPr indent="0" marL="0">
-              <a:buNone/>
-            </a:pPr>
-            <a:r>
-              <a:rPr lang="en-US" sz="900" b="1" spc="200" kern="0" dirty="0">
+            <a:pPr marL="0" indent="0">
+              <a:buNone/>
+            </a:pPr>
+            <a:r>
+              <a:rPr lang="en-US" sz="900" b="1" kern="0" spc="200" dirty="0">
                 <a:solidFill>
                   <a:srgbClr val="BFE3CF"/>
                 </a:solidFill>
@@ -17078,7 +16785,7 @@
           <a:bodyPr wrap="square" rtlCol="0" anchor="ctr"/>
           <a:lstStyle/>
           <a:p>
-            <a:pPr algn="r" indent="0" marL="0">
+            <a:pPr marL="0" indent="0" algn="r">
               <a:buNone/>
             </a:pPr>
             <a:r>
@@ -17110,7 +16817,7 @@
     <p:bg>
       <p:bgPr>
         <a:blipFill dpi="0" rotWithShape="1">
-          <a:blip r:embed="rId1">
+          <a:blip r:embed="rId3">
             <a:lum/>
           </a:blip>
           <a:srcRect/>
@@ -17156,11 +16863,11 @@
           <a:bodyPr wrap="square" rtlCol="0" anchor="ctr"/>
           <a:lstStyle/>
           <a:p>
-            <a:pPr indent="0" marL="0">
-              <a:buNone/>
-            </a:pPr>
-            <a:r>
-              <a:rPr lang="en-US" sz="1200" b="1" spc="200" kern="0" dirty="0">
+            <a:pPr marL="0" indent="0">
+              <a:buNone/>
+            </a:pPr>
+            <a:r>
+              <a:rPr lang="en-US" sz="1200" b="1" kern="0" spc="200" dirty="0">
                 <a:solidFill>
                   <a:srgbClr val="2D9C6F"/>
                 </a:solidFill>
@@ -17195,7 +16902,7 @@
           <a:bodyPr wrap="square" rtlCol="0" anchor="ctr"/>
           <a:lstStyle/>
           <a:p>
-            <a:pPr indent="0" marL="0">
+            <a:pPr marL="0" indent="0">
               <a:buNone/>
             </a:pPr>
             <a:r>
@@ -17242,14 +16949,14 @@
       </p:sp>
       <p:pic>
         <p:nvPicPr>
-          <p:cNvPr id="5" name="Image 0" descr="/home/claude/carboncheck/icons/book.png">    </p:cNvPr>
+          <p:cNvPr id="5" name="Image 0" descr="/home/claude/carboncheck/icons/book.png"/>
           <p:cNvPicPr>
             <a:picLocks noChangeAspect="1"/>
           </p:cNvPicPr>
           <p:nvPr/>
         </p:nvPicPr>
         <p:blipFill>
-          <a:blip r:embed="rId2"/>
+          <a:blip r:embed="rId4"/>
           <a:stretch>
             <a:fillRect/>
           </a:stretch>
@@ -17285,7 +16992,7 @@
           <a:bodyPr wrap="square" rtlCol="0" anchor="ctr"/>
           <a:lstStyle/>
           <a:p>
-            <a:pPr indent="0" marL="0">
+            <a:pPr marL="0" indent="0">
               <a:buNone/>
             </a:pPr>
             <a:r>
@@ -17332,14 +17039,14 @@
       </p:sp>
       <p:pic>
         <p:nvPicPr>
-          <p:cNvPr id="8" name="Image 1" descr="/home/claude/carboncheck/icons/book.png">    </p:cNvPr>
+          <p:cNvPr id="8" name="Image 1" descr="/home/claude/carboncheck/icons/book.png"/>
           <p:cNvPicPr>
             <a:picLocks noChangeAspect="1"/>
           </p:cNvPicPr>
           <p:nvPr/>
         </p:nvPicPr>
         <p:blipFill>
-          <a:blip r:embed="rId3"/>
+          <a:blip r:embed="rId4"/>
           <a:stretch>
             <a:fillRect/>
           </a:stretch>
@@ -17375,7 +17082,7 @@
           <a:bodyPr wrap="square" rtlCol="0" anchor="ctr"/>
           <a:lstStyle/>
           <a:p>
-            <a:pPr indent="0" marL="0">
+            <a:pPr marL="0" indent="0">
               <a:buNone/>
             </a:pPr>
             <a:r>
@@ -17422,7 +17129,7 @@
       </p:sp>
       <p:pic>
         <p:nvPicPr>
-          <p:cNvPr id="11" name="Image 2" descr="/home/claude/carboncheck/icons/book.png">    </p:cNvPr>
+          <p:cNvPr id="11" name="Image 2" descr="/home/claude/carboncheck/icons/book.png"/>
           <p:cNvPicPr>
             <a:picLocks noChangeAspect="1"/>
           </p:cNvPicPr>
@@ -17465,7 +17172,7 @@
           <a:bodyPr wrap="square" rtlCol="0" anchor="ctr"/>
           <a:lstStyle/>
           <a:p>
-            <a:pPr indent="0" marL="0">
+            <a:pPr marL="0" indent="0">
               <a:buNone/>
             </a:pPr>
             <a:r>
@@ -17512,14 +17219,14 @@
       </p:sp>
       <p:pic>
         <p:nvPicPr>
-          <p:cNvPr id="14" name="Image 3" descr="/home/claude/carboncheck/icons/book.png">    </p:cNvPr>
+          <p:cNvPr id="14" name="Image 3" descr="/home/claude/carboncheck/icons/book.png"/>
           <p:cNvPicPr>
             <a:picLocks noChangeAspect="1"/>
           </p:cNvPicPr>
           <p:nvPr/>
         </p:nvPicPr>
         <p:blipFill>
-          <a:blip r:embed="rId5"/>
+          <a:blip r:embed="rId4"/>
           <a:stretch>
             <a:fillRect/>
           </a:stretch>
@@ -17555,7 +17262,7 @@
           <a:bodyPr wrap="square" rtlCol="0" anchor="ctr"/>
           <a:lstStyle/>
           <a:p>
-            <a:pPr indent="0" marL="0">
+            <a:pPr marL="0" indent="0">
               <a:buNone/>
             </a:pPr>
             <a:r>
@@ -17602,14 +17309,14 @@
       </p:sp>
       <p:pic>
         <p:nvPicPr>
-          <p:cNvPr id="17" name="Image 4" descr="/home/claude/carboncheck/icons/book.png">    </p:cNvPr>
+          <p:cNvPr id="17" name="Image 4" descr="/home/claude/carboncheck/icons/book.png"/>
           <p:cNvPicPr>
             <a:picLocks noChangeAspect="1"/>
           </p:cNvPicPr>
           <p:nvPr/>
         </p:nvPicPr>
         <p:blipFill>
-          <a:blip r:embed="rId6"/>
+          <a:blip r:embed="rId4"/>
           <a:stretch>
             <a:fillRect/>
           </a:stretch>
@@ -17645,7 +17352,7 @@
           <a:bodyPr wrap="square" rtlCol="0" anchor="ctr"/>
           <a:lstStyle/>
           <a:p>
-            <a:pPr indent="0" marL="0">
+            <a:pPr marL="0" indent="0">
               <a:buNone/>
             </a:pPr>
             <a:r>
@@ -17692,14 +17399,14 @@
       </p:sp>
       <p:pic>
         <p:nvPicPr>
-          <p:cNvPr id="20" name="Image 5" descr="/home/claude/carboncheck/icons/book.png">    </p:cNvPr>
+          <p:cNvPr id="20" name="Image 5" descr="/home/claude/carboncheck/icons/book.png"/>
           <p:cNvPicPr>
             <a:picLocks noChangeAspect="1"/>
           </p:cNvPicPr>
           <p:nvPr/>
         </p:nvPicPr>
         <p:blipFill>
-          <a:blip r:embed="rId7"/>
+          <a:blip r:embed="rId4"/>
           <a:stretch>
             <a:fillRect/>
           </a:stretch>
@@ -17735,7 +17442,7 @@
           <a:bodyPr wrap="square" rtlCol="0" anchor="ctr"/>
           <a:lstStyle/>
           <a:p>
-            <a:pPr indent="0" marL="0">
+            <a:pPr marL="0" indent="0">
               <a:buNone/>
             </a:pPr>
             <a:r>
@@ -17782,14 +17489,14 @@
       </p:sp>
       <p:pic>
         <p:nvPicPr>
-          <p:cNvPr id="23" name="Image 6" descr="/home/claude/carboncheck/icons/book.png">    </p:cNvPr>
+          <p:cNvPr id="23" name="Image 6" descr="/home/claude/carboncheck/icons/book.png"/>
           <p:cNvPicPr>
             <a:picLocks noChangeAspect="1"/>
           </p:cNvPicPr>
           <p:nvPr/>
         </p:nvPicPr>
         <p:blipFill>
-          <a:blip r:embed="rId8"/>
+          <a:blip r:embed="rId4"/>
           <a:stretch>
             <a:fillRect/>
           </a:stretch>
@@ -17825,7 +17532,7 @@
           <a:bodyPr wrap="square" rtlCol="0" anchor="ctr"/>
           <a:lstStyle/>
           <a:p>
-            <a:pPr indent="0" marL="0">
+            <a:pPr marL="0" indent="0">
               <a:buNone/>
             </a:pPr>
             <a:r>
@@ -17872,14 +17579,14 @@
       </p:sp>
       <p:pic>
         <p:nvPicPr>
-          <p:cNvPr id="26" name="Image 7" descr="/home/claude/carboncheck/icons/book.png">    </p:cNvPr>
+          <p:cNvPr id="26" name="Image 7" descr="/home/claude/carboncheck/icons/book.png"/>
           <p:cNvPicPr>
             <a:picLocks noChangeAspect="1"/>
           </p:cNvPicPr>
           <p:nvPr/>
         </p:nvPicPr>
         <p:blipFill>
-          <a:blip r:embed="rId9"/>
+          <a:blip r:embed="rId4"/>
           <a:stretch>
             <a:fillRect/>
           </a:stretch>
@@ -17915,7 +17622,7 @@
           <a:bodyPr wrap="square" rtlCol="0" anchor="ctr"/>
           <a:lstStyle/>
           <a:p>
-            <a:pPr indent="0" marL="0">
+            <a:pPr marL="0" indent="0">
               <a:buNone/>
             </a:pPr>
             <a:r>
@@ -17962,14 +17669,14 @@
       </p:sp>
       <p:pic>
         <p:nvPicPr>
-          <p:cNvPr id="29" name="Image 8" descr="/home/claude/carboncheck/icons/book.png">    </p:cNvPr>
+          <p:cNvPr id="29" name="Image 8" descr="/home/claude/carboncheck/icons/book.png"/>
           <p:cNvPicPr>
             <a:picLocks noChangeAspect="1"/>
           </p:cNvPicPr>
           <p:nvPr/>
         </p:nvPicPr>
         <p:blipFill>
-          <a:blip r:embed="rId10"/>
+          <a:blip r:embed="rId4"/>
           <a:stretch>
             <a:fillRect/>
           </a:stretch>
@@ -18005,7 +17712,7 @@
           <a:bodyPr wrap="square" rtlCol="0" anchor="ctr"/>
           <a:lstStyle/>
           <a:p>
-            <a:pPr indent="0" marL="0">
+            <a:pPr marL="0" indent="0">
               <a:buNone/>
             </a:pPr>
             <a:r>
@@ -18052,14 +17759,14 @@
       </p:sp>
       <p:pic>
         <p:nvPicPr>
-          <p:cNvPr id="32" name="Image 9" descr="/home/claude/carboncheck/icons/book.png">    </p:cNvPr>
+          <p:cNvPr id="32" name="Image 9" descr="/home/claude/carboncheck/icons/book.png"/>
           <p:cNvPicPr>
             <a:picLocks noChangeAspect="1"/>
           </p:cNvPicPr>
           <p:nvPr/>
         </p:nvPicPr>
         <p:blipFill>
-          <a:blip r:embed="rId11"/>
+          <a:blip r:embed="rId4"/>
           <a:stretch>
             <a:fillRect/>
           </a:stretch>
@@ -18095,7 +17802,7 @@
           <a:bodyPr wrap="square" rtlCol="0" anchor="ctr"/>
           <a:lstStyle/>
           <a:p>
-            <a:pPr indent="0" marL="0">
+            <a:pPr marL="0" indent="0">
               <a:buNone/>
             </a:pPr>
             <a:r>
@@ -18134,11 +17841,11 @@
           <a:bodyPr wrap="square" rtlCol="0" anchor="ctr"/>
           <a:lstStyle/>
           <a:p>
-            <a:pPr indent="0" marL="0">
-              <a:buNone/>
-            </a:pPr>
-            <a:r>
-              <a:rPr lang="en-US" sz="900" b="1" spc="200" kern="0" dirty="0">
+            <a:pPr marL="0" indent="0">
+              <a:buNone/>
+            </a:pPr>
+            <a:r>
+              <a:rPr lang="en-US" sz="900" b="1" kern="0" spc="200" dirty="0">
                 <a:solidFill>
                   <a:srgbClr val="8FA69A"/>
                 </a:solidFill>
@@ -18173,7 +17880,7 @@
           <a:bodyPr wrap="square" rtlCol="0" anchor="ctr"/>
           <a:lstStyle/>
           <a:p>
-            <a:pPr algn="r" indent="0" marL="0">
+            <a:pPr marL="0" indent="0" algn="r">
               <a:buNone/>
             </a:pPr>
             <a:r>
@@ -18205,7 +17912,7 @@
     <p:bg>
       <p:bgPr>
         <a:blipFill dpi="0" rotWithShape="1">
-          <a:blip r:embed="rId1">
+          <a:blip r:embed="rId3">
             <a:lum/>
           </a:blip>
           <a:srcRect/>
@@ -18261,99 +17968,7 @@
       </p:sp>
       <p:pic>
         <p:nvPicPr>
-          <p:cNvPr id="3" name="Image 0" descr="/home/claude/carboncheck/icons/earth_white.png">    </p:cNvPr>
-          <p:cNvPicPr>
-            <a:picLocks noChangeAspect="1"/>
-          </p:cNvPicPr>
-          <p:nvPr/>
-        </p:nvPicPr>
-        <p:blipFill>
-          <a:blip r:embed="rId2"/>
-          <a:stretch>
-            <a:fillRect/>
-          </a:stretch>
-        </p:blipFill>
-        <p:spPr>
-          <a:xfrm>
-            <a:off x="9677095" y="1234440"/>
-            <a:ext cx="1188720" cy="1188720"/>
-          </a:xfrm>
-          <a:prstGeom prst="rect">
-            <a:avLst/>
-          </a:prstGeom>
-        </p:spPr>
-      </p:pic>
-      <p:sp>
-        <p:nvSpPr>
-          <p:cNvPr id="4" name="Shape 1"/>
-          <p:cNvSpPr/>
-          <p:nvPr/>
-        </p:nvSpPr>
-        <p:spPr>
-          <a:xfrm>
-            <a:off x="822960" y="4480560"/>
-            <a:ext cx="914400" cy="914400"/>
-          </a:xfrm>
-          <a:prstGeom prst="ellipse">
-            <a:avLst/>
-          </a:prstGeom>
-          <a:solidFill>
-            <a:srgbClr val="52D68D">
-              <a:alpha val="15000"/>
-            </a:srgbClr>
-          </a:solidFill>
-          <a:ln/>
-        </p:spPr>
-      </p:sp>
-      <p:pic>
-        <p:nvPicPr>
-          <p:cNvPr id="5" name="Image 1" descr="/home/claude/carboncheck/icons/leaf_white.png">    </p:cNvPr>
-          <p:cNvPicPr>
-            <a:picLocks noChangeAspect="1"/>
-          </p:cNvPicPr>
-          <p:nvPr/>
-        </p:nvPicPr>
-        <p:blipFill>
-          <a:blip r:embed="rId3"/>
-          <a:stretch>
-            <a:fillRect/>
-          </a:stretch>
-        </p:blipFill>
-        <p:spPr>
-          <a:xfrm>
-            <a:off x="1051560" y="4709160"/>
-            <a:ext cx="457200" cy="457200"/>
-          </a:xfrm>
-          <a:prstGeom prst="rect">
-            <a:avLst/>
-          </a:prstGeom>
-        </p:spPr>
-      </p:pic>
-      <p:sp>
-        <p:nvSpPr>
-          <p:cNvPr id="6" name="Shape 2"/>
-          <p:cNvSpPr/>
-          <p:nvPr/>
-        </p:nvSpPr>
-        <p:spPr>
-          <a:xfrm>
-            <a:off x="1920240" y="1005840"/>
-            <a:ext cx="548640" cy="548640"/>
-          </a:xfrm>
-          <a:prstGeom prst="ellipse">
-            <a:avLst/>
-          </a:prstGeom>
-          <a:solidFill>
-            <a:srgbClr val="52D68D">
-              <a:alpha val="12000"/>
-            </a:srgbClr>
-          </a:solidFill>
-          <a:ln/>
-        </p:spPr>
-      </p:sp>
-      <p:pic>
-        <p:nvPicPr>
-          <p:cNvPr id="7" name="Image 2" descr="/home/claude/carboncheck/icons/network_white.png">    </p:cNvPr>
+          <p:cNvPr id="3" name="Image 0" descr="/home/claude/carboncheck/icons/earth_white.png"/>
           <p:cNvPicPr>
             <a:picLocks noChangeAspect="1"/>
           </p:cNvPicPr>
@@ -18367,6 +17982,98 @@
         </p:blipFill>
         <p:spPr>
           <a:xfrm>
+            <a:off x="9677095" y="1234440"/>
+            <a:ext cx="1188720" cy="1188720"/>
+          </a:xfrm>
+          <a:prstGeom prst="rect">
+            <a:avLst/>
+          </a:prstGeom>
+        </p:spPr>
+      </p:pic>
+      <p:sp>
+        <p:nvSpPr>
+          <p:cNvPr id="4" name="Shape 1"/>
+          <p:cNvSpPr/>
+          <p:nvPr/>
+        </p:nvSpPr>
+        <p:spPr>
+          <a:xfrm>
+            <a:off x="822960" y="4480560"/>
+            <a:ext cx="914400" cy="914400"/>
+          </a:xfrm>
+          <a:prstGeom prst="ellipse">
+            <a:avLst/>
+          </a:prstGeom>
+          <a:solidFill>
+            <a:srgbClr val="52D68D">
+              <a:alpha val="15000"/>
+            </a:srgbClr>
+          </a:solidFill>
+          <a:ln/>
+        </p:spPr>
+      </p:sp>
+      <p:pic>
+        <p:nvPicPr>
+          <p:cNvPr id="5" name="Image 1" descr="/home/claude/carboncheck/icons/leaf_white.png"/>
+          <p:cNvPicPr>
+            <a:picLocks noChangeAspect="1"/>
+          </p:cNvPicPr>
+          <p:nvPr/>
+        </p:nvPicPr>
+        <p:blipFill>
+          <a:blip r:embed="rId5"/>
+          <a:stretch>
+            <a:fillRect/>
+          </a:stretch>
+        </p:blipFill>
+        <p:spPr>
+          <a:xfrm>
+            <a:off x="1051560" y="4709160"/>
+            <a:ext cx="457200" cy="457200"/>
+          </a:xfrm>
+          <a:prstGeom prst="rect">
+            <a:avLst/>
+          </a:prstGeom>
+        </p:spPr>
+      </p:pic>
+      <p:sp>
+        <p:nvSpPr>
+          <p:cNvPr id="6" name="Shape 2"/>
+          <p:cNvSpPr/>
+          <p:nvPr/>
+        </p:nvSpPr>
+        <p:spPr>
+          <a:xfrm>
+            <a:off x="1920240" y="1005840"/>
+            <a:ext cx="548640" cy="548640"/>
+          </a:xfrm>
+          <a:prstGeom prst="ellipse">
+            <a:avLst/>
+          </a:prstGeom>
+          <a:solidFill>
+            <a:srgbClr val="52D68D">
+              <a:alpha val="12000"/>
+            </a:srgbClr>
+          </a:solidFill>
+          <a:ln/>
+        </p:spPr>
+      </p:sp>
+      <p:pic>
+        <p:nvPicPr>
+          <p:cNvPr id="7" name="Image 2" descr="/home/claude/carboncheck/icons/network_white.png"/>
+          <p:cNvPicPr>
+            <a:picLocks noChangeAspect="1"/>
+          </p:cNvPicPr>
+          <p:nvPr/>
+        </p:nvPicPr>
+        <p:blipFill>
+          <a:blip r:embed="rId6"/>
+          <a:stretch>
+            <a:fillRect/>
+          </a:stretch>
+        </p:blipFill>
+        <p:spPr>
+          <a:xfrm>
             <a:off x="2048256" y="1133856"/>
             <a:ext cx="292608" cy="292608"/>
           </a:xfrm>
@@ -18396,11 +18103,11 @@
           <a:bodyPr wrap="square" rtlCol="0" anchor="ctr"/>
           <a:lstStyle/>
           <a:p>
-            <a:pPr indent="0" marL="0">
-              <a:buNone/>
-            </a:pPr>
-            <a:r>
-              <a:rPr lang="en-US" sz="1300" b="1" spc="300" kern="0" dirty="0">
+            <a:pPr marL="0" indent="0">
+              <a:buNone/>
+            </a:pPr>
+            <a:r>
+              <a:rPr lang="en-US" sz="1300" b="1" kern="0" spc="300" dirty="0">
                 <a:solidFill>
                   <a:srgbClr val="52D68D"/>
                 </a:solidFill>
@@ -18435,7 +18142,7 @@
           <a:bodyPr wrap="square" rtlCol="0" anchor="ctr"/>
           <a:lstStyle/>
           <a:p>
-            <a:pPr indent="0" marL="0">
+            <a:pPr marL="0" indent="0">
               <a:buNone/>
             </a:pPr>
             <a:r>
@@ -18474,7 +18181,7 @@
           <a:bodyPr wrap="square" rtlCol="0" anchor="ctr"/>
           <a:lstStyle/>
           <a:p>
-            <a:pPr indent="0" marL="0">
+            <a:pPr marL="0" indent="0">
               <a:buNone/>
             </a:pPr>
             <a:r>
@@ -18513,7 +18220,7 @@
           <a:bodyPr wrap="square" rtlCol="0" anchor="ctr"/>
           <a:lstStyle/>
           <a:p>
-            <a:pPr indent="0" marL="0">
+            <a:pPr marL="0" indent="0">
               <a:buNone/>
             </a:pPr>
             <a:r>
@@ -18552,7 +18259,7 @@
           <a:bodyPr wrap="square" rtlCol="0" anchor="ctr"/>
           <a:lstStyle/>
           <a:p>
-            <a:pPr algn="r" indent="0" marL="0">
+            <a:pPr marL="0" indent="0" algn="r">
               <a:buNone/>
             </a:pPr>
             <a:r>
@@ -18584,7 +18291,7 @@
     <p:bg>
       <p:bgPr>
         <a:blipFill dpi="0" rotWithShape="1">
-          <a:blip r:embed="rId1">
+          <a:blip r:embed="rId3">
             <a:lum/>
           </a:blip>
           <a:srcRect/>
@@ -18630,11 +18337,11 @@
           <a:bodyPr wrap="square" rtlCol="0" anchor="ctr"/>
           <a:lstStyle/>
           <a:p>
-            <a:pPr indent="0" marL="0">
-              <a:buNone/>
-            </a:pPr>
-            <a:r>
-              <a:rPr lang="en-US" sz="1200" b="1" spc="200" kern="0" dirty="0">
+            <a:pPr marL="0" indent="0">
+              <a:buNone/>
+            </a:pPr>
+            <a:r>
+              <a:rPr lang="en-US" sz="1200" b="1" kern="0" spc="200" dirty="0">
                 <a:solidFill>
                   <a:srgbClr val="2D9C6F"/>
                 </a:solidFill>
@@ -18669,7 +18376,7 @@
           <a:bodyPr wrap="square" rtlCol="0" anchor="ctr"/>
           <a:lstStyle/>
           <a:p>
-            <a:pPr indent="0" marL="0">
+            <a:pPr marL="0" indent="0">
               <a:buNone/>
             </a:pPr>
             <a:r>
@@ -18713,7 +18420,7 @@
             <a:prstDash val="solid"/>
           </a:ln>
           <a:effectLst>
-            <a:outerShdw sx="100000" sy="100000" kx="0" ky="0" algn="bl" rotWithShape="0" blurRad="127000" dist="38100" dir="5400000">
+            <a:outerShdw blurRad="127000" dist="38100" dir="5400000" algn="bl" rotWithShape="0">
               <a:srgbClr val="1B4332">
                 <a:alpha val="10000"/>
               </a:srgbClr>
@@ -18743,14 +18450,14 @@
       </p:sp>
       <p:pic>
         <p:nvPicPr>
-          <p:cNvPr id="6" name="Image 0" descr="/home/claude/carboncheck/icons/triangle_warn.png">    </p:cNvPr>
+          <p:cNvPr id="6" name="Image 0" descr="/home/claude/carboncheck/icons/triangle_warn.png"/>
           <p:cNvPicPr>
             <a:picLocks noChangeAspect="1"/>
           </p:cNvPicPr>
           <p:nvPr/>
         </p:nvPicPr>
         <p:blipFill>
-          <a:blip r:embed="rId2"/>
+          <a:blip r:embed="rId4"/>
           <a:stretch>
             <a:fillRect/>
           </a:stretch>
@@ -18786,7 +18493,7 @@
           <a:bodyPr wrap="square" rtlCol="0" anchor="ctr"/>
           <a:lstStyle/>
           <a:p>
-            <a:pPr indent="0" marL="0">
+            <a:pPr marL="0" indent="0">
               <a:buNone/>
             </a:pPr>
             <a:r>
@@ -18825,7 +18532,7 @@
           <a:bodyPr wrap="square" rtlCol="0" anchor="ctr"/>
           <a:lstStyle/>
           <a:p>
-            <a:pPr indent="0" marL="0">
+            <a:pPr marL="0" indent="0">
               <a:lnSpc>
                 <a:spcPct val="115000"/>
               </a:lnSpc>
@@ -18872,7 +18579,7 @@
             <a:prstDash val="solid"/>
           </a:ln>
           <a:effectLst>
-            <a:outerShdw sx="100000" sy="100000" kx="0" ky="0" algn="bl" rotWithShape="0" blurRad="127000" dist="38100" dir="5400000">
+            <a:outerShdw blurRad="127000" dist="38100" dir="5400000" algn="bl" rotWithShape="0">
               <a:srgbClr val="1B4332">
                 <a:alpha val="10000"/>
               </a:srgbClr>
@@ -18902,14 +18609,14 @@
       </p:sp>
       <p:pic>
         <p:nvPicPr>
-          <p:cNvPr id="11" name="Image 1" descr="/home/claude/carboncheck/icons/cloud.png">    </p:cNvPr>
+          <p:cNvPr id="11" name="Image 1" descr="/home/claude/carboncheck/icons/cloud.png"/>
           <p:cNvPicPr>
             <a:picLocks noChangeAspect="1"/>
           </p:cNvPicPr>
           <p:nvPr/>
         </p:nvPicPr>
         <p:blipFill>
-          <a:blip r:embed="rId3"/>
+          <a:blip r:embed="rId5"/>
           <a:stretch>
             <a:fillRect/>
           </a:stretch>
@@ -18945,7 +18652,7 @@
           <a:bodyPr wrap="square" rtlCol="0" anchor="ctr"/>
           <a:lstStyle/>
           <a:p>
-            <a:pPr indent="0" marL="0">
+            <a:pPr marL="0" indent="0">
               <a:buNone/>
             </a:pPr>
             <a:r>
@@ -18984,7 +18691,7 @@
           <a:bodyPr wrap="square" rtlCol="0" anchor="ctr"/>
           <a:lstStyle/>
           <a:p>
-            <a:pPr indent="0" marL="0">
+            <a:pPr marL="0" indent="0">
               <a:lnSpc>
                 <a:spcPct val="115000"/>
               </a:lnSpc>
@@ -19031,7 +18738,7 @@
             <a:prstDash val="solid"/>
           </a:ln>
           <a:effectLst>
-            <a:outerShdw sx="100000" sy="100000" kx="0" ky="0" algn="bl" rotWithShape="0" blurRad="127000" dist="38100" dir="5400000">
+            <a:outerShdw blurRad="127000" dist="38100" dir="5400000" algn="bl" rotWithShape="0">
               <a:srgbClr val="1B4332">
                 <a:alpha val="10000"/>
               </a:srgbClr>
@@ -19061,14 +18768,14 @@
       </p:sp>
       <p:pic>
         <p:nvPicPr>
-          <p:cNvPr id="16" name="Image 2" descr="/home/claude/carboncheck/icons/globe.png">    </p:cNvPr>
+          <p:cNvPr id="16" name="Image 2" descr="/home/claude/carboncheck/icons/globe.png"/>
           <p:cNvPicPr>
             <a:picLocks noChangeAspect="1"/>
           </p:cNvPicPr>
           <p:nvPr/>
         </p:nvPicPr>
         <p:blipFill>
-          <a:blip r:embed="rId4"/>
+          <a:blip r:embed="rId6"/>
           <a:stretch>
             <a:fillRect/>
           </a:stretch>
@@ -19104,7 +18811,7 @@
           <a:bodyPr wrap="square" rtlCol="0" anchor="ctr"/>
           <a:lstStyle/>
           <a:p>
-            <a:pPr indent="0" marL="0">
+            <a:pPr marL="0" indent="0">
               <a:buNone/>
             </a:pPr>
             <a:r>
@@ -19143,7 +18850,7 @@
           <a:bodyPr wrap="square" rtlCol="0" anchor="ctr"/>
           <a:lstStyle/>
           <a:p>
-            <a:pPr indent="0" marL="0">
+            <a:pPr marL="0" indent="0">
               <a:lnSpc>
                 <a:spcPct val="115000"/>
               </a:lnSpc>
@@ -19190,7 +18897,7 @@
             <a:prstDash val="solid"/>
           </a:ln>
           <a:effectLst>
-            <a:outerShdw sx="100000" sy="100000" kx="0" ky="0" algn="bl" rotWithShape="0" blurRad="127000" dist="38100" dir="5400000">
+            <a:outerShdw blurRad="127000" dist="38100" dir="5400000" algn="bl" rotWithShape="0">
               <a:srgbClr val="1B4332">
                 <a:alpha val="10000"/>
               </a:srgbClr>
@@ -19220,14 +18927,14 @@
       </p:sp>
       <p:pic>
         <p:nvPicPr>
-          <p:cNvPr id="21" name="Image 3" descr="/home/claude/carboncheck/icons/leaf.png">    </p:cNvPr>
+          <p:cNvPr id="21" name="Image 3" descr="/home/claude/carboncheck/icons/leaf.png"/>
           <p:cNvPicPr>
             <a:picLocks noChangeAspect="1"/>
           </p:cNvPicPr>
           <p:nvPr/>
         </p:nvPicPr>
         <p:blipFill>
-          <a:blip r:embed="rId5"/>
+          <a:blip r:embed="rId7"/>
           <a:stretch>
             <a:fillRect/>
           </a:stretch>
@@ -19263,7 +18970,7 @@
           <a:bodyPr wrap="square" rtlCol="0" anchor="ctr"/>
           <a:lstStyle/>
           <a:p>
-            <a:pPr indent="0" marL="0">
+            <a:pPr marL="0" indent="0">
               <a:buNone/>
             </a:pPr>
             <a:r>
@@ -19302,7 +19009,7 @@
           <a:bodyPr wrap="square" rtlCol="0" anchor="ctr"/>
           <a:lstStyle/>
           <a:p>
-            <a:pPr indent="0" marL="0">
+            <a:pPr marL="0" indent="0">
               <a:lnSpc>
                 <a:spcPct val="115000"/>
               </a:lnSpc>
@@ -19349,7 +19056,7 @@
             <a:prstDash val="solid"/>
           </a:ln>
           <a:effectLst>
-            <a:outerShdw sx="100000" sy="100000" kx="0" ky="0" algn="bl" rotWithShape="0" blurRad="127000" dist="38100" dir="5400000">
+            <a:outerShdw blurRad="127000" dist="38100" dir="5400000" algn="bl" rotWithShape="0">
               <a:srgbClr val="1B4332">
                 <a:alpha val="10000"/>
               </a:srgbClr>
@@ -19379,14 +19086,14 @@
       </p:sp>
       <p:pic>
         <p:nvPicPr>
-          <p:cNvPr id="26" name="Image 4" descr="/home/claude/carboncheck/icons/brain.png">    </p:cNvPr>
+          <p:cNvPr id="26" name="Image 4" descr="/home/claude/carboncheck/icons/brain.png"/>
           <p:cNvPicPr>
             <a:picLocks noChangeAspect="1"/>
           </p:cNvPicPr>
           <p:nvPr/>
         </p:nvPicPr>
         <p:blipFill>
-          <a:blip r:embed="rId6"/>
+          <a:blip r:embed="rId8"/>
           <a:stretch>
             <a:fillRect/>
           </a:stretch>
@@ -19422,7 +19129,7 @@
           <a:bodyPr wrap="square" rtlCol="0" anchor="ctr"/>
           <a:lstStyle/>
           <a:p>
-            <a:pPr indent="0" marL="0">
+            <a:pPr marL="0" indent="0">
               <a:buNone/>
             </a:pPr>
             <a:r>
@@ -19461,7 +19168,7 @@
           <a:bodyPr wrap="square" rtlCol="0" anchor="ctr"/>
           <a:lstStyle/>
           <a:p>
-            <a:pPr indent="0" marL="0">
+            <a:pPr marL="0" indent="0">
               <a:lnSpc>
                 <a:spcPct val="115000"/>
               </a:lnSpc>
@@ -19503,11 +19210,11 @@
           <a:bodyPr wrap="square" rtlCol="0" anchor="ctr"/>
           <a:lstStyle/>
           <a:p>
-            <a:pPr indent="0" marL="0">
-              <a:buNone/>
-            </a:pPr>
-            <a:r>
-              <a:rPr lang="en-US" sz="900" b="1" spc="200" kern="0" dirty="0">
+            <a:pPr marL="0" indent="0">
+              <a:buNone/>
+            </a:pPr>
+            <a:r>
+              <a:rPr lang="en-US" sz="900" b="1" kern="0" spc="200" dirty="0">
                 <a:solidFill>
                   <a:srgbClr val="8FA69A"/>
                 </a:solidFill>
@@ -19542,7 +19249,7 @@
           <a:bodyPr wrap="square" rtlCol="0" anchor="ctr"/>
           <a:lstStyle/>
           <a:p>
-            <a:pPr algn="r" indent="0" marL="0">
+            <a:pPr marL="0" indent="0" algn="r">
               <a:buNone/>
             </a:pPr>
             <a:r>
@@ -19574,7 +19281,7 @@
     <p:bg>
       <p:bgPr>
         <a:blipFill dpi="0" rotWithShape="1">
-          <a:blip r:embed="rId1">
+          <a:blip r:embed="rId3">
             <a:lum/>
           </a:blip>
           <a:srcRect/>
@@ -19620,11 +19327,11 @@
           <a:bodyPr wrap="square" rtlCol="0" anchor="ctr"/>
           <a:lstStyle/>
           <a:p>
-            <a:pPr indent="0" marL="0">
-              <a:buNone/>
-            </a:pPr>
-            <a:r>
-              <a:rPr lang="en-US" sz="1200" b="1" spc="200" kern="0" dirty="0">
+            <a:pPr marL="0" indent="0">
+              <a:buNone/>
+            </a:pPr>
+            <a:r>
+              <a:rPr lang="en-US" sz="1200" b="1" kern="0" spc="200" dirty="0">
                 <a:solidFill>
                   <a:srgbClr val="2D9C6F"/>
                 </a:solidFill>
@@ -19659,7 +19366,7 @@
           <a:bodyPr wrap="square" rtlCol="0" anchor="ctr"/>
           <a:lstStyle/>
           <a:p>
-            <a:pPr indent="0" marL="0">
+            <a:pPr marL="0" indent="0">
               <a:buNone/>
             </a:pPr>
             <a:r>
@@ -19703,7 +19410,7 @@
             <a:prstDash val="solid"/>
           </a:ln>
           <a:effectLst>
-            <a:outerShdw sx="100000" sy="100000" kx="0" ky="0" algn="bl" rotWithShape="0" blurRad="127000" dist="38100" dir="5400000">
+            <a:outerShdw blurRad="127000" dist="38100" dir="5400000" algn="bl" rotWithShape="0">
               <a:srgbClr val="1B4332">
                 <a:alpha val="10000"/>
               </a:srgbClr>
@@ -19733,14 +19440,14 @@
       </p:sp>
       <p:pic>
         <p:nvPicPr>
-          <p:cNvPr id="6" name="Image 0" descr="/home/claude/carboncheck/icons/triangle_warn.png">    </p:cNvPr>
+          <p:cNvPr id="6" name="Image 0" descr="/home/claude/carboncheck/icons/triangle_warn.png"/>
           <p:cNvPicPr>
             <a:picLocks noChangeAspect="1"/>
           </p:cNvPicPr>
           <p:nvPr/>
         </p:nvPicPr>
         <p:blipFill>
-          <a:blip r:embed="rId2"/>
+          <a:blip r:embed="rId4"/>
           <a:stretch>
             <a:fillRect/>
           </a:stretch>
@@ -19776,7 +19483,7 @@
           <a:bodyPr wrap="square" rtlCol="0" anchor="ctr"/>
           <a:lstStyle/>
           <a:p>
-            <a:pPr indent="0" marL="0">
+            <a:pPr marL="0" indent="0">
               <a:buNone/>
             </a:pPr>
             <a:r>
@@ -19815,7 +19522,7 @@
           <a:bodyPr wrap="square" rtlCol="0" anchor="ctr"/>
           <a:lstStyle/>
           <a:p>
-            <a:pPr indent="0" marL="0">
+            <a:pPr marL="0" indent="0">
               <a:lnSpc>
                 <a:spcPct val="115000"/>
               </a:lnSpc>
@@ -19862,7 +19569,7 @@
             <a:prstDash val="solid"/>
           </a:ln>
           <a:effectLst>
-            <a:outerShdw sx="100000" sy="100000" kx="0" ky="0" algn="bl" rotWithShape="0" blurRad="127000" dist="38100" dir="5400000">
+            <a:outerShdw blurRad="127000" dist="38100" dir="5400000" algn="bl" rotWithShape="0">
               <a:srgbClr val="1B4332">
                 <a:alpha val="10000"/>
               </a:srgbClr>
@@ -19892,14 +19599,14 @@
       </p:sp>
       <p:pic>
         <p:nvPicPr>
-          <p:cNvPr id="11" name="Image 1" descr="/home/claude/carboncheck/icons/circle_info.png">    </p:cNvPr>
+          <p:cNvPr id="11" name="Image 1" descr="/home/claude/carboncheck/icons/circle_info.png"/>
           <p:cNvPicPr>
             <a:picLocks noChangeAspect="1"/>
           </p:cNvPicPr>
           <p:nvPr/>
         </p:nvPicPr>
         <p:blipFill>
-          <a:blip r:embed="rId3"/>
+          <a:blip r:embed="rId5"/>
           <a:stretch>
             <a:fillRect/>
           </a:stretch>
@@ -19935,7 +19642,7 @@
           <a:bodyPr wrap="square" rtlCol="0" anchor="ctr"/>
           <a:lstStyle/>
           <a:p>
-            <a:pPr indent="0" marL="0">
+            <a:pPr marL="0" indent="0">
               <a:buNone/>
             </a:pPr>
             <a:r>
@@ -19974,7 +19681,7 @@
           <a:bodyPr wrap="square" rtlCol="0" anchor="ctr"/>
           <a:lstStyle/>
           <a:p>
-            <a:pPr indent="0" marL="0">
+            <a:pPr marL="0" indent="0">
               <a:lnSpc>
                 <a:spcPct val="115000"/>
               </a:lnSpc>
@@ -20021,7 +19728,7 @@
             <a:prstDash val="solid"/>
           </a:ln>
           <a:effectLst>
-            <a:outerShdw sx="100000" sy="100000" kx="0" ky="0" algn="bl" rotWithShape="0" blurRad="127000" dist="38100" dir="5400000">
+            <a:outerShdw blurRad="127000" dist="38100" dir="5400000" algn="bl" rotWithShape="0">
               <a:srgbClr val="1B4332">
                 <a:alpha val="10000"/>
               </a:srgbClr>
@@ -20051,14 +19758,14 @@
       </p:sp>
       <p:pic>
         <p:nvPicPr>
-          <p:cNvPr id="16" name="Image 2" descr="/home/claude/carboncheck/icons/gauge.png">    </p:cNvPr>
+          <p:cNvPr id="16" name="Image 2" descr="/home/claude/carboncheck/icons/gauge.png"/>
           <p:cNvPicPr>
             <a:picLocks noChangeAspect="1"/>
           </p:cNvPicPr>
           <p:nvPr/>
         </p:nvPicPr>
         <p:blipFill>
-          <a:blip r:embed="rId4"/>
+          <a:blip r:embed="rId6"/>
           <a:stretch>
             <a:fillRect/>
           </a:stretch>
@@ -20094,7 +19801,7 @@
           <a:bodyPr wrap="square" rtlCol="0" anchor="ctr"/>
           <a:lstStyle/>
           <a:p>
-            <a:pPr indent="0" marL="0">
+            <a:pPr marL="0" indent="0">
               <a:buNone/>
             </a:pPr>
             <a:r>
@@ -20133,7 +19840,7 @@
           <a:bodyPr wrap="square" rtlCol="0" anchor="ctr"/>
           <a:lstStyle/>
           <a:p>
-            <a:pPr indent="0" marL="0">
+            <a:pPr marL="0" indent="0">
               <a:lnSpc>
                 <a:spcPct val="115000"/>
               </a:lnSpc>
@@ -20180,7 +19887,7 @@
             <a:prstDash val="solid"/>
           </a:ln>
           <a:effectLst>
-            <a:outerShdw sx="100000" sy="100000" kx="0" ky="0" algn="bl" rotWithShape="0" blurRad="127000" dist="38100" dir="5400000">
+            <a:outerShdw blurRad="127000" dist="38100" dir="5400000" algn="bl" rotWithShape="0">
               <a:srgbClr val="1B4332">
                 <a:alpha val="10000"/>
               </a:srgbClr>
@@ -20210,14 +19917,14 @@
       </p:sp>
       <p:pic>
         <p:nvPicPr>
-          <p:cNvPr id="21" name="Image 3" descr="/home/claude/carboncheck/icons/xmark.png">    </p:cNvPr>
+          <p:cNvPr id="21" name="Image 3" descr="/home/claude/carboncheck/icons/xmark.png"/>
           <p:cNvPicPr>
             <a:picLocks noChangeAspect="1"/>
           </p:cNvPicPr>
           <p:nvPr/>
         </p:nvPicPr>
         <p:blipFill>
-          <a:blip r:embed="rId5"/>
+          <a:blip r:embed="rId7"/>
           <a:stretch>
             <a:fillRect/>
           </a:stretch>
@@ -20253,7 +19960,7 @@
           <a:bodyPr wrap="square" rtlCol="0" anchor="ctr"/>
           <a:lstStyle/>
           <a:p>
-            <a:pPr indent="0" marL="0">
+            <a:pPr marL="0" indent="0">
               <a:buNone/>
             </a:pPr>
             <a:r>
@@ -20292,7 +19999,7 @@
           <a:bodyPr wrap="square" rtlCol="0" anchor="ctr"/>
           <a:lstStyle/>
           <a:p>
-            <a:pPr indent="0" marL="0">
+            <a:pPr marL="0" indent="0">
               <a:lnSpc>
                 <a:spcPct val="115000"/>
               </a:lnSpc>
@@ -20339,7 +20046,7 @@
             <a:prstDash val="solid"/>
           </a:ln>
           <a:effectLst>
-            <a:outerShdw sx="100000" sy="100000" kx="0" ky="0" algn="bl" rotWithShape="0" blurRad="127000" dist="38100" dir="5400000">
+            <a:outerShdw blurRad="127000" dist="38100" dir="5400000" algn="bl" rotWithShape="0">
               <a:srgbClr val="1B4332">
                 <a:alpha val="10000"/>
               </a:srgbClr>
@@ -20369,14 +20076,14 @@
       </p:sp>
       <p:pic>
         <p:nvPicPr>
-          <p:cNvPr id="26" name="Image 4" descr="/home/claude/carboncheck/icons/brain.png">    </p:cNvPr>
+          <p:cNvPr id="26" name="Image 4" descr="/home/claude/carboncheck/icons/brain.png"/>
           <p:cNvPicPr>
             <a:picLocks noChangeAspect="1"/>
           </p:cNvPicPr>
           <p:nvPr/>
         </p:nvPicPr>
         <p:blipFill>
-          <a:blip r:embed="rId6"/>
+          <a:blip r:embed="rId8"/>
           <a:stretch>
             <a:fillRect/>
           </a:stretch>
@@ -20412,7 +20119,7 @@
           <a:bodyPr wrap="square" rtlCol="0" anchor="ctr"/>
           <a:lstStyle/>
           <a:p>
-            <a:pPr indent="0" marL="0">
+            <a:pPr marL="0" indent="0">
               <a:buNone/>
             </a:pPr>
             <a:r>
@@ -20451,7 +20158,7 @@
           <a:bodyPr wrap="square" rtlCol="0" anchor="ctr"/>
           <a:lstStyle/>
           <a:p>
-            <a:pPr indent="0" marL="0">
+            <a:pPr marL="0" indent="0">
               <a:lnSpc>
                 <a:spcPct val="115000"/>
               </a:lnSpc>
@@ -20493,11 +20200,11 @@
           <a:bodyPr wrap="square" rtlCol="0" anchor="ctr"/>
           <a:lstStyle/>
           <a:p>
-            <a:pPr indent="0" marL="0">
-              <a:buNone/>
-            </a:pPr>
-            <a:r>
-              <a:rPr lang="en-US" sz="900" b="1" spc="200" kern="0" dirty="0">
+            <a:pPr marL="0" indent="0">
+              <a:buNone/>
+            </a:pPr>
+            <a:r>
+              <a:rPr lang="en-US" sz="900" b="1" kern="0" spc="200" dirty="0">
                 <a:solidFill>
                   <a:srgbClr val="8FA69A"/>
                 </a:solidFill>
@@ -20532,7 +20239,7 @@
           <a:bodyPr wrap="square" rtlCol="0" anchor="ctr"/>
           <a:lstStyle/>
           <a:p>
-            <a:pPr algn="r" indent="0" marL="0">
+            <a:pPr marL="0" indent="0" algn="r">
               <a:buNone/>
             </a:pPr>
             <a:r>
@@ -20564,7 +20271,7 @@
     <p:bg>
       <p:bgPr>
         <a:blipFill dpi="0" rotWithShape="1">
-          <a:blip r:embed="rId1">
+          <a:blip r:embed="rId3">
             <a:lum/>
           </a:blip>
           <a:srcRect/>
@@ -20610,11 +20317,11 @@
           <a:bodyPr wrap="square" rtlCol="0" anchor="ctr"/>
           <a:lstStyle/>
           <a:p>
-            <a:pPr indent="0" marL="0">
-              <a:buNone/>
-            </a:pPr>
-            <a:r>
-              <a:rPr lang="en-US" sz="1200" b="1" spc="200" kern="0" dirty="0">
+            <a:pPr marL="0" indent="0">
+              <a:buNone/>
+            </a:pPr>
+            <a:r>
+              <a:rPr lang="en-US" sz="1200" b="1" kern="0" spc="200" dirty="0">
                 <a:solidFill>
                   <a:srgbClr val="2D9C6F"/>
                 </a:solidFill>
@@ -20649,7 +20356,7 @@
           <a:bodyPr wrap="square" rtlCol="0" anchor="ctr"/>
           <a:lstStyle/>
           <a:p>
-            <a:pPr indent="0" marL="0">
+            <a:pPr marL="0" indent="0">
               <a:buNone/>
             </a:pPr>
             <a:r>
@@ -20693,7 +20400,7 @@
             <a:prstDash val="solid"/>
           </a:ln>
           <a:effectLst>
-            <a:outerShdw sx="100000" sy="100000" kx="0" ky="0" algn="bl" rotWithShape="0" blurRad="127000" dist="38100" dir="5400000">
+            <a:outerShdw blurRad="127000" dist="38100" dir="5400000" algn="bl" rotWithShape="0">
               <a:srgbClr val="1B4332">
                 <a:alpha val="10000"/>
               </a:srgbClr>
@@ -20723,14 +20430,14 @@
       </p:sp>
       <p:pic>
         <p:nvPicPr>
-          <p:cNvPr id="6" name="Image 0" descr="/home/claude/carboncheck/icons/gauge.png">    </p:cNvPr>
+          <p:cNvPr id="6" name="Image 0" descr="/home/claude/carboncheck/icons/gauge.png"/>
           <p:cNvPicPr>
             <a:picLocks noChangeAspect="1"/>
           </p:cNvPicPr>
           <p:nvPr/>
         </p:nvPicPr>
         <p:blipFill>
-          <a:blip r:embed="rId2"/>
+          <a:blip r:embed="rId4"/>
           <a:stretch>
             <a:fillRect/>
           </a:stretch>
@@ -20766,7 +20473,7 @@
           <a:bodyPr wrap="square" rtlCol="0" anchor="ctr"/>
           <a:lstStyle/>
           <a:p>
-            <a:pPr indent="0" marL="0">
+            <a:pPr marL="0" indent="0">
               <a:buNone/>
             </a:pPr>
             <a:r>
@@ -20805,7 +20512,7 @@
           <a:bodyPr wrap="square" rtlCol="0" anchor="ctr"/>
           <a:lstStyle/>
           <a:p>
-            <a:pPr indent="0" marL="0">
+            <a:pPr marL="0" indent="0">
               <a:lnSpc>
                 <a:spcPct val="115000"/>
               </a:lnSpc>
@@ -20852,7 +20559,7 @@
             <a:prstDash val="solid"/>
           </a:ln>
           <a:effectLst>
-            <a:outerShdw sx="100000" sy="100000" kx="0" ky="0" algn="bl" rotWithShape="0" blurRad="127000" dist="38100" dir="5400000">
+            <a:outerShdw blurRad="127000" dist="38100" dir="5400000" algn="bl" rotWithShape="0">
               <a:srgbClr val="1B4332">
                 <a:alpha val="10000"/>
               </a:srgbClr>
@@ -20882,14 +20589,14 @@
       </p:sp>
       <p:pic>
         <p:nvPicPr>
-          <p:cNvPr id="11" name="Image 1" descr="/home/claude/carboncheck/icons/brain.png">    </p:cNvPr>
+          <p:cNvPr id="11" name="Image 1" descr="/home/claude/carboncheck/icons/brain.png"/>
           <p:cNvPicPr>
             <a:picLocks noChangeAspect="1"/>
           </p:cNvPicPr>
           <p:nvPr/>
         </p:nvPicPr>
         <p:blipFill>
-          <a:blip r:embed="rId3"/>
+          <a:blip r:embed="rId5"/>
           <a:stretch>
             <a:fillRect/>
           </a:stretch>
@@ -20925,7 +20632,7 @@
           <a:bodyPr wrap="square" rtlCol="0" anchor="ctr"/>
           <a:lstStyle/>
           <a:p>
-            <a:pPr indent="0" marL="0">
+            <a:pPr marL="0" indent="0">
               <a:buNone/>
             </a:pPr>
             <a:r>
@@ -20964,7 +20671,7 @@
           <a:bodyPr wrap="square" rtlCol="0" anchor="ctr"/>
           <a:lstStyle/>
           <a:p>
-            <a:pPr indent="0" marL="0">
+            <a:pPr marL="0" indent="0">
               <a:lnSpc>
                 <a:spcPct val="115000"/>
               </a:lnSpc>
@@ -21011,7 +20718,7 @@
             <a:prstDash val="solid"/>
           </a:ln>
           <a:effectLst>
-            <a:outerShdw sx="100000" sy="100000" kx="0" ky="0" algn="bl" rotWithShape="0" blurRad="127000" dist="38100" dir="5400000">
+            <a:outerShdw blurRad="127000" dist="38100" dir="5400000" algn="bl" rotWithShape="0">
               <a:srgbClr val="1B4332">
                 <a:alpha val="10000"/>
               </a:srgbClr>
@@ -21041,14 +20748,14 @@
       </p:sp>
       <p:pic>
         <p:nvPicPr>
-          <p:cNvPr id="16" name="Image 2" descr="/home/claude/carboncheck/icons/lightbulb.png">    </p:cNvPr>
+          <p:cNvPr id="16" name="Image 2" descr="/home/claude/carboncheck/icons/lightbulb.png"/>
           <p:cNvPicPr>
             <a:picLocks noChangeAspect="1"/>
           </p:cNvPicPr>
           <p:nvPr/>
         </p:nvPicPr>
         <p:blipFill>
-          <a:blip r:embed="rId4"/>
+          <a:blip r:embed="rId6"/>
           <a:stretch>
             <a:fillRect/>
           </a:stretch>
@@ -21084,7 +20791,7 @@
           <a:bodyPr wrap="square" rtlCol="0" anchor="ctr"/>
           <a:lstStyle/>
           <a:p>
-            <a:pPr indent="0" marL="0">
+            <a:pPr marL="0" indent="0">
               <a:buNone/>
             </a:pPr>
             <a:r>
@@ -21123,7 +20830,7 @@
           <a:bodyPr wrap="square" rtlCol="0" anchor="ctr"/>
           <a:lstStyle/>
           <a:p>
-            <a:pPr indent="0" marL="0">
+            <a:pPr marL="0" indent="0">
               <a:lnSpc>
                 <a:spcPct val="115000"/>
               </a:lnSpc>
@@ -21170,7 +20877,7 @@
             <a:prstDash val="solid"/>
           </a:ln>
           <a:effectLst>
-            <a:outerShdw sx="100000" sy="100000" kx="0" ky="0" algn="bl" rotWithShape="0" blurRad="127000" dist="38100" dir="5400000">
+            <a:outerShdw blurRad="127000" dist="38100" dir="5400000" algn="bl" rotWithShape="0">
               <a:srgbClr val="1B4332">
                 <a:alpha val="10000"/>
               </a:srgbClr>
@@ -21200,14 +20907,14 @@
       </p:sp>
       <p:pic>
         <p:nvPicPr>
-          <p:cNvPr id="21" name="Image 3" descr="/home/claude/carboncheck/icons/seedling.png">    </p:cNvPr>
+          <p:cNvPr id="21" name="Image 3" descr="/home/claude/carboncheck/icons/seedling.png"/>
           <p:cNvPicPr>
             <a:picLocks noChangeAspect="1"/>
           </p:cNvPicPr>
           <p:nvPr/>
         </p:nvPicPr>
         <p:blipFill>
-          <a:blip r:embed="rId5"/>
+          <a:blip r:embed="rId7"/>
           <a:stretch>
             <a:fillRect/>
           </a:stretch>
@@ -21243,7 +20950,7 @@
           <a:bodyPr wrap="square" rtlCol="0" anchor="ctr"/>
           <a:lstStyle/>
           <a:p>
-            <a:pPr indent="0" marL="0">
+            <a:pPr marL="0" indent="0">
               <a:buNone/>
             </a:pPr>
             <a:r>
@@ -21282,7 +20989,7 @@
           <a:bodyPr wrap="square" rtlCol="0" anchor="ctr"/>
           <a:lstStyle/>
           <a:p>
-            <a:pPr indent="0" marL="0">
+            <a:pPr marL="0" indent="0">
               <a:lnSpc>
                 <a:spcPct val="115000"/>
               </a:lnSpc>
@@ -21329,7 +21036,7 @@
             <a:prstDash val="solid"/>
           </a:ln>
           <a:effectLst>
-            <a:outerShdw sx="100000" sy="100000" kx="0" ky="0" algn="bl" rotWithShape="0" blurRad="127000" dist="38100" dir="5400000">
+            <a:outerShdw blurRad="127000" dist="38100" dir="5400000" algn="bl" rotWithShape="0">
               <a:srgbClr val="1B4332">
                 <a:alpha val="10000"/>
               </a:srgbClr>
@@ -21359,14 +21066,14 @@
       </p:sp>
       <p:pic>
         <p:nvPicPr>
-          <p:cNvPr id="26" name="Image 4" descr="/home/claude/carboncheck/icons/handshake.png">    </p:cNvPr>
+          <p:cNvPr id="26" name="Image 4" descr="/home/claude/carboncheck/icons/handshake.png"/>
           <p:cNvPicPr>
             <a:picLocks noChangeAspect="1"/>
           </p:cNvPicPr>
           <p:nvPr/>
         </p:nvPicPr>
         <p:blipFill>
-          <a:blip r:embed="rId6"/>
+          <a:blip r:embed="rId8"/>
           <a:stretch>
             <a:fillRect/>
           </a:stretch>
@@ -21402,7 +21109,7 @@
           <a:bodyPr wrap="square" rtlCol="0" anchor="ctr"/>
           <a:lstStyle/>
           <a:p>
-            <a:pPr indent="0" marL="0">
+            <a:pPr marL="0" indent="0">
               <a:buNone/>
             </a:pPr>
             <a:r>
@@ -21441,7 +21148,7 @@
           <a:bodyPr wrap="square" rtlCol="0" anchor="ctr"/>
           <a:lstStyle/>
           <a:p>
-            <a:pPr indent="0" marL="0">
+            <a:pPr marL="0" indent="0">
               <a:lnSpc>
                 <a:spcPct val="115000"/>
               </a:lnSpc>
@@ -21483,11 +21190,11 @@
           <a:bodyPr wrap="square" rtlCol="0" anchor="ctr"/>
           <a:lstStyle/>
           <a:p>
-            <a:pPr indent="0" marL="0">
-              <a:buNone/>
-            </a:pPr>
-            <a:r>
-              <a:rPr lang="en-US" sz="900" b="1" spc="200" kern="0" dirty="0">
+            <a:pPr marL="0" indent="0">
+              <a:buNone/>
+            </a:pPr>
+            <a:r>
+              <a:rPr lang="en-US" sz="900" b="1" kern="0" spc="200" dirty="0">
                 <a:solidFill>
                   <a:srgbClr val="8FA69A"/>
                 </a:solidFill>
@@ -21522,7 +21229,7 @@
           <a:bodyPr wrap="square" rtlCol="0" anchor="ctr"/>
           <a:lstStyle/>
           <a:p>
-            <a:pPr algn="r" indent="0" marL="0">
+            <a:pPr marL="0" indent="0" algn="r">
               <a:buNone/>
             </a:pPr>
             <a:r>
@@ -21554,7 +21261,7 @@
     <p:bg>
       <p:bgPr>
         <a:blipFill dpi="0" rotWithShape="1">
-          <a:blip r:embed="rId1">
+          <a:blip r:embed="rId3">
             <a:lum/>
           </a:blip>
           <a:srcRect/>
@@ -21600,11 +21307,11 @@
           <a:bodyPr wrap="square" rtlCol="0" anchor="ctr"/>
           <a:lstStyle/>
           <a:p>
-            <a:pPr indent="0" marL="0">
-              <a:buNone/>
-            </a:pPr>
-            <a:r>
-              <a:rPr lang="en-US" sz="1200" b="1" spc="200" kern="0" dirty="0">
+            <a:pPr marL="0" indent="0">
+              <a:buNone/>
+            </a:pPr>
+            <a:r>
+              <a:rPr lang="en-US" sz="1200" b="1" kern="0" spc="200" dirty="0">
                 <a:solidFill>
                   <a:srgbClr val="2D9C6F"/>
                 </a:solidFill>
@@ -21639,7 +21346,7 @@
           <a:bodyPr wrap="square" rtlCol="0" anchor="ctr"/>
           <a:lstStyle/>
           <a:p>
-            <a:pPr indent="0" marL="0">
+            <a:pPr marL="0" indent="0">
               <a:buNone/>
             </a:pPr>
             <a:r>
@@ -21678,7 +21385,7 @@
           <a:bodyPr wrap="square" rtlCol="0" anchor="ctr"/>
           <a:lstStyle/>
           <a:p>
-            <a:pPr indent="0" marL="0">
+            <a:pPr marL="0" indent="0">
               <a:buNone/>
             </a:pPr>
             <a:r>
@@ -21722,7 +21429,7 @@
             <a:prstDash val="solid"/>
           </a:ln>
           <a:effectLst>
-            <a:outerShdw sx="100000" sy="100000" kx="0" ky="0" algn="bl" rotWithShape="0" blurRad="127000" dist="38100" dir="5400000">
+            <a:outerShdw blurRad="127000" dist="38100" dir="5400000" algn="bl" rotWithShape="0">
               <a:srgbClr val="1B4332">
                 <a:alpha val="10000"/>
               </a:srgbClr>
@@ -21773,7 +21480,7 @@
           <a:bodyPr wrap="square" rtlCol="0" anchor="ctr"/>
           <a:lstStyle/>
           <a:p>
-            <a:pPr algn="ctr" indent="0" marL="0">
+            <a:pPr marL="0" indent="0" algn="ctr">
               <a:buNone/>
             </a:pPr>
             <a:r>
@@ -21812,7 +21519,7 @@
           <a:bodyPr wrap="square" rtlCol="0" anchor="ctr"/>
           <a:lstStyle/>
           <a:p>
-            <a:pPr algn="ctr" indent="0" marL="0">
+            <a:pPr marL="0" indent="0" algn="ctr">
               <a:buNone/>
             </a:pPr>
             <a:r>
@@ -21856,7 +21563,7 @@
             <a:prstDash val="solid"/>
           </a:ln>
           <a:effectLst>
-            <a:outerShdw sx="100000" sy="100000" kx="0" ky="0" algn="bl" rotWithShape="0" blurRad="127000" dist="38100" dir="5400000">
+            <a:outerShdw blurRad="127000" dist="38100" dir="5400000" algn="bl" rotWithShape="0">
               <a:srgbClr val="1B4332">
                 <a:alpha val="10000"/>
               </a:srgbClr>
@@ -21907,7 +21614,7 @@
           <a:bodyPr wrap="square" rtlCol="0" anchor="ctr"/>
           <a:lstStyle/>
           <a:p>
-            <a:pPr algn="ctr" indent="0" marL="0">
+            <a:pPr marL="0" indent="0" algn="ctr">
               <a:buNone/>
             </a:pPr>
             <a:r>
@@ -21946,7 +21653,7 @@
           <a:bodyPr wrap="square" rtlCol="0" anchor="ctr"/>
           <a:lstStyle/>
           <a:p>
-            <a:pPr algn="ctr" indent="0" marL="0">
+            <a:pPr marL="0" indent="0" algn="ctr">
               <a:buNone/>
             </a:pPr>
             <a:r>
@@ -21990,7 +21697,7 @@
             <a:prstDash val="solid"/>
           </a:ln>
           <a:effectLst>
-            <a:outerShdw sx="100000" sy="100000" kx="0" ky="0" algn="bl" rotWithShape="0" blurRad="127000" dist="38100" dir="5400000">
+            <a:outerShdw blurRad="127000" dist="38100" dir="5400000" algn="bl" rotWithShape="0">
               <a:srgbClr val="1B4332">
                 <a:alpha val="10000"/>
               </a:srgbClr>
@@ -22041,7 +21748,7 @@
           <a:bodyPr wrap="square" rtlCol="0" anchor="ctr"/>
           <a:lstStyle/>
           <a:p>
-            <a:pPr algn="ctr" indent="0" marL="0">
+            <a:pPr marL="0" indent="0" algn="ctr">
               <a:buNone/>
             </a:pPr>
             <a:r>
@@ -22080,7 +21787,7 @@
           <a:bodyPr wrap="square" rtlCol="0" anchor="ctr"/>
           <a:lstStyle/>
           <a:p>
-            <a:pPr algn="ctr" indent="0" marL="0">
+            <a:pPr marL="0" indent="0" algn="ctr">
               <a:buNone/>
             </a:pPr>
             <a:r>
@@ -22124,7 +21831,7 @@
             <a:prstDash val="solid"/>
           </a:ln>
           <a:effectLst>
-            <a:outerShdw sx="100000" sy="100000" kx="0" ky="0" algn="bl" rotWithShape="0" blurRad="127000" dist="38100" dir="5400000">
+            <a:outerShdw blurRad="127000" dist="38100" dir="5400000" algn="bl" rotWithShape="0">
               <a:srgbClr val="1B4332">
                 <a:alpha val="10000"/>
               </a:srgbClr>
@@ -22175,7 +21882,7 @@
           <a:bodyPr wrap="square" rtlCol="0" anchor="ctr"/>
           <a:lstStyle/>
           <a:p>
-            <a:pPr algn="ctr" indent="0" marL="0">
+            <a:pPr marL="0" indent="0" algn="ctr">
               <a:buNone/>
             </a:pPr>
             <a:r>
@@ -22214,7 +21921,7 @@
           <a:bodyPr wrap="square" rtlCol="0" anchor="ctr"/>
           <a:lstStyle/>
           <a:p>
-            <a:pPr algn="ctr" indent="0" marL="0">
+            <a:pPr marL="0" indent="0" algn="ctr">
               <a:buNone/>
             </a:pPr>
             <a:r>
@@ -22258,7 +21965,7 @@
             <a:prstDash val="solid"/>
           </a:ln>
           <a:effectLst>
-            <a:outerShdw sx="100000" sy="100000" kx="0" ky="0" algn="bl" rotWithShape="0" blurRad="127000" dist="38100" dir="5400000">
+            <a:outerShdw blurRad="127000" dist="38100" dir="5400000" algn="bl" rotWithShape="0">
               <a:srgbClr val="1B4332">
                 <a:alpha val="10000"/>
               </a:srgbClr>
@@ -22309,7 +22016,7 @@
           <a:bodyPr wrap="square" rtlCol="0" anchor="ctr"/>
           <a:lstStyle/>
           <a:p>
-            <a:pPr algn="ctr" indent="0" marL="0">
+            <a:pPr marL="0" indent="0" algn="ctr">
               <a:buNone/>
             </a:pPr>
             <a:r>
@@ -22348,7 +22055,7 @@
           <a:bodyPr wrap="square" rtlCol="0" anchor="ctr"/>
           <a:lstStyle/>
           <a:p>
-            <a:pPr algn="ctr" indent="0" marL="0">
+            <a:pPr marL="0" indent="0" algn="ctr">
               <a:buNone/>
             </a:pPr>
             <a:r>
@@ -22387,11 +22094,11 @@
           <a:bodyPr wrap="square" rtlCol="0" anchor="ctr"/>
           <a:lstStyle/>
           <a:p>
-            <a:pPr indent="0" marL="0">
-              <a:buNone/>
-            </a:pPr>
-            <a:r>
-              <a:rPr lang="en-US" sz="900" b="1" spc="200" kern="0" dirty="0">
+            <a:pPr marL="0" indent="0">
+              <a:buNone/>
+            </a:pPr>
+            <a:r>
+              <a:rPr lang="en-US" sz="900" b="1" kern="0" spc="200" dirty="0">
                 <a:solidFill>
                   <a:srgbClr val="8FA69A"/>
                 </a:solidFill>
@@ -22426,7 +22133,7 @@
           <a:bodyPr wrap="square" rtlCol="0" anchor="ctr"/>
           <a:lstStyle/>
           <a:p>
-            <a:pPr algn="r" indent="0" marL="0">
+            <a:pPr marL="0" indent="0" algn="r">
               <a:buNone/>
             </a:pPr>
             <a:r>
@@ -22458,7 +22165,7 @@
     <p:bg>
       <p:bgPr>
         <a:blipFill dpi="0" rotWithShape="1">
-          <a:blip r:embed="rId1">
+          <a:blip r:embed="rId3">
             <a:lum/>
           </a:blip>
           <a:srcRect/>
@@ -22504,11 +22211,11 @@
           <a:bodyPr wrap="square" rtlCol="0" anchor="ctr"/>
           <a:lstStyle/>
           <a:p>
-            <a:pPr indent="0" marL="0">
-              <a:buNone/>
-            </a:pPr>
-            <a:r>
-              <a:rPr lang="en-US" sz="1200" b="1" spc="200" kern="0" dirty="0">
+            <a:pPr marL="0" indent="0">
+              <a:buNone/>
+            </a:pPr>
+            <a:r>
+              <a:rPr lang="en-US" sz="1200" b="1" kern="0" spc="200" dirty="0">
                 <a:solidFill>
                   <a:srgbClr val="2D9C6F"/>
                 </a:solidFill>
@@ -22543,7 +22250,7 @@
           <a:bodyPr wrap="square" rtlCol="0" anchor="ctr"/>
           <a:lstStyle/>
           <a:p>
-            <a:pPr indent="0" marL="0">
+            <a:pPr marL="0" indent="0">
               <a:buNone/>
             </a:pPr>
             <a:r>
@@ -22609,7 +22316,7 @@
           <a:bodyPr wrap="square" rtlCol="0" anchor="ctr"/>
           <a:lstStyle/>
           <a:p>
-            <a:pPr indent="0" marL="0">
+            <a:pPr marL="0" indent="0">
               <a:buNone/>
             </a:pPr>
             <a:r>
@@ -22629,14 +22336,14 @@
       </p:sp>
       <p:pic>
         <p:nvPicPr>
-          <p:cNvPr id="6" name="Image 0" descr="/home/claude/carboncheck/icons/xmark.png">    </p:cNvPr>
+          <p:cNvPr id="6" name="Image 0" descr="/home/claude/carboncheck/icons/xmark.png"/>
           <p:cNvPicPr>
             <a:picLocks noChangeAspect="1"/>
           </p:cNvPicPr>
           <p:nvPr/>
         </p:nvPicPr>
         <p:blipFill>
-          <a:blip r:embed="rId2"/>
+          <a:blip r:embed="rId4"/>
           <a:stretch>
             <a:fillRect/>
           </a:stretch>
@@ -22672,7 +22379,7 @@
           <a:bodyPr wrap="square" rtlCol="0" anchor="ctr"/>
           <a:lstStyle/>
           <a:p>
-            <a:pPr indent="0" marL="0">
+            <a:pPr marL="0" indent="0">
               <a:buNone/>
             </a:pPr>
             <a:r>
@@ -22692,14 +22399,14 @@
       </p:sp>
       <p:pic>
         <p:nvPicPr>
-          <p:cNvPr id="8" name="Image 1" descr="/home/claude/carboncheck/icons/check_white.png">    </p:cNvPr>
+          <p:cNvPr id="8" name="Image 1" descr="/home/claude/carboncheck/icons/check_white.png"/>
           <p:cNvPicPr>
             <a:picLocks noChangeAspect="1"/>
           </p:cNvPicPr>
           <p:nvPr/>
         </p:nvPicPr>
         <p:blipFill>
-          <a:blip r:embed="rId3"/>
+          <a:blip r:embed="rId5"/>
           <a:stretch>
             <a:fillRect/>
           </a:stretch>
@@ -22735,7 +22442,7 @@
           <a:bodyPr wrap="square" rtlCol="0" anchor="ctr"/>
           <a:lstStyle/>
           <a:p>
-            <a:pPr indent="0" marL="0">
+            <a:pPr marL="0" indent="0">
               <a:buNone/>
             </a:pPr>
             <a:r>
@@ -22799,7 +22506,7 @@
           <a:bodyPr wrap="square" rtlCol="0" anchor="ctr"/>
           <a:lstStyle/>
           <a:p>
-            <a:pPr indent="0" marL="0">
+            <a:pPr marL="0" indent="0">
               <a:buNone/>
             </a:pPr>
             <a:r>
@@ -22838,7 +22545,7 @@
           <a:bodyPr wrap="square" rtlCol="0" anchor="ctr"/>
           <a:lstStyle/>
           <a:p>
-            <a:pPr indent="0" marL="0">
+            <a:pPr marL="0" indent="0">
               <a:buNone/>
             </a:pPr>
             <a:r>
@@ -22877,7 +22584,7 @@
           <a:bodyPr wrap="square" rtlCol="0" anchor="ctr"/>
           <a:lstStyle/>
           <a:p>
-            <a:pPr indent="0" marL="0">
+            <a:pPr marL="0" indent="0">
               <a:buNone/>
             </a:pPr>
             <a:r>
@@ -22941,7 +22648,7 @@
           <a:bodyPr wrap="square" rtlCol="0" anchor="ctr"/>
           <a:lstStyle/>
           <a:p>
-            <a:pPr indent="0" marL="0">
+            <a:pPr marL="0" indent="0">
               <a:buNone/>
             </a:pPr>
             <a:r>
@@ -22980,7 +22687,7 @@
           <a:bodyPr wrap="square" rtlCol="0" anchor="ctr"/>
           <a:lstStyle/>
           <a:p>
-            <a:pPr indent="0" marL="0">
+            <a:pPr marL="0" indent="0">
               <a:buNone/>
             </a:pPr>
             <a:r>
@@ -23019,7 +22726,7 @@
           <a:bodyPr wrap="square" rtlCol="0" anchor="ctr"/>
           <a:lstStyle/>
           <a:p>
-            <a:pPr indent="0" marL="0">
+            <a:pPr marL="0" indent="0">
               <a:buNone/>
             </a:pPr>
             <a:r>
@@ -23083,7 +22790,7 @@
           <a:bodyPr wrap="square" rtlCol="0" anchor="ctr"/>
           <a:lstStyle/>
           <a:p>
-            <a:pPr indent="0" marL="0">
+            <a:pPr marL="0" indent="0">
               <a:buNone/>
             </a:pPr>
             <a:r>
@@ -23122,7 +22829,7 @@
           <a:bodyPr wrap="square" rtlCol="0" anchor="ctr"/>
           <a:lstStyle/>
           <a:p>
-            <a:pPr indent="0" marL="0">
+            <a:pPr marL="0" indent="0">
               <a:buNone/>
             </a:pPr>
             <a:r>
@@ -23161,7 +22868,7 @@
           <a:bodyPr wrap="square" rtlCol="0" anchor="ctr"/>
           <a:lstStyle/>
           <a:p>
-            <a:pPr indent="0" marL="0">
+            <a:pPr marL="0" indent="0">
               <a:buNone/>
             </a:pPr>
             <a:r>
@@ -23225,7 +22932,7 @@
           <a:bodyPr wrap="square" rtlCol="0" anchor="ctr"/>
           <a:lstStyle/>
           <a:p>
-            <a:pPr indent="0" marL="0">
+            <a:pPr marL="0" indent="0">
               <a:buNone/>
             </a:pPr>
             <a:r>
@@ -23264,7 +22971,7 @@
           <a:bodyPr wrap="square" rtlCol="0" anchor="ctr"/>
           <a:lstStyle/>
           <a:p>
-            <a:pPr indent="0" marL="0">
+            <a:pPr marL="0" indent="0">
               <a:buNone/>
             </a:pPr>
             <a:r>
@@ -23303,7 +23010,7 @@
           <a:bodyPr wrap="square" rtlCol="0" anchor="ctr"/>
           <a:lstStyle/>
           <a:p>
-            <a:pPr indent="0" marL="0">
+            <a:pPr marL="0" indent="0">
               <a:buNone/>
             </a:pPr>
             <a:r>
@@ -23367,7 +23074,7 @@
           <a:bodyPr wrap="square" rtlCol="0" anchor="ctr"/>
           <a:lstStyle/>
           <a:p>
-            <a:pPr indent="0" marL="0">
+            <a:pPr marL="0" indent="0">
               <a:buNone/>
             </a:pPr>
             <a:r>
@@ -23406,7 +23113,7 @@
           <a:bodyPr wrap="square" rtlCol="0" anchor="ctr"/>
           <a:lstStyle/>
           <a:p>
-            <a:pPr indent="0" marL="0">
+            <a:pPr marL="0" indent="0">
               <a:buNone/>
             </a:pPr>
             <a:r>
@@ -23445,7 +23152,7 @@
           <a:bodyPr wrap="square" rtlCol="0" anchor="ctr"/>
           <a:lstStyle/>
           <a:p>
-            <a:pPr indent="0" marL="0">
+            <a:pPr marL="0" indent="0">
               <a:buNone/>
             </a:pPr>
             <a:r>
@@ -23484,11 +23191,11 @@
           <a:bodyPr wrap="square" rtlCol="0" anchor="ctr"/>
           <a:lstStyle/>
           <a:p>
-            <a:pPr indent="0" marL="0">
-              <a:buNone/>
-            </a:pPr>
-            <a:r>
-              <a:rPr lang="en-US" sz="900" b="1" spc="200" kern="0" dirty="0">
+            <a:pPr marL="0" indent="0">
+              <a:buNone/>
+            </a:pPr>
+            <a:r>
+              <a:rPr lang="en-US" sz="900" b="1" kern="0" spc="200" dirty="0">
                 <a:solidFill>
                   <a:srgbClr val="8FA69A"/>
                 </a:solidFill>
@@ -23523,7 +23230,7 @@
           <a:bodyPr wrap="square" rtlCol="0" anchor="ctr"/>
           <a:lstStyle/>
           <a:p>
-            <a:pPr algn="r" indent="0" marL="0">
+            <a:pPr marL="0" indent="0" algn="r">
               <a:buNone/>
             </a:pPr>
             <a:r>
@@ -23555,7 +23262,7 @@
     <p:bg>
       <p:bgPr>
         <a:blipFill dpi="0" rotWithShape="1">
-          <a:blip r:embed="rId1">
+          <a:blip r:embed="rId3">
             <a:lum/>
           </a:blip>
           <a:srcRect/>
@@ -23601,11 +23308,11 @@
           <a:bodyPr wrap="square" rtlCol="0" anchor="ctr"/>
           <a:lstStyle/>
           <a:p>
-            <a:pPr indent="0" marL="0">
-              <a:buNone/>
-            </a:pPr>
-            <a:r>
-              <a:rPr lang="en-US" sz="1200" b="1" spc="200" kern="0" dirty="0">
+            <a:pPr marL="0" indent="0">
+              <a:buNone/>
+            </a:pPr>
+            <a:r>
+              <a:rPr lang="en-US" sz="1200" b="1" kern="0" spc="200" dirty="0">
                 <a:solidFill>
                   <a:srgbClr val="2D9C6F"/>
                 </a:solidFill>
@@ -23640,7 +23347,7 @@
           <a:bodyPr wrap="square" rtlCol="0" anchor="ctr"/>
           <a:lstStyle/>
           <a:p>
-            <a:pPr indent="0" marL="0">
+            <a:pPr marL="0" indent="0">
               <a:buNone/>
             </a:pPr>
             <a:r>
@@ -23684,7 +23391,7 @@
             <a:prstDash val="solid"/>
           </a:ln>
           <a:effectLst>
-            <a:outerShdw sx="100000" sy="100000" kx="0" ky="0" algn="bl" rotWithShape="0" blurRad="127000" dist="38100" dir="5400000">
+            <a:outerShdw blurRad="127000" dist="38100" dir="5400000" algn="bl" rotWithShape="0">
               <a:srgbClr val="1B4332">
                 <a:alpha val="10000"/>
               </a:srgbClr>
@@ -23694,14 +23401,14 @@
       </p:sp>
       <p:pic>
         <p:nvPicPr>
-          <p:cNvPr id="5" name="Image 0" descr="/home/claude/carboncheck/icons/users.png">    </p:cNvPr>
+          <p:cNvPr id="5" name="Image 0" descr="/home/claude/carboncheck/icons/users.png"/>
           <p:cNvPicPr>
             <a:picLocks noChangeAspect="1"/>
           </p:cNvPicPr>
           <p:nvPr/>
         </p:nvPicPr>
         <p:blipFill>
-          <a:blip r:embed="rId2"/>
+          <a:blip r:embed="rId4"/>
           <a:stretch>
             <a:fillRect/>
           </a:stretch>
@@ -23737,7 +23444,7 @@
           <a:bodyPr wrap="square" rtlCol="0" anchor="t"/>
           <a:lstStyle/>
           <a:p>
-            <a:pPr algn="ctr" indent="0" marL="0">
+            <a:pPr marL="0" indent="0" algn="ctr">
               <a:buNone/>
             </a:pPr>
             <a:r>
@@ -23757,14 +23464,14 @@
       </p:sp>
       <p:pic>
         <p:nvPicPr>
-          <p:cNvPr id="7" name="Image 1" descr="/home/claude/carboncheck/icons/arrow_right.png">    </p:cNvPr>
+          <p:cNvPr id="7" name="Image 1" descr="/home/claude/carboncheck/icons/arrow_right.png"/>
           <p:cNvPicPr>
             <a:picLocks noChangeAspect="1"/>
           </p:cNvPicPr>
           <p:nvPr/>
         </p:nvPicPr>
         <p:blipFill>
-          <a:blip r:embed="rId3"/>
+          <a:blip r:embed="rId5"/>
           <a:stretch>
             <a:fillRect/>
           </a:stretch>
@@ -23805,7 +23512,7 @@
             <a:prstDash val="solid"/>
           </a:ln>
           <a:effectLst>
-            <a:outerShdw sx="100000" sy="100000" kx="0" ky="0" algn="bl" rotWithShape="0" blurRad="127000" dist="38100" dir="5400000">
+            <a:outerShdw blurRad="127000" dist="38100" dir="5400000" algn="bl" rotWithShape="0">
               <a:srgbClr val="1B4332">
                 <a:alpha val="10000"/>
               </a:srgbClr>
@@ -23815,14 +23522,14 @@
       </p:sp>
       <p:pic>
         <p:nvPicPr>
-          <p:cNvPr id="9" name="Image 2" descr="/home/claude/carboncheck/icons/code.png">    </p:cNvPr>
+          <p:cNvPr id="9" name="Image 2" descr="/home/claude/carboncheck/icons/code.png"/>
           <p:cNvPicPr>
             <a:picLocks noChangeAspect="1"/>
           </p:cNvPicPr>
           <p:nvPr/>
         </p:nvPicPr>
         <p:blipFill>
-          <a:blip r:embed="rId4"/>
+          <a:blip r:embed="rId6"/>
           <a:stretch>
             <a:fillRect/>
           </a:stretch>
@@ -23858,7 +23565,7 @@
           <a:bodyPr wrap="square" rtlCol="0" anchor="t"/>
           <a:lstStyle/>
           <a:p>
-            <a:pPr algn="ctr" indent="0" marL="0">
+            <a:pPr marL="0" indent="0" algn="ctr">
               <a:buNone/>
             </a:pPr>
             <a:r>
@@ -23878,7 +23585,7 @@
       </p:sp>
       <p:pic>
         <p:nvPicPr>
-          <p:cNvPr id="11" name="Image 3" descr="/home/claude/carboncheck/icons/arrow_right.png">    </p:cNvPr>
+          <p:cNvPr id="11" name="Image 3" descr="/home/claude/carboncheck/icons/arrow_right.png"/>
           <p:cNvPicPr>
             <a:picLocks noChangeAspect="1"/>
           </p:cNvPicPr>
@@ -23926,7 +23633,7 @@
             <a:prstDash val="solid"/>
           </a:ln>
           <a:effectLst>
-            <a:outerShdw sx="100000" sy="100000" kx="0" ky="0" algn="bl" rotWithShape="0" blurRad="127000" dist="38100" dir="5400000">
+            <a:outerShdw blurRad="127000" dist="38100" dir="5400000" algn="bl" rotWithShape="0">
               <a:srgbClr val="1B4332">
                 <a:alpha val="10000"/>
               </a:srgbClr>
@@ -23936,14 +23643,14 @@
       </p:sp>
       <p:pic>
         <p:nvPicPr>
-          <p:cNvPr id="13" name="Image 4" descr="/home/claude/carboncheck/icons/server.png">    </p:cNvPr>
+          <p:cNvPr id="13" name="Image 4" descr="/home/claude/carboncheck/icons/server.png"/>
           <p:cNvPicPr>
             <a:picLocks noChangeAspect="1"/>
           </p:cNvPicPr>
           <p:nvPr/>
         </p:nvPicPr>
         <p:blipFill>
-          <a:blip r:embed="rId6"/>
+          <a:blip r:embed="rId7"/>
           <a:stretch>
             <a:fillRect/>
           </a:stretch>
@@ -23979,7 +23686,7 @@
           <a:bodyPr wrap="square" rtlCol="0" anchor="t"/>
           <a:lstStyle/>
           <a:p>
-            <a:pPr algn="ctr" indent="0" marL="0">
+            <a:pPr marL="0" indent="0" algn="ctr">
               <a:buNone/>
             </a:pPr>
             <a:r>
@@ -23999,14 +23706,14 @@
       </p:sp>
       <p:pic>
         <p:nvPicPr>
-          <p:cNvPr id="15" name="Image 5" descr="/home/claude/carboncheck/icons/arrow_right.png">    </p:cNvPr>
+          <p:cNvPr id="15" name="Image 5" descr="/home/claude/carboncheck/icons/arrow_right.png"/>
           <p:cNvPicPr>
             <a:picLocks noChangeAspect="1"/>
           </p:cNvPicPr>
           <p:nvPr/>
         </p:nvPicPr>
         <p:blipFill>
-          <a:blip r:embed="rId7"/>
+          <a:blip r:embed="rId5"/>
           <a:stretch>
             <a:fillRect/>
           </a:stretch>
@@ -24047,7 +23754,7 @@
             <a:prstDash val="solid"/>
           </a:ln>
           <a:effectLst>
-            <a:outerShdw sx="100000" sy="100000" kx="0" ky="0" algn="bl" rotWithShape="0" blurRad="127000" dist="38100" dir="5400000">
+            <a:outerShdw blurRad="127000" dist="38100" dir="5400000" algn="bl" rotWithShape="0">
               <a:srgbClr val="1B4332">
                 <a:alpha val="10000"/>
               </a:srgbClr>
@@ -24057,7 +23764,7 @@
       </p:sp>
       <p:pic>
         <p:nvPicPr>
-          <p:cNvPr id="17" name="Image 6" descr="/home/claude/carboncheck/icons/brain.png">    </p:cNvPr>
+          <p:cNvPr id="17" name="Image 6" descr="/home/claude/carboncheck/icons/brain.png"/>
           <p:cNvPicPr>
             <a:picLocks noChangeAspect="1"/>
           </p:cNvPicPr>
@@ -24100,7 +23807,7 @@
           <a:bodyPr wrap="square" rtlCol="0" anchor="t"/>
           <a:lstStyle/>
           <a:p>
-            <a:pPr algn="ctr" indent="0" marL="0">
+            <a:pPr marL="0" indent="0" algn="ctr">
               <a:buNone/>
             </a:pPr>
             <a:r>
@@ -24120,7 +23827,7 @@
       </p:sp>
       <p:pic>
         <p:nvPicPr>
-          <p:cNvPr id="19" name="Image 7" descr="/home/claude/carboncheck/icons/arrow_down.png">    </p:cNvPr>
+          <p:cNvPr id="19" name="Image 7" descr="/home/claude/carboncheck/icons/arrow_down.png"/>
           <p:cNvPicPr>
             <a:picLocks noChangeAspect="1"/>
           </p:cNvPicPr>
@@ -24168,7 +23875,7 @@
             <a:prstDash val="solid"/>
           </a:ln>
           <a:effectLst>
-            <a:outerShdw sx="100000" sy="100000" kx="0" ky="0" algn="bl" rotWithShape="0" blurRad="127000" dist="38100" dir="5400000">
+            <a:outerShdw blurRad="127000" dist="38100" dir="5400000" algn="bl" rotWithShape="0">
               <a:srgbClr val="1B4332">
                 <a:alpha val="10000"/>
               </a:srgbClr>
@@ -24178,7 +23885,7 @@
       </p:sp>
       <p:pic>
         <p:nvPicPr>
-          <p:cNvPr id="21" name="Image 8" descr="/home/claude/carboncheck/icons/gauge.png">    </p:cNvPr>
+          <p:cNvPr id="21" name="Image 8" descr="/home/claude/carboncheck/icons/gauge.png"/>
           <p:cNvPicPr>
             <a:picLocks noChangeAspect="1"/>
           </p:cNvPicPr>
@@ -24221,7 +23928,7 @@
           <a:bodyPr wrap="square" rtlCol="0" anchor="t"/>
           <a:lstStyle/>
           <a:p>
-            <a:pPr algn="ctr" indent="0" marL="0">
+            <a:pPr marL="0" indent="0" algn="ctr">
               <a:buNone/>
             </a:pPr>
             <a:r>
@@ -24241,14 +23948,14 @@
       </p:sp>
       <p:pic>
         <p:nvPicPr>
-          <p:cNvPr id="23" name="Image 9" descr="/home/claude/carboncheck/icons/arrow_right.png">    </p:cNvPr>
+          <p:cNvPr id="23" name="Image 9" descr="/home/claude/carboncheck/icons/arrow_right.png"/>
           <p:cNvPicPr>
             <a:picLocks noChangeAspect="1"/>
           </p:cNvPicPr>
           <p:nvPr/>
         </p:nvPicPr>
         <p:blipFill>
-          <a:blip r:embed="rId11"/>
+          <a:blip r:embed="rId5"/>
           <a:stretch>
             <a:fillRect/>
           </a:stretch>
@@ -24289,7 +23996,7 @@
             <a:prstDash val="solid"/>
           </a:ln>
           <a:effectLst>
-            <a:outerShdw sx="100000" sy="100000" kx="0" ky="0" algn="bl" rotWithShape="0" blurRad="127000" dist="38100" dir="5400000">
+            <a:outerShdw blurRad="127000" dist="38100" dir="5400000" algn="bl" rotWithShape="0">
               <a:srgbClr val="1B4332">
                 <a:alpha val="10000"/>
               </a:srgbClr>
@@ -24299,14 +24006,14 @@
       </p:sp>
       <p:pic>
         <p:nvPicPr>
-          <p:cNvPr id="25" name="Image 10" descr="/home/claude/carboncheck/icons/chart.png">    </p:cNvPr>
+          <p:cNvPr id="25" name="Image 10" descr="/home/claude/carboncheck/icons/chart.png"/>
           <p:cNvPicPr>
             <a:picLocks noChangeAspect="1"/>
           </p:cNvPicPr>
           <p:nvPr/>
         </p:nvPicPr>
         <p:blipFill>
-          <a:blip r:embed="rId12"/>
+          <a:blip r:embed="rId11"/>
           <a:stretch>
             <a:fillRect/>
           </a:stretch>
@@ -24342,7 +24049,7 @@
           <a:bodyPr wrap="square" rtlCol="0" anchor="t"/>
           <a:lstStyle/>
           <a:p>
-            <a:pPr algn="ctr" indent="0" marL="0">
+            <a:pPr marL="0" indent="0" algn="ctr">
               <a:buNone/>
             </a:pPr>
             <a:r>
@@ -24362,14 +24069,14 @@
       </p:sp>
       <p:pic>
         <p:nvPicPr>
-          <p:cNvPr id="27" name="Image 11" descr="/home/claude/carboncheck/icons/arrow_right.png">    </p:cNvPr>
+          <p:cNvPr id="27" name="Image 11" descr="/home/claude/carboncheck/icons/arrow_right.png"/>
           <p:cNvPicPr>
             <a:picLocks noChangeAspect="1"/>
           </p:cNvPicPr>
           <p:nvPr/>
         </p:nvPicPr>
         <p:blipFill>
-          <a:blip r:embed="rId13"/>
+          <a:blip r:embed="rId5"/>
           <a:stretch>
             <a:fillRect/>
           </a:stretch>
@@ -24410,7 +24117,7 @@
             <a:prstDash val="solid"/>
           </a:ln>
           <a:effectLst>
-            <a:outerShdw sx="100000" sy="100000" kx="0" ky="0" algn="bl" rotWithShape="0" blurRad="127000" dist="38100" dir="5400000">
+            <a:outerShdw blurRad="127000" dist="38100" dir="5400000" algn="bl" rotWithShape="0">
               <a:srgbClr val="1B4332">
                 <a:alpha val="10000"/>
               </a:srgbClr>
@@ -24420,14 +24127,14 @@
       </p:sp>
       <p:pic>
         <p:nvPicPr>
-          <p:cNvPr id="29" name="Image 12" descr="/home/claude/carboncheck/icons/lightbulb.png">    </p:cNvPr>
+          <p:cNvPr id="29" name="Image 12" descr="/home/claude/carboncheck/icons/lightbulb.png"/>
           <p:cNvPicPr>
             <a:picLocks noChangeAspect="1"/>
           </p:cNvPicPr>
           <p:nvPr/>
         </p:nvPicPr>
         <p:blipFill>
-          <a:blip r:embed="rId14"/>
+          <a:blip r:embed="rId12"/>
           <a:stretch>
             <a:fillRect/>
           </a:stretch>
@@ -24463,7 +24170,7 @@
           <a:bodyPr wrap="square" rtlCol="0" anchor="t"/>
           <a:lstStyle/>
           <a:p>
-            <a:pPr algn="ctr" indent="0" marL="0">
+            <a:pPr marL="0" indent="0" algn="ctr">
               <a:buNone/>
             </a:pPr>
             <a:r>
@@ -24502,11 +24209,11 @@
           <a:bodyPr wrap="square" rtlCol="0" anchor="ctr"/>
           <a:lstStyle/>
           <a:p>
-            <a:pPr indent="0" marL="0">
-              <a:buNone/>
-            </a:pPr>
-            <a:r>
-              <a:rPr lang="en-US" sz="900" b="1" spc="200" kern="0" dirty="0">
+            <a:pPr marL="0" indent="0">
+              <a:buNone/>
+            </a:pPr>
+            <a:r>
+              <a:rPr lang="en-US" sz="900" b="1" kern="0" spc="200" dirty="0">
                 <a:solidFill>
                   <a:srgbClr val="8FA69A"/>
                 </a:solidFill>
@@ -24541,7 +24248,7 @@
           <a:bodyPr wrap="square" rtlCol="0" anchor="ctr"/>
           <a:lstStyle/>
           <a:p>
-            <a:pPr algn="r" indent="0" marL="0">
+            <a:pPr marL="0" indent="0" algn="r">
               <a:buNone/>
             </a:pPr>
             <a:r>
@@ -24573,7 +24280,7 @@
     <p:bg>
       <p:bgPr>
         <a:blipFill dpi="0" rotWithShape="1">
-          <a:blip r:embed="rId1">
+          <a:blip r:embed="rId3">
             <a:lum/>
           </a:blip>
           <a:srcRect/>
@@ -24619,11 +24326,11 @@
           <a:bodyPr wrap="square" rtlCol="0" anchor="ctr"/>
           <a:lstStyle/>
           <a:p>
-            <a:pPr indent="0" marL="0">
-              <a:buNone/>
-            </a:pPr>
-            <a:r>
-              <a:rPr lang="en-US" sz="1200" b="1" spc="200" kern="0" dirty="0">
+            <a:pPr marL="0" indent="0">
+              <a:buNone/>
+            </a:pPr>
+            <a:r>
+              <a:rPr lang="en-US" sz="1200" b="1" kern="0" spc="200" dirty="0">
                 <a:solidFill>
                   <a:srgbClr val="2D9C6F"/>
                 </a:solidFill>
@@ -24658,7 +24365,7 @@
           <a:bodyPr wrap="square" rtlCol="0" anchor="ctr"/>
           <a:lstStyle/>
           <a:p>
-            <a:pPr indent="0" marL="0">
+            <a:pPr marL="0" indent="0">
               <a:buNone/>
             </a:pPr>
             <a:r>
@@ -24702,7 +24409,7 @@
             <a:prstDash val="solid"/>
           </a:ln>
           <a:effectLst>
-            <a:outerShdw sx="100000" sy="100000" kx="0" ky="0" algn="bl" rotWithShape="0" blurRad="127000" dist="38100" dir="5400000">
+            <a:outerShdw blurRad="127000" dist="38100" dir="5400000" algn="bl" rotWithShape="0">
               <a:srgbClr val="1B4332">
                 <a:alpha val="10000"/>
               </a:srgbClr>
@@ -24732,14 +24439,14 @@
       </p:sp>
       <p:pic>
         <p:nvPicPr>
-          <p:cNvPr id="6" name="Image 0" descr="/home/claude/carboncheck/icons/react_logo.png">    </p:cNvPr>
+          <p:cNvPr id="6" name="Image 0" descr="/home/claude/carboncheck/icons/react_logo.png"/>
           <p:cNvPicPr>
             <a:picLocks noChangeAspect="1"/>
           </p:cNvPicPr>
           <p:nvPr/>
         </p:nvPicPr>
         <p:blipFill>
-          <a:blip r:embed="rId2"/>
+          <a:blip r:embed="rId4"/>
           <a:stretch>
             <a:fillRect/>
           </a:stretch>
@@ -24775,7 +24482,7 @@
           <a:bodyPr wrap="square" rtlCol="0" anchor="ctr"/>
           <a:lstStyle/>
           <a:p>
-            <a:pPr algn="ctr" indent="0" marL="0">
+            <a:pPr marL="0" indent="0" algn="ctr">
               <a:buNone/>
             </a:pPr>
             <a:r>
@@ -24834,7 +24541,7 @@
           <a:bodyPr wrap="square" rtlCol="0" anchor="ctr"/>
           <a:lstStyle/>
           <a:p>
-            <a:pPr indent="0" marL="0">
+            <a:pPr marL="0" indent="0">
               <a:buNone/>
             </a:pPr>
             <a:r>
@@ -24893,7 +24600,7 @@
           <a:bodyPr wrap="square" rtlCol="0" anchor="ctr"/>
           <a:lstStyle/>
           <a:p>
-            <a:pPr indent="0" marL="0">
+            <a:pPr marL="0" indent="0">
               <a:buNone/>
             </a:pPr>
             <a:r>
@@ -24952,7 +24659,7 @@
           <a:bodyPr wrap="square" rtlCol="0" anchor="ctr"/>
           <a:lstStyle/>
           <a:p>
-            <a:pPr indent="0" marL="0">
+            <a:pPr marL="0" indent="0">
               <a:buNone/>
             </a:pPr>
             <a:r>
@@ -25011,7 +24718,7 @@
           <a:bodyPr wrap="square" rtlCol="0" anchor="ctr"/>
           <a:lstStyle/>
           <a:p>
-            <a:pPr indent="0" marL="0">
+            <a:pPr marL="0" indent="0">
               <a:buNone/>
             </a:pPr>
             <a:r>
@@ -25070,7 +24777,7 @@
           <a:bodyPr wrap="square" rtlCol="0" anchor="ctr"/>
           <a:lstStyle/>
           <a:p>
-            <a:pPr indent="0" marL="0">
+            <a:pPr marL="0" indent="0">
               <a:buNone/>
             </a:pPr>
             <a:r>
@@ -25114,7 +24821,7 @@
             <a:prstDash val="solid"/>
           </a:ln>
           <a:effectLst>
-            <a:outerShdw sx="100000" sy="100000" kx="0" ky="0" algn="bl" rotWithShape="0" blurRad="127000" dist="38100" dir="5400000">
+            <a:outerShdw blurRad="127000" dist="38100" dir="5400000" algn="bl" rotWithShape="0">
               <a:srgbClr val="1B4332">
                 <a:alpha val="10000"/>
               </a:srgbClr>
@@ -25144,14 +24851,14 @@
       </p:sp>
       <p:pic>
         <p:nvPicPr>
-          <p:cNvPr id="20" name="Image 1" descr="/home/claude/carboncheck/icons/server.png">    </p:cNvPr>
+          <p:cNvPr id="20" name="Image 1" descr="/home/claude/carboncheck/icons/server.png"/>
           <p:cNvPicPr>
             <a:picLocks noChangeAspect="1"/>
           </p:cNvPicPr>
           <p:nvPr/>
         </p:nvPicPr>
         <p:blipFill>
-          <a:blip r:embed="rId3"/>
+          <a:blip r:embed="rId5"/>
           <a:stretch>
             <a:fillRect/>
           </a:stretch>
@@ -25187,7 +24894,7 @@
           <a:bodyPr wrap="square" rtlCol="0" anchor="ctr"/>
           <a:lstStyle/>
           <a:p>
-            <a:pPr algn="ctr" indent="0" marL="0">
+            <a:pPr marL="0" indent="0" algn="ctr">
               <a:buNone/>
             </a:pPr>
             <a:r>
@@ -25246,7 +24953,7 @@
           <a:bodyPr wrap="square" rtlCol="0" anchor="ctr"/>
           <a:lstStyle/>
           <a:p>
-            <a:pPr indent="0" marL="0">
+            <a:pPr marL="0" indent="0">
               <a:buNone/>
             </a:pPr>
             <a:r>
@@ -25305,7 +25012,7 @@
           <a:bodyPr wrap="square" rtlCol="0" anchor="ctr"/>
           <a:lstStyle/>
           <a:p>
-            <a:pPr indent="0" marL="0">
+            <a:pPr marL="0" indent="0">
               <a:buNone/>
             </a:pPr>
             <a:r>
@@ -25349,7 +25056,7 @@
             <a:prstDash val="solid"/>
           </a:ln>
           <a:effectLst>
-            <a:outerShdw sx="100000" sy="100000" kx="0" ky="0" algn="bl" rotWithShape="0" blurRad="127000" dist="38100" dir="5400000">
+            <a:outerShdw blurRad="127000" dist="38100" dir="5400000" algn="bl" rotWithShape="0">
               <a:srgbClr val="1B4332">
                 <a:alpha val="10000"/>
               </a:srgbClr>
@@ -25379,14 +25086,14 @@
       </p:sp>
       <p:pic>
         <p:nvPicPr>
-          <p:cNvPr id="28" name="Image 2" descr="/home/claude/carboncheck/icons/database.png">    </p:cNvPr>
+          <p:cNvPr id="28" name="Image 2" descr="/home/claude/carboncheck/icons/database.png"/>
           <p:cNvPicPr>
             <a:picLocks noChangeAspect="1"/>
           </p:cNvPicPr>
           <p:nvPr/>
         </p:nvPicPr>
         <p:blipFill>
-          <a:blip r:embed="rId4"/>
+          <a:blip r:embed="rId6"/>
           <a:stretch>
             <a:fillRect/>
           </a:stretch>
@@ -25422,7 +25129,7 @@
           <a:bodyPr wrap="square" rtlCol="0" anchor="ctr"/>
           <a:lstStyle/>
           <a:p>
-            <a:pPr algn="ctr" indent="0" marL="0">
+            <a:pPr marL="0" indent="0" algn="ctr">
               <a:buNone/>
             </a:pPr>
             <a:r>
@@ -25481,7 +25188,7 @@
           <a:bodyPr wrap="square" rtlCol="0" anchor="ctr"/>
           <a:lstStyle/>
           <a:p>
-            <a:pPr indent="0" marL="0">
+            <a:pPr marL="0" indent="0">
               <a:buNone/>
             </a:pPr>
             <a:r>
@@ -25525,7 +25232,7 @@
             <a:prstDash val="solid"/>
           </a:ln>
           <a:effectLst>
-            <a:outerShdw sx="100000" sy="100000" kx="0" ky="0" algn="bl" rotWithShape="0" blurRad="127000" dist="38100" dir="5400000">
+            <a:outerShdw blurRad="127000" dist="38100" dir="5400000" algn="bl" rotWithShape="0">
               <a:srgbClr val="1B4332">
                 <a:alpha val="10000"/>
               </a:srgbClr>
@@ -25555,14 +25262,14 @@
       </p:sp>
       <p:pic>
         <p:nvPicPr>
-          <p:cNvPr id="34" name="Image 3" descr="/home/claude/carboncheck/icons/flask.png">    </p:cNvPr>
+          <p:cNvPr id="34" name="Image 3" descr="/home/claude/carboncheck/icons/flask.png"/>
           <p:cNvPicPr>
             <a:picLocks noChangeAspect="1"/>
           </p:cNvPicPr>
           <p:nvPr/>
         </p:nvPicPr>
         <p:blipFill>
-          <a:blip r:embed="rId5"/>
+          <a:blip r:embed="rId7"/>
           <a:stretch>
             <a:fillRect/>
           </a:stretch>
@@ -25598,7 +25305,7 @@
           <a:bodyPr wrap="square" rtlCol="0" anchor="ctr"/>
           <a:lstStyle/>
           <a:p>
-            <a:pPr algn="ctr" indent="0" marL="0">
+            <a:pPr marL="0" indent="0" algn="ctr">
               <a:buNone/>
             </a:pPr>
             <a:r>
@@ -25657,7 +25364,7 @@
           <a:bodyPr wrap="square" rtlCol="0" anchor="ctr"/>
           <a:lstStyle/>
           <a:p>
-            <a:pPr indent="0" marL="0">
+            <a:pPr marL="0" indent="0">
               <a:buNone/>
             </a:pPr>
             <a:r>
@@ -25716,7 +25423,7 @@
           <a:bodyPr wrap="square" rtlCol="0" anchor="ctr"/>
           <a:lstStyle/>
           <a:p>
-            <a:pPr indent="0" marL="0">
+            <a:pPr marL="0" indent="0">
               <a:buNone/>
             </a:pPr>
             <a:r>
@@ -25775,7 +25482,7 @@
           <a:bodyPr wrap="square" rtlCol="0" anchor="ctr"/>
           <a:lstStyle/>
           <a:p>
-            <a:pPr indent="0" marL="0">
+            <a:pPr marL="0" indent="0">
               <a:buNone/>
             </a:pPr>
             <a:r>
@@ -25814,11 +25521,11 @@
           <a:bodyPr wrap="square" rtlCol="0" anchor="ctr"/>
           <a:lstStyle/>
           <a:p>
-            <a:pPr indent="0" marL="0">
-              <a:buNone/>
-            </a:pPr>
-            <a:r>
-              <a:rPr lang="en-US" sz="900" b="1" spc="200" kern="0" dirty="0">
+            <a:pPr marL="0" indent="0">
+              <a:buNone/>
+            </a:pPr>
+            <a:r>
+              <a:rPr lang="en-US" sz="900" b="1" kern="0" spc="200" dirty="0">
                 <a:solidFill>
                   <a:srgbClr val="8FA69A"/>
                 </a:solidFill>
@@ -25853,7 +25560,7 @@
           <a:bodyPr wrap="square" rtlCol="0" anchor="ctr"/>
           <a:lstStyle/>
           <a:p>
-            <a:pPr algn="r" indent="0" marL="0">
+            <a:pPr marL="0" indent="0" algn="r">
               <a:buNone/>
             </a:pPr>
             <a:r>
@@ -26172,4 +25879,299 @@
     </a:ext>
   </a:extLst>
 </a:theme>
+</file>
+
+<file path=ppt/theme/theme2.xml><?xml version="1.0" encoding="utf-8"?>
+<a:theme xmlns:a="http://schemas.openxmlformats.org/drawingml/2006/main" name="Office Theme">
+  <a:themeElements>
+    <a:clrScheme name="Office">
+      <a:dk1>
+        <a:sysClr val="windowText" lastClr="000000"/>
+      </a:dk1>
+      <a:lt1>
+        <a:sysClr val="window" lastClr="FFFFFF"/>
+      </a:lt1>
+      <a:dk2>
+        <a:srgbClr val="44546A"/>
+      </a:dk2>
+      <a:lt2>
+        <a:srgbClr val="E7E6E6"/>
+      </a:lt2>
+      <a:accent1>
+        <a:srgbClr val="4472C4"/>
+      </a:accent1>
+      <a:accent2>
+        <a:srgbClr val="ED7D31"/>
+      </a:accent2>
+      <a:accent3>
+        <a:srgbClr val="A5A5A5"/>
+      </a:accent3>
+      <a:accent4>
+        <a:srgbClr val="FFC000"/>
+      </a:accent4>
+      <a:accent5>
+        <a:srgbClr val="5B9BD5"/>
+      </a:accent5>
+      <a:accent6>
+        <a:srgbClr val="70AD47"/>
+      </a:accent6>
+      <a:hlink>
+        <a:srgbClr val="0563C1"/>
+      </a:hlink>
+      <a:folHlink>
+        <a:srgbClr val="954F72"/>
+      </a:folHlink>
+    </a:clrScheme>
+    <a:fontScheme name="Office">
+      <a:majorFont>
+        <a:latin typeface="Calibri Light" panose="020F0302020204030204"/>
+        <a:ea typeface=""/>
+        <a:cs typeface=""/>
+        <a:font script="Jpan" typeface="游ゴシック Light"/>
+        <a:font script="Hang" typeface="맑은 고딕"/>
+        <a:font script="Hans" typeface="等线 Light"/>
+        <a:font script="Hant" typeface="新細明體"/>
+        <a:font script="Arab" typeface="Times New Roman"/>
+        <a:font script="Hebr" typeface="Times New Roman"/>
+        <a:font script="Thai" typeface="Angsana New"/>
+        <a:font script="Ethi" typeface="Nyala"/>
+        <a:font script="Beng" typeface="Vrinda"/>
+        <a:font script="Gujr" typeface="Shruti"/>
+        <a:font script="Khmr" typeface="MoolBoran"/>
+        <a:font script="Knda" typeface="Tunga"/>
+        <a:font script="Guru" typeface="Raavi"/>
+        <a:font script="Cans" typeface="Euphemia"/>
+        <a:font script="Cher" typeface="Plantagenet Cherokee"/>
+        <a:font script="Yiii" typeface="Microsoft Yi Baiti"/>
+        <a:font script="Tibt" typeface="Microsoft Himalaya"/>
+        <a:font script="Thaa" typeface="MV Boli"/>
+        <a:font script="Deva" typeface="Mangal"/>
+        <a:font script="Telu" typeface="Gautami"/>
+        <a:font script="Taml" typeface="Latha"/>
+        <a:font script="Syrc" typeface="Estrangelo Edessa"/>
+        <a:font script="Orya" typeface="Kalinga"/>
+        <a:font script="Mlym" typeface="Kartika"/>
+        <a:font script="Laoo" typeface="DokChampa"/>
+        <a:font script="Sinh" typeface="Iskoola Pota"/>
+        <a:font script="Mong" typeface="Mongolian Baiti"/>
+        <a:font script="Viet" typeface="Times New Roman"/>
+        <a:font script="Uigh" typeface="Microsoft Uighur"/>
+        <a:font script="Geor" typeface="Sylfaen"/>
+        <a:font script="Armn" typeface="Arial"/>
+        <a:font script="Bugi" typeface="Leelawadee UI"/>
+        <a:font script="Bopo" typeface="Microsoft JhengHei"/>
+        <a:font script="Java" typeface="Javanese Text"/>
+        <a:font script="Lisu" typeface="Segoe UI"/>
+        <a:font script="Mymr" typeface="Myanmar Text"/>
+        <a:font script="Nkoo" typeface="Ebrima"/>
+        <a:font script="Olck" typeface="Nirmala UI"/>
+        <a:font script="Osma" typeface="Ebrima"/>
+        <a:font script="Phag" typeface="Phagspa"/>
+        <a:font script="Syrn" typeface="Estrangelo Edessa"/>
+        <a:font script="Syrj" typeface="Estrangelo Edessa"/>
+        <a:font script="Syre" typeface="Estrangelo Edessa"/>
+        <a:font script="Sora" typeface="Nirmala UI"/>
+        <a:font script="Tale" typeface="Microsoft Tai Le"/>
+        <a:font script="Talu" typeface="Microsoft New Tai Lue"/>
+        <a:font script="Tfng" typeface="Ebrima"/>
+      </a:majorFont>
+      <a:minorFont>
+        <a:latin typeface="Calibri" panose="020F0502020204030204"/>
+        <a:ea typeface=""/>
+        <a:cs typeface=""/>
+        <a:font script="Jpan" typeface="游ゴシック"/>
+        <a:font script="Hang" typeface="맑은 고딕"/>
+        <a:font script="Hans" typeface="等线"/>
+        <a:font script="Hant" typeface="新細明體"/>
+        <a:font script="Arab" typeface="Arial"/>
+        <a:font script="Hebr" typeface="Arial"/>
+        <a:font script="Thai" typeface="Cordia New"/>
+        <a:font script="Ethi" typeface="Nyala"/>
+        <a:font script="Beng" typeface="Vrinda"/>
+        <a:font script="Gujr" typeface="Shruti"/>
+        <a:font script="Khmr" typeface="DaunPenh"/>
+        <a:font script="Knda" typeface="Tunga"/>
+        <a:font script="Guru" typeface="Raavi"/>
+        <a:font script="Cans" typeface="Euphemia"/>
+        <a:font script="Cher" typeface="Plantagenet Cherokee"/>
+        <a:font script="Yiii" typeface="Microsoft Yi Baiti"/>
+        <a:font script="Tibt" typeface="Microsoft Himalaya"/>
+        <a:font script="Thaa" typeface="MV Boli"/>
+        <a:font script="Deva" typeface="Mangal"/>
+        <a:font script="Telu" typeface="Gautami"/>
+        <a:font script="Taml" typeface="Latha"/>
+        <a:font script="Syrc" typeface="Estrangelo Edessa"/>
+        <a:font script="Orya" typeface="Kalinga"/>
+        <a:font script="Mlym" typeface="Kartika"/>
+        <a:font script="Laoo" typeface="DokChampa"/>
+        <a:font script="Sinh" typeface="Iskoola Pota"/>
+        <a:font script="Mong" typeface="Mongolian Baiti"/>
+        <a:font script="Viet" typeface="Arial"/>
+        <a:font script="Uigh" typeface="Microsoft Uighur"/>
+        <a:font script="Geor" typeface="Sylfaen"/>
+        <a:font script="Armn" typeface="Arial"/>
+        <a:font script="Bugi" typeface="Leelawadee UI"/>
+        <a:font script="Bopo" typeface="Microsoft JhengHei"/>
+        <a:font script="Java" typeface="Javanese Text"/>
+        <a:font script="Lisu" typeface="Segoe UI"/>
+        <a:font script="Mymr" typeface="Myanmar Text"/>
+        <a:font script="Nkoo" typeface="Ebrima"/>
+        <a:font script="Olck" typeface="Nirmala UI"/>
+        <a:font script="Osma" typeface="Ebrima"/>
+        <a:font script="Phag" typeface="Phagspa"/>
+        <a:font script="Syrn" typeface="Estrangelo Edessa"/>
+        <a:font script="Syrj" typeface="Estrangelo Edessa"/>
+        <a:font script="Syre" typeface="Estrangelo Edessa"/>
+        <a:font script="Sora" typeface="Nirmala UI"/>
+        <a:font script="Tale" typeface="Microsoft Tai Le"/>
+        <a:font script="Talu" typeface="Microsoft New Tai Lue"/>
+        <a:font script="Tfng" typeface="Ebrima"/>
+      </a:minorFont>
+    </a:fontScheme>
+    <a:fmtScheme name="Office">
+      <a:fillStyleLst>
+        <a:solidFill>
+          <a:schemeClr val="phClr"/>
+        </a:solidFill>
+        <a:gradFill rotWithShape="1">
+          <a:gsLst>
+            <a:gs pos="0">
+              <a:schemeClr val="phClr">
+                <a:lumMod val="110000"/>
+                <a:satMod val="105000"/>
+                <a:tint val="67000"/>
+              </a:schemeClr>
+            </a:gs>
+            <a:gs pos="50000">
+              <a:schemeClr val="phClr">
+                <a:lumMod val="105000"/>
+                <a:satMod val="103000"/>
+                <a:tint val="73000"/>
+              </a:schemeClr>
+            </a:gs>
+            <a:gs pos="100000">
+              <a:schemeClr val="phClr">
+                <a:lumMod val="105000"/>
+                <a:satMod val="109000"/>
+                <a:tint val="81000"/>
+              </a:schemeClr>
+            </a:gs>
+          </a:gsLst>
+          <a:lin ang="5400000" scaled="0"/>
+        </a:gradFill>
+        <a:gradFill rotWithShape="1">
+          <a:gsLst>
+            <a:gs pos="0">
+              <a:schemeClr val="phClr">
+                <a:satMod val="103000"/>
+                <a:lumMod val="102000"/>
+                <a:tint val="94000"/>
+              </a:schemeClr>
+            </a:gs>
+            <a:gs pos="50000">
+              <a:schemeClr val="phClr">
+                <a:satMod val="110000"/>
+                <a:lumMod val="100000"/>
+                <a:shade val="100000"/>
+              </a:schemeClr>
+            </a:gs>
+            <a:gs pos="100000">
+              <a:schemeClr val="phClr">
+                <a:lumMod val="99000"/>
+                <a:satMod val="120000"/>
+                <a:shade val="78000"/>
+              </a:schemeClr>
+            </a:gs>
+          </a:gsLst>
+          <a:lin ang="5400000" scaled="0"/>
+        </a:gradFill>
+      </a:fillStyleLst>
+      <a:lnStyleLst>
+        <a:ln w="6350" cap="flat" cmpd="sng" algn="ctr">
+          <a:solidFill>
+            <a:schemeClr val="phClr"/>
+          </a:solidFill>
+          <a:prstDash val="solid"/>
+          <a:miter lim="800000"/>
+        </a:ln>
+        <a:ln w="12700" cap="flat" cmpd="sng" algn="ctr">
+          <a:solidFill>
+            <a:schemeClr val="phClr"/>
+          </a:solidFill>
+          <a:prstDash val="solid"/>
+          <a:miter lim="800000"/>
+        </a:ln>
+        <a:ln w="19050" cap="flat" cmpd="sng" algn="ctr">
+          <a:solidFill>
+            <a:schemeClr val="phClr"/>
+          </a:solidFill>
+          <a:prstDash val="solid"/>
+          <a:miter lim="800000"/>
+        </a:ln>
+      </a:lnStyleLst>
+      <a:effectStyleLst>
+        <a:effectStyle>
+          <a:effectLst/>
+        </a:effectStyle>
+        <a:effectStyle>
+          <a:effectLst/>
+        </a:effectStyle>
+        <a:effectStyle>
+          <a:effectLst>
+            <a:outerShdw blurRad="57150" dist="19050" dir="5400000" algn="ctr" rotWithShape="0">
+              <a:srgbClr val="000000">
+                <a:alpha val="63000"/>
+              </a:srgbClr>
+            </a:outerShdw>
+          </a:effectLst>
+        </a:effectStyle>
+      </a:effectStyleLst>
+      <a:bgFillStyleLst>
+        <a:solidFill>
+          <a:schemeClr val="phClr"/>
+        </a:solidFill>
+        <a:solidFill>
+          <a:schemeClr val="phClr">
+            <a:tint val="95000"/>
+            <a:satMod val="170000"/>
+          </a:schemeClr>
+        </a:solidFill>
+        <a:gradFill rotWithShape="1">
+          <a:gsLst>
+            <a:gs pos="0">
+              <a:schemeClr val="phClr">
+                <a:tint val="93000"/>
+                <a:satMod val="150000"/>
+                <a:shade val="98000"/>
+                <a:lumMod val="102000"/>
+              </a:schemeClr>
+            </a:gs>
+            <a:gs pos="50000">
+              <a:schemeClr val="phClr">
+                <a:tint val="98000"/>
+                <a:satMod val="130000"/>
+                <a:shade val="90000"/>
+                <a:lumMod val="103000"/>
+              </a:schemeClr>
+            </a:gs>
+            <a:gs pos="100000">
+              <a:schemeClr val="phClr">
+                <a:shade val="63000"/>
+                <a:satMod val="120000"/>
+              </a:schemeClr>
+            </a:gs>
+          </a:gsLst>
+          <a:lin ang="5400000" scaled="0"/>
+        </a:gradFill>
+      </a:bgFillStyleLst>
+    </a:fmtScheme>
+  </a:themeElements>
+  <a:objectDefaults/>
+  <a:extraClrSchemeLst/>
+  <a:extLst>
+    <a:ext uri="{05A4C25C-085E-4340-85A3-A5531E510DB2}">
+      <thm15:themeFamily xmlns:thm15="http://schemas.microsoft.com/office/thememl/2012/main" name="Office Theme" id="{62F939B6-93AF-4DB8-9C6B-D6C7DFDC589F}" vid="{4A3C46E8-61CC-4603-A589-7422A47A8E4A}"/>
+    </a:ext>
+  </a:extLst>
+</a:theme>
 </file>